--- a/assets/images/2023-08-16-algorithm_study_00/HuShing 그림자료 part2.pptx
+++ b/assets/images/2023-08-16-algorithm_study_00/HuShing 그림자료 part2.pptx
@@ -117,6 +117,11 @@
       </a:defRPr>
     </a:lvl9pPr>
   </p:defaultTextStyle>
+  <p:extLst>
+    <p:ext uri="{EFAFB233-063F-42B5-8137-9DF3F51BA10A}">
+      <p15:sldGuideLst xmlns:p15="http://schemas.microsoft.com/office/powerpoint/2012/main"/>
+    </p:ext>
+  </p:extLst>
 </p:presentation>
 </file>
 
@@ -267,7 +272,7 @@
           <a:p>
             <a:fld id="{C4F5C417-606D-4FC6-889C-9008C6AA0E23}" type="datetimeFigureOut">
               <a:rPr lang="ko-KR" altLang="en-US" smtClean="0"/>
-              <a:t>2023-08-31</a:t>
+              <a:t>2023-09-05</a:t>
             </a:fld>
             <a:endParaRPr lang="ko-KR" altLang="en-US"/>
           </a:p>
@@ -465,7 +470,7 @@
           <a:p>
             <a:fld id="{C4F5C417-606D-4FC6-889C-9008C6AA0E23}" type="datetimeFigureOut">
               <a:rPr lang="ko-KR" altLang="en-US" smtClean="0"/>
-              <a:t>2023-08-31</a:t>
+              <a:t>2023-09-05</a:t>
             </a:fld>
             <a:endParaRPr lang="ko-KR" altLang="en-US"/>
           </a:p>
@@ -673,7 +678,7 @@
           <a:p>
             <a:fld id="{C4F5C417-606D-4FC6-889C-9008C6AA0E23}" type="datetimeFigureOut">
               <a:rPr lang="ko-KR" altLang="en-US" smtClean="0"/>
-              <a:t>2023-08-31</a:t>
+              <a:t>2023-09-05</a:t>
             </a:fld>
             <a:endParaRPr lang="ko-KR" altLang="en-US"/>
           </a:p>
@@ -871,7 +876,7 @@
           <a:p>
             <a:fld id="{C4F5C417-606D-4FC6-889C-9008C6AA0E23}" type="datetimeFigureOut">
               <a:rPr lang="ko-KR" altLang="en-US" smtClean="0"/>
-              <a:t>2023-08-31</a:t>
+              <a:t>2023-09-05</a:t>
             </a:fld>
             <a:endParaRPr lang="ko-KR" altLang="en-US"/>
           </a:p>
@@ -1146,7 +1151,7 @@
           <a:p>
             <a:fld id="{C4F5C417-606D-4FC6-889C-9008C6AA0E23}" type="datetimeFigureOut">
               <a:rPr lang="ko-KR" altLang="en-US" smtClean="0"/>
-              <a:t>2023-08-31</a:t>
+              <a:t>2023-09-05</a:t>
             </a:fld>
             <a:endParaRPr lang="ko-KR" altLang="en-US"/>
           </a:p>
@@ -1411,7 +1416,7 @@
           <a:p>
             <a:fld id="{C4F5C417-606D-4FC6-889C-9008C6AA0E23}" type="datetimeFigureOut">
               <a:rPr lang="ko-KR" altLang="en-US" smtClean="0"/>
-              <a:t>2023-08-31</a:t>
+              <a:t>2023-09-05</a:t>
             </a:fld>
             <a:endParaRPr lang="ko-KR" altLang="en-US"/>
           </a:p>
@@ -1823,7 +1828,7 @@
           <a:p>
             <a:fld id="{C4F5C417-606D-4FC6-889C-9008C6AA0E23}" type="datetimeFigureOut">
               <a:rPr lang="ko-KR" altLang="en-US" smtClean="0"/>
-              <a:t>2023-08-31</a:t>
+              <a:t>2023-09-05</a:t>
             </a:fld>
             <a:endParaRPr lang="ko-KR" altLang="en-US"/>
           </a:p>
@@ -1964,7 +1969,7 @@
           <a:p>
             <a:fld id="{C4F5C417-606D-4FC6-889C-9008C6AA0E23}" type="datetimeFigureOut">
               <a:rPr lang="ko-KR" altLang="en-US" smtClean="0"/>
-              <a:t>2023-08-31</a:t>
+              <a:t>2023-09-05</a:t>
             </a:fld>
             <a:endParaRPr lang="ko-KR" altLang="en-US"/>
           </a:p>
@@ -2077,7 +2082,7 @@
           <a:p>
             <a:fld id="{C4F5C417-606D-4FC6-889C-9008C6AA0E23}" type="datetimeFigureOut">
               <a:rPr lang="ko-KR" altLang="en-US" smtClean="0"/>
-              <a:t>2023-08-31</a:t>
+              <a:t>2023-09-05</a:t>
             </a:fld>
             <a:endParaRPr lang="ko-KR" altLang="en-US"/>
           </a:p>
@@ -2388,7 +2393,7 @@
           <a:p>
             <a:fld id="{C4F5C417-606D-4FC6-889C-9008C6AA0E23}" type="datetimeFigureOut">
               <a:rPr lang="ko-KR" altLang="en-US" smtClean="0"/>
-              <a:t>2023-08-31</a:t>
+              <a:t>2023-09-05</a:t>
             </a:fld>
             <a:endParaRPr lang="ko-KR" altLang="en-US"/>
           </a:p>
@@ -2676,7 +2681,7 @@
           <a:p>
             <a:fld id="{C4F5C417-606D-4FC6-889C-9008C6AA0E23}" type="datetimeFigureOut">
               <a:rPr lang="ko-KR" altLang="en-US" smtClean="0"/>
-              <a:t>2023-08-31</a:t>
+              <a:t>2023-09-05</a:t>
             </a:fld>
             <a:endParaRPr lang="ko-KR" altLang="en-US"/>
           </a:p>
@@ -2917,7 +2922,7 @@
           <a:p>
             <a:fld id="{C4F5C417-606D-4FC6-889C-9008C6AA0E23}" type="datetimeFigureOut">
               <a:rPr lang="ko-KR" altLang="en-US" smtClean="0"/>
-              <a:t>2023-08-31</a:t>
+              <a:t>2023-09-05</a:t>
             </a:fld>
             <a:endParaRPr lang="ko-KR" altLang="en-US"/>
           </a:p>
@@ -3390,8 +3395,8 @@
           </a:p>
         </p:txBody>
       </p:sp>
-      <mc:AlternateContent xmlns:mc="http://schemas.openxmlformats.org/markup-compatibility/2006">
-        <mc:Choice xmlns:a14="http://schemas.microsoft.com/office/drawing/2010/main" Requires="a14">
+      <mc:AlternateContent xmlns:mc="http://schemas.openxmlformats.org/markup-compatibility/2006" xmlns:a14="http://schemas.microsoft.com/office/drawing/2010/main">
+        <mc:Choice Requires="a14">
           <p:sp>
             <p:nvSpPr>
               <p:cNvPr id="5" name="TextBox 4">
@@ -4635,7 +4640,7 @@
             </p:txBody>
           </p:sp>
         </mc:Choice>
-        <mc:Fallback>
+        <mc:Fallback xmlns="">
           <p:sp>
             <p:nvSpPr>
               <p:cNvPr id="5" name="TextBox 4">
@@ -4680,8 +4685,8 @@
           </p:sp>
         </mc:Fallback>
       </mc:AlternateContent>
-      <mc:AlternateContent xmlns:mc="http://schemas.openxmlformats.org/markup-compatibility/2006">
-        <mc:Choice xmlns:a14="http://schemas.microsoft.com/office/drawing/2010/main" Requires="a14">
+      <mc:AlternateContent xmlns:mc="http://schemas.openxmlformats.org/markup-compatibility/2006" xmlns:a14="http://schemas.microsoft.com/office/drawing/2010/main">
+        <mc:Choice Requires="a14">
           <p:sp>
             <p:nvSpPr>
               <p:cNvPr id="129" name="TextBox 128">
@@ -4731,7 +4736,7 @@
             </p:txBody>
           </p:sp>
         </mc:Choice>
-        <mc:Fallback>
+        <mc:Fallback xmlns="">
           <p:sp>
             <p:nvSpPr>
               <p:cNvPr id="129" name="TextBox 128">
@@ -4776,8 +4781,8 @@
           </p:sp>
         </mc:Fallback>
       </mc:AlternateContent>
-      <mc:AlternateContent xmlns:mc="http://schemas.openxmlformats.org/markup-compatibility/2006">
-        <mc:Choice xmlns:a14="http://schemas.microsoft.com/office/drawing/2010/main" Requires="a14">
+      <mc:AlternateContent xmlns:mc="http://schemas.openxmlformats.org/markup-compatibility/2006" xmlns:a14="http://schemas.microsoft.com/office/drawing/2010/main">
+        <mc:Choice Requires="a14">
           <p:sp>
             <p:nvSpPr>
               <p:cNvPr id="130" name="TextBox 129">
@@ -4827,7 +4832,7 @@
             </p:txBody>
           </p:sp>
         </mc:Choice>
-        <mc:Fallback>
+        <mc:Fallback xmlns="">
           <p:sp>
             <p:nvSpPr>
               <p:cNvPr id="130" name="TextBox 129">
@@ -4872,8 +4877,8 @@
           </p:sp>
         </mc:Fallback>
       </mc:AlternateContent>
-      <mc:AlternateContent xmlns:mc="http://schemas.openxmlformats.org/markup-compatibility/2006">
-        <mc:Choice xmlns:a14="http://schemas.microsoft.com/office/drawing/2010/main" Requires="a14">
+      <mc:AlternateContent xmlns:mc="http://schemas.openxmlformats.org/markup-compatibility/2006" xmlns:a14="http://schemas.microsoft.com/office/drawing/2010/main">
+        <mc:Choice Requires="a14">
           <p:sp>
             <p:nvSpPr>
               <p:cNvPr id="131" name="TextBox 130">
@@ -4923,7 +4928,7 @@
             </p:txBody>
           </p:sp>
         </mc:Choice>
-        <mc:Fallback>
+        <mc:Fallback xmlns="">
           <p:sp>
             <p:nvSpPr>
               <p:cNvPr id="131" name="TextBox 130">
@@ -4968,8 +4973,8 @@
           </p:sp>
         </mc:Fallback>
       </mc:AlternateContent>
-      <mc:AlternateContent xmlns:mc="http://schemas.openxmlformats.org/markup-compatibility/2006">
-        <mc:Choice xmlns:a14="http://schemas.microsoft.com/office/drawing/2010/main" Requires="a14">
+      <mc:AlternateContent xmlns:mc="http://schemas.openxmlformats.org/markup-compatibility/2006" xmlns:a14="http://schemas.microsoft.com/office/drawing/2010/main">
+        <mc:Choice Requires="a14">
           <p:sp>
             <p:nvSpPr>
               <p:cNvPr id="132" name="TextBox 131">
@@ -5019,7 +5024,7 @@
             </p:txBody>
           </p:sp>
         </mc:Choice>
-        <mc:Fallback>
+        <mc:Fallback xmlns="">
           <p:sp>
             <p:nvSpPr>
               <p:cNvPr id="132" name="TextBox 131">
@@ -5064,8 +5069,8 @@
           </p:sp>
         </mc:Fallback>
       </mc:AlternateContent>
-      <mc:AlternateContent xmlns:mc="http://schemas.openxmlformats.org/markup-compatibility/2006">
-        <mc:Choice xmlns:a14="http://schemas.microsoft.com/office/drawing/2010/main" Requires="a14">
+      <mc:AlternateContent xmlns:mc="http://schemas.openxmlformats.org/markup-compatibility/2006" xmlns:a14="http://schemas.microsoft.com/office/drawing/2010/main">
+        <mc:Choice Requires="a14">
           <p:sp>
             <p:nvSpPr>
               <p:cNvPr id="133" name="TextBox 132">
@@ -5115,7 +5120,7 @@
             </p:txBody>
           </p:sp>
         </mc:Choice>
-        <mc:Fallback>
+        <mc:Fallback xmlns="">
           <p:sp>
             <p:nvSpPr>
               <p:cNvPr id="133" name="TextBox 132">
@@ -5160,8 +5165,8 @@
           </p:sp>
         </mc:Fallback>
       </mc:AlternateContent>
-      <mc:AlternateContent xmlns:mc="http://schemas.openxmlformats.org/markup-compatibility/2006">
-        <mc:Choice xmlns:a14="http://schemas.microsoft.com/office/drawing/2010/main" Requires="a14">
+      <mc:AlternateContent xmlns:mc="http://schemas.openxmlformats.org/markup-compatibility/2006" xmlns:a14="http://schemas.microsoft.com/office/drawing/2010/main">
+        <mc:Choice Requires="a14">
           <p:sp>
             <p:nvSpPr>
               <p:cNvPr id="134" name="TextBox 133">
@@ -5211,7 +5216,7 @@
             </p:txBody>
           </p:sp>
         </mc:Choice>
-        <mc:Fallback>
+        <mc:Fallback xmlns="">
           <p:sp>
             <p:nvSpPr>
               <p:cNvPr id="134" name="TextBox 133">
@@ -5256,8 +5261,8 @@
           </p:sp>
         </mc:Fallback>
       </mc:AlternateContent>
-      <mc:AlternateContent xmlns:mc="http://schemas.openxmlformats.org/markup-compatibility/2006">
-        <mc:Choice xmlns:a14="http://schemas.microsoft.com/office/drawing/2010/main" Requires="a14">
+      <mc:AlternateContent xmlns:mc="http://schemas.openxmlformats.org/markup-compatibility/2006" xmlns:a14="http://schemas.microsoft.com/office/drawing/2010/main">
+        <mc:Choice Requires="a14">
           <p:sp>
             <p:nvSpPr>
               <p:cNvPr id="135" name="TextBox 134">
@@ -5307,7 +5312,7 @@
             </p:txBody>
           </p:sp>
         </mc:Choice>
-        <mc:Fallback>
+        <mc:Fallback xmlns="">
           <p:sp>
             <p:nvSpPr>
               <p:cNvPr id="135" name="TextBox 134">
@@ -5352,8 +5357,8 @@
           </p:sp>
         </mc:Fallback>
       </mc:AlternateContent>
-      <mc:AlternateContent xmlns:mc="http://schemas.openxmlformats.org/markup-compatibility/2006">
-        <mc:Choice xmlns:a14="http://schemas.microsoft.com/office/drawing/2010/main" Requires="a14">
+      <mc:AlternateContent xmlns:mc="http://schemas.openxmlformats.org/markup-compatibility/2006" xmlns:a14="http://schemas.microsoft.com/office/drawing/2010/main">
+        <mc:Choice Requires="a14">
           <p:sp>
             <p:nvSpPr>
               <p:cNvPr id="136" name="TextBox 135">
@@ -5403,7 +5408,7 @@
             </p:txBody>
           </p:sp>
         </mc:Choice>
-        <mc:Fallback>
+        <mc:Fallback xmlns="">
           <p:sp>
             <p:nvSpPr>
               <p:cNvPr id="136" name="TextBox 135">
@@ -5448,8 +5453,8 @@
           </p:sp>
         </mc:Fallback>
       </mc:AlternateContent>
-      <mc:AlternateContent xmlns:mc="http://schemas.openxmlformats.org/markup-compatibility/2006">
-        <mc:Choice xmlns:a14="http://schemas.microsoft.com/office/drawing/2010/main" Requires="a14">
+      <mc:AlternateContent xmlns:mc="http://schemas.openxmlformats.org/markup-compatibility/2006" xmlns:a14="http://schemas.microsoft.com/office/drawing/2010/main">
+        <mc:Choice Requires="a14">
           <p:sp>
             <p:nvSpPr>
               <p:cNvPr id="137" name="TextBox 136">
@@ -5518,7 +5523,7 @@
             </p:txBody>
           </p:sp>
         </mc:Choice>
-        <mc:Fallback>
+        <mc:Fallback xmlns="">
           <p:sp>
             <p:nvSpPr>
               <p:cNvPr id="137" name="TextBox 136">
@@ -5563,8 +5568,8 @@
           </p:sp>
         </mc:Fallback>
       </mc:AlternateContent>
-      <mc:AlternateContent xmlns:mc="http://schemas.openxmlformats.org/markup-compatibility/2006">
-        <mc:Choice xmlns:a14="http://schemas.microsoft.com/office/drawing/2010/main" Requires="a14">
+      <mc:AlternateContent xmlns:mc="http://schemas.openxmlformats.org/markup-compatibility/2006" xmlns:a14="http://schemas.microsoft.com/office/drawing/2010/main">
+        <mc:Choice Requires="a14">
           <p:sp>
             <p:nvSpPr>
               <p:cNvPr id="138" name="TextBox 137">
@@ -5633,7 +5638,7 @@
             </p:txBody>
           </p:sp>
         </mc:Choice>
-        <mc:Fallback>
+        <mc:Fallback xmlns="">
           <p:sp>
             <p:nvSpPr>
               <p:cNvPr id="138" name="TextBox 137">
@@ -5678,8 +5683,8 @@
           </p:sp>
         </mc:Fallback>
       </mc:AlternateContent>
-      <mc:AlternateContent xmlns:mc="http://schemas.openxmlformats.org/markup-compatibility/2006">
-        <mc:Choice xmlns:a14="http://schemas.microsoft.com/office/drawing/2010/main" Requires="a14">
+      <mc:AlternateContent xmlns:mc="http://schemas.openxmlformats.org/markup-compatibility/2006" xmlns:a14="http://schemas.microsoft.com/office/drawing/2010/main">
+        <mc:Choice Requires="a14">
           <p:sp>
             <p:nvSpPr>
               <p:cNvPr id="139" name="TextBox 138">
@@ -5748,7 +5753,7 @@
             </p:txBody>
           </p:sp>
         </mc:Choice>
-        <mc:Fallback>
+        <mc:Fallback xmlns="">
           <p:sp>
             <p:nvSpPr>
               <p:cNvPr id="139" name="TextBox 138">
@@ -5793,8 +5798,8 @@
           </p:sp>
         </mc:Fallback>
       </mc:AlternateContent>
-      <mc:AlternateContent xmlns:mc="http://schemas.openxmlformats.org/markup-compatibility/2006">
-        <mc:Choice xmlns:a14="http://schemas.microsoft.com/office/drawing/2010/main" Requires="a14">
+      <mc:AlternateContent xmlns:mc="http://schemas.openxmlformats.org/markup-compatibility/2006" xmlns:a14="http://schemas.microsoft.com/office/drawing/2010/main">
+        <mc:Choice Requires="a14">
           <p:sp>
             <p:nvSpPr>
               <p:cNvPr id="140" name="TextBox 139">
@@ -5863,7 +5868,7 @@
             </p:txBody>
           </p:sp>
         </mc:Choice>
-        <mc:Fallback>
+        <mc:Fallback xmlns="">
           <p:sp>
             <p:nvSpPr>
               <p:cNvPr id="140" name="TextBox 139">
@@ -5908,8 +5913,8 @@
           </p:sp>
         </mc:Fallback>
       </mc:AlternateContent>
-      <mc:AlternateContent xmlns:mc="http://schemas.openxmlformats.org/markup-compatibility/2006">
-        <mc:Choice xmlns:a14="http://schemas.microsoft.com/office/drawing/2010/main" Requires="a14">
+      <mc:AlternateContent xmlns:mc="http://schemas.openxmlformats.org/markup-compatibility/2006" xmlns:a14="http://schemas.microsoft.com/office/drawing/2010/main">
+        <mc:Choice Requires="a14">
           <p:sp>
             <p:nvSpPr>
               <p:cNvPr id="141" name="TextBox 140">
@@ -5978,7 +5983,7 @@
             </p:txBody>
           </p:sp>
         </mc:Choice>
-        <mc:Fallback>
+        <mc:Fallback xmlns="">
           <p:sp>
             <p:nvSpPr>
               <p:cNvPr id="141" name="TextBox 140">
@@ -6023,8 +6028,8 @@
           </p:sp>
         </mc:Fallback>
       </mc:AlternateContent>
-      <mc:AlternateContent xmlns:mc="http://schemas.openxmlformats.org/markup-compatibility/2006">
-        <mc:Choice xmlns:a14="http://schemas.microsoft.com/office/drawing/2010/main" Requires="a14">
+      <mc:AlternateContent xmlns:mc="http://schemas.openxmlformats.org/markup-compatibility/2006" xmlns:a14="http://schemas.microsoft.com/office/drawing/2010/main">
+        <mc:Choice Requires="a14">
           <p:sp>
             <p:nvSpPr>
               <p:cNvPr id="142" name="TextBox 141">
@@ -6093,7 +6098,7 @@
             </p:txBody>
           </p:sp>
         </mc:Choice>
-        <mc:Fallback>
+        <mc:Fallback xmlns="">
           <p:sp>
             <p:nvSpPr>
               <p:cNvPr id="142" name="TextBox 141">
@@ -6138,8 +6143,8 @@
           </p:sp>
         </mc:Fallback>
       </mc:AlternateContent>
-      <mc:AlternateContent xmlns:mc="http://schemas.openxmlformats.org/markup-compatibility/2006">
-        <mc:Choice xmlns:a14="http://schemas.microsoft.com/office/drawing/2010/main" Requires="a14">
+      <mc:AlternateContent xmlns:mc="http://schemas.openxmlformats.org/markup-compatibility/2006" xmlns:a14="http://schemas.microsoft.com/office/drawing/2010/main">
+        <mc:Choice Requires="a14">
           <p:sp>
             <p:nvSpPr>
               <p:cNvPr id="143" name="TextBox 142">
@@ -6208,7 +6213,7 @@
             </p:txBody>
           </p:sp>
         </mc:Choice>
-        <mc:Fallback>
+        <mc:Fallback xmlns="">
           <p:sp>
             <p:nvSpPr>
               <p:cNvPr id="143" name="TextBox 142">
@@ -6253,8 +6258,8 @@
           </p:sp>
         </mc:Fallback>
       </mc:AlternateContent>
-      <mc:AlternateContent xmlns:mc="http://schemas.openxmlformats.org/markup-compatibility/2006">
-        <mc:Choice xmlns:a14="http://schemas.microsoft.com/office/drawing/2010/main" Requires="a14">
+      <mc:AlternateContent xmlns:mc="http://schemas.openxmlformats.org/markup-compatibility/2006" xmlns:a14="http://schemas.microsoft.com/office/drawing/2010/main">
+        <mc:Choice Requires="a14">
           <p:sp>
             <p:nvSpPr>
               <p:cNvPr id="144" name="TextBox 143">
@@ -6323,7 +6328,7 @@
             </p:txBody>
           </p:sp>
         </mc:Choice>
-        <mc:Fallback>
+        <mc:Fallback xmlns="">
           <p:sp>
             <p:nvSpPr>
               <p:cNvPr id="144" name="TextBox 143">
@@ -6368,8 +6373,8 @@
           </p:sp>
         </mc:Fallback>
       </mc:AlternateContent>
-      <mc:AlternateContent xmlns:mc="http://schemas.openxmlformats.org/markup-compatibility/2006">
-        <mc:Choice xmlns:a14="http://schemas.microsoft.com/office/drawing/2010/main" Requires="a14">
+      <mc:AlternateContent xmlns:mc="http://schemas.openxmlformats.org/markup-compatibility/2006" xmlns:a14="http://schemas.microsoft.com/office/drawing/2010/main">
+        <mc:Choice Requires="a14">
           <p:sp>
             <p:nvSpPr>
               <p:cNvPr id="13" name="TextBox 12">
@@ -6419,7 +6424,7 @@
             </p:txBody>
           </p:sp>
         </mc:Choice>
-        <mc:Fallback>
+        <mc:Fallback xmlns="">
           <p:sp>
             <p:nvSpPr>
               <p:cNvPr id="13" name="TextBox 12">
@@ -6500,8 +6505,8 @@
           </a:p>
         </p:txBody>
       </p:sp>
-      <mc:AlternateContent xmlns:mc="http://schemas.openxmlformats.org/markup-compatibility/2006">
-        <mc:Choice xmlns:a14="http://schemas.microsoft.com/office/drawing/2010/main" Requires="a14">
+      <mc:AlternateContent xmlns:mc="http://schemas.openxmlformats.org/markup-compatibility/2006" xmlns:a14="http://schemas.microsoft.com/office/drawing/2010/main">
+        <mc:Choice Requires="a14">
           <p:sp>
             <p:nvSpPr>
               <p:cNvPr id="7" name="TextBox 6">
@@ -6551,7 +6556,7 @@
             </p:txBody>
           </p:sp>
         </mc:Choice>
-        <mc:Fallback>
+        <mc:Fallback xmlns="">
           <p:sp>
             <p:nvSpPr>
               <p:cNvPr id="7" name="TextBox 6">
@@ -6596,8 +6601,8 @@
           </p:sp>
         </mc:Fallback>
       </mc:AlternateContent>
-      <mc:AlternateContent xmlns:mc="http://schemas.openxmlformats.org/markup-compatibility/2006">
-        <mc:Choice xmlns:a14="http://schemas.microsoft.com/office/drawing/2010/main" Requires="a14">
+      <mc:AlternateContent xmlns:mc="http://schemas.openxmlformats.org/markup-compatibility/2006" xmlns:a14="http://schemas.microsoft.com/office/drawing/2010/main">
+        <mc:Choice Requires="a14">
           <p:sp>
             <p:nvSpPr>
               <p:cNvPr id="8" name="TextBox 7">
@@ -6647,7 +6652,7 @@
             </p:txBody>
           </p:sp>
         </mc:Choice>
-        <mc:Fallback>
+        <mc:Fallback xmlns="">
           <p:sp>
             <p:nvSpPr>
               <p:cNvPr id="8" name="TextBox 7">
@@ -6692,8 +6697,8 @@
           </p:sp>
         </mc:Fallback>
       </mc:AlternateContent>
-      <mc:AlternateContent xmlns:mc="http://schemas.openxmlformats.org/markup-compatibility/2006">
-        <mc:Choice xmlns:a14="http://schemas.microsoft.com/office/drawing/2010/main" Requires="a14">
+      <mc:AlternateContent xmlns:mc="http://schemas.openxmlformats.org/markup-compatibility/2006" xmlns:a14="http://schemas.microsoft.com/office/drawing/2010/main">
+        <mc:Choice Requires="a14">
           <p:sp>
             <p:nvSpPr>
               <p:cNvPr id="9" name="TextBox 8">
@@ -6743,7 +6748,7 @@
             </p:txBody>
           </p:sp>
         </mc:Choice>
-        <mc:Fallback>
+        <mc:Fallback xmlns="">
           <p:sp>
             <p:nvSpPr>
               <p:cNvPr id="9" name="TextBox 8">
@@ -6816,7 +6821,6 @@
           </a:bodyPr>
           <a:lstStyle/>
           <a:p>
-            <a:pPr/>
             <a:r>
               <a:rPr lang="en-US" altLang="ko-KR" sz="1400" b="0" dirty="0"/>
               <a:t>3</a:t>
@@ -6824,8 +6828,8 @@
           </a:p>
         </p:txBody>
       </p:sp>
-      <mc:AlternateContent xmlns:mc="http://schemas.openxmlformats.org/markup-compatibility/2006">
-        <mc:Choice xmlns:a14="http://schemas.microsoft.com/office/drawing/2010/main" Requires="a14">
+      <mc:AlternateContent xmlns:mc="http://schemas.openxmlformats.org/markup-compatibility/2006" xmlns:a14="http://schemas.microsoft.com/office/drawing/2010/main">
+        <mc:Choice Requires="a14">
           <p:sp>
             <p:nvSpPr>
               <p:cNvPr id="11" name="TextBox 10">
@@ -6875,7 +6879,7 @@
             </p:txBody>
           </p:sp>
         </mc:Choice>
-        <mc:Fallback>
+        <mc:Fallback xmlns="">
           <p:sp>
             <p:nvSpPr>
               <p:cNvPr id="11" name="TextBox 10">
@@ -7007,8 +7011,8 @@
           </a:fontRef>
         </p:style>
       </p:cxnSp>
-      <mc:AlternateContent xmlns:mc="http://schemas.openxmlformats.org/markup-compatibility/2006">
-        <mc:Choice xmlns:a14="http://schemas.microsoft.com/office/drawing/2010/main" Requires="a14">
+      <mc:AlternateContent xmlns:mc="http://schemas.openxmlformats.org/markup-compatibility/2006" xmlns:a14="http://schemas.microsoft.com/office/drawing/2010/main">
+        <mc:Choice Requires="a14">
           <p:sp>
             <p:nvSpPr>
               <p:cNvPr id="17" name="TextBox 16">
@@ -7077,7 +7081,7 @@
             </p:txBody>
           </p:sp>
         </mc:Choice>
-        <mc:Fallback>
+        <mc:Fallback xmlns="">
           <p:sp>
             <p:nvSpPr>
               <p:cNvPr id="17" name="TextBox 16">
@@ -7122,8 +7126,8 @@
           </p:sp>
         </mc:Fallback>
       </mc:AlternateContent>
-      <mc:AlternateContent xmlns:mc="http://schemas.openxmlformats.org/markup-compatibility/2006">
-        <mc:Choice xmlns:a14="http://schemas.microsoft.com/office/drawing/2010/main" Requires="a14">
+      <mc:AlternateContent xmlns:mc="http://schemas.openxmlformats.org/markup-compatibility/2006" xmlns:a14="http://schemas.microsoft.com/office/drawing/2010/main">
+        <mc:Choice Requires="a14">
           <p:sp>
             <p:nvSpPr>
               <p:cNvPr id="18" name="TextBox 17">
@@ -7192,7 +7196,7 @@
             </p:txBody>
           </p:sp>
         </mc:Choice>
-        <mc:Fallback>
+        <mc:Fallback xmlns="">
           <p:sp>
             <p:nvSpPr>
               <p:cNvPr id="18" name="TextBox 17">
@@ -7237,8 +7241,8 @@
           </p:sp>
         </mc:Fallback>
       </mc:AlternateContent>
-      <mc:AlternateContent xmlns:mc="http://schemas.openxmlformats.org/markup-compatibility/2006">
-        <mc:Choice xmlns:a14="http://schemas.microsoft.com/office/drawing/2010/main" Requires="a14">
+      <mc:AlternateContent xmlns:mc="http://schemas.openxmlformats.org/markup-compatibility/2006" xmlns:a14="http://schemas.microsoft.com/office/drawing/2010/main">
+        <mc:Choice Requires="a14">
           <p:sp>
             <p:nvSpPr>
               <p:cNvPr id="19" name="TextBox 18">
@@ -7307,7 +7311,7 @@
             </p:txBody>
           </p:sp>
         </mc:Choice>
-        <mc:Fallback>
+        <mc:Fallback xmlns="">
           <p:sp>
             <p:nvSpPr>
               <p:cNvPr id="19" name="TextBox 18">
@@ -7352,8 +7356,8 @@
           </p:sp>
         </mc:Fallback>
       </mc:AlternateContent>
-      <mc:AlternateContent xmlns:mc="http://schemas.openxmlformats.org/markup-compatibility/2006">
-        <mc:Choice xmlns:a14="http://schemas.microsoft.com/office/drawing/2010/main" Requires="a14">
+      <mc:AlternateContent xmlns:mc="http://schemas.openxmlformats.org/markup-compatibility/2006" xmlns:a14="http://schemas.microsoft.com/office/drawing/2010/main">
+        <mc:Choice Requires="a14">
           <p:sp>
             <p:nvSpPr>
               <p:cNvPr id="20" name="TextBox 19">
@@ -7422,7 +7426,7 @@
             </p:txBody>
           </p:sp>
         </mc:Choice>
-        <mc:Fallback>
+        <mc:Fallback xmlns="">
           <p:sp>
             <p:nvSpPr>
               <p:cNvPr id="20" name="TextBox 19">
@@ -7467,8 +7471,8 @@
           </p:sp>
         </mc:Fallback>
       </mc:AlternateContent>
-      <mc:AlternateContent xmlns:mc="http://schemas.openxmlformats.org/markup-compatibility/2006">
-        <mc:Choice xmlns:a14="http://schemas.microsoft.com/office/drawing/2010/main" Requires="a14">
+      <mc:AlternateContent xmlns:mc="http://schemas.openxmlformats.org/markup-compatibility/2006" xmlns:a14="http://schemas.microsoft.com/office/drawing/2010/main">
+        <mc:Choice Requires="a14">
           <p:sp>
             <p:nvSpPr>
               <p:cNvPr id="21" name="TextBox 20">
@@ -7537,7 +7541,7 @@
             </p:txBody>
           </p:sp>
         </mc:Choice>
-        <mc:Fallback>
+        <mc:Fallback xmlns="">
           <p:sp>
             <p:nvSpPr>
               <p:cNvPr id="21" name="TextBox 20">
@@ -7582,8 +7586,8 @@
           </p:sp>
         </mc:Fallback>
       </mc:AlternateContent>
-      <mc:AlternateContent xmlns:mc="http://schemas.openxmlformats.org/markup-compatibility/2006">
-        <mc:Choice xmlns:a14="http://schemas.microsoft.com/office/drawing/2010/main" Requires="a14">
+      <mc:AlternateContent xmlns:mc="http://schemas.openxmlformats.org/markup-compatibility/2006" xmlns:a14="http://schemas.microsoft.com/office/drawing/2010/main">
+        <mc:Choice Requires="a14">
           <p:sp>
             <p:nvSpPr>
               <p:cNvPr id="22" name="TextBox 21">
@@ -7652,7 +7656,7 @@
             </p:txBody>
           </p:sp>
         </mc:Choice>
-        <mc:Fallback>
+        <mc:Fallback xmlns="">
           <p:sp>
             <p:nvSpPr>
               <p:cNvPr id="22" name="TextBox 21">
@@ -7833,8 +7837,8 @@
           </a:p>
         </p:txBody>
       </p:sp>
-      <mc:AlternateContent xmlns:mc="http://schemas.openxmlformats.org/markup-compatibility/2006">
-        <mc:Choice xmlns:a14="http://schemas.microsoft.com/office/drawing/2010/main" Requires="a14">
+      <mc:AlternateContent xmlns:mc="http://schemas.openxmlformats.org/markup-compatibility/2006" xmlns:a14="http://schemas.microsoft.com/office/drawing/2010/main">
+        <mc:Choice Requires="a14">
           <p:sp>
             <p:nvSpPr>
               <p:cNvPr id="34" name="TextBox 33">
@@ -7884,7 +7888,7 @@
             </p:txBody>
           </p:sp>
         </mc:Choice>
-        <mc:Fallback>
+        <mc:Fallback xmlns="">
           <p:sp>
             <p:nvSpPr>
               <p:cNvPr id="34" name="TextBox 33">
@@ -7929,8 +7933,8 @@
           </p:sp>
         </mc:Fallback>
       </mc:AlternateContent>
-      <mc:AlternateContent xmlns:mc="http://schemas.openxmlformats.org/markup-compatibility/2006">
-        <mc:Choice xmlns:a14="http://schemas.microsoft.com/office/drawing/2010/main" Requires="a14">
+      <mc:AlternateContent xmlns:mc="http://schemas.openxmlformats.org/markup-compatibility/2006" xmlns:a14="http://schemas.microsoft.com/office/drawing/2010/main">
+        <mc:Choice Requires="a14">
           <p:sp>
             <p:nvSpPr>
               <p:cNvPr id="35" name="TextBox 34">
@@ -7980,7 +7984,7 @@
             </p:txBody>
           </p:sp>
         </mc:Choice>
-        <mc:Fallback>
+        <mc:Fallback xmlns="">
           <p:sp>
             <p:nvSpPr>
               <p:cNvPr id="35" name="TextBox 34">
@@ -8025,8 +8029,8 @@
           </p:sp>
         </mc:Fallback>
       </mc:AlternateContent>
-      <mc:AlternateContent xmlns:mc="http://schemas.openxmlformats.org/markup-compatibility/2006">
-        <mc:Choice xmlns:a14="http://schemas.microsoft.com/office/drawing/2010/main" Requires="a14">
+      <mc:AlternateContent xmlns:mc="http://schemas.openxmlformats.org/markup-compatibility/2006" xmlns:a14="http://schemas.microsoft.com/office/drawing/2010/main">
+        <mc:Choice Requires="a14">
           <p:sp>
             <p:nvSpPr>
               <p:cNvPr id="36" name="TextBox 35">
@@ -8076,7 +8080,7 @@
             </p:txBody>
           </p:sp>
         </mc:Choice>
-        <mc:Fallback>
+        <mc:Fallback xmlns="">
           <p:sp>
             <p:nvSpPr>
               <p:cNvPr id="36" name="TextBox 35">
@@ -8121,8 +8125,8 @@
           </p:sp>
         </mc:Fallback>
       </mc:AlternateContent>
-      <mc:AlternateContent xmlns:mc="http://schemas.openxmlformats.org/markup-compatibility/2006">
-        <mc:Choice xmlns:a14="http://schemas.microsoft.com/office/drawing/2010/main" Requires="a14">
+      <mc:AlternateContent xmlns:mc="http://schemas.openxmlformats.org/markup-compatibility/2006" xmlns:a14="http://schemas.microsoft.com/office/drawing/2010/main">
+        <mc:Choice Requires="a14">
           <p:sp>
             <p:nvSpPr>
               <p:cNvPr id="37" name="TextBox 36">
@@ -8172,7 +8176,7 @@
             </p:txBody>
           </p:sp>
         </mc:Choice>
-        <mc:Fallback>
+        <mc:Fallback xmlns="">
           <p:sp>
             <p:nvSpPr>
               <p:cNvPr id="37" name="TextBox 36">
@@ -8245,7 +8249,6 @@
           </a:bodyPr>
           <a:lstStyle/>
           <a:p>
-            <a:pPr/>
             <a:r>
               <a:rPr lang="en-US" altLang="ko-KR" sz="1400" b="0" dirty="0"/>
               <a:t>4</a:t>
@@ -8253,8 +8256,8 @@
           </a:p>
         </p:txBody>
       </p:sp>
-      <mc:AlternateContent xmlns:mc="http://schemas.openxmlformats.org/markup-compatibility/2006">
-        <mc:Choice xmlns:a14="http://schemas.microsoft.com/office/drawing/2010/main" Requires="a14">
+      <mc:AlternateContent xmlns:mc="http://schemas.openxmlformats.org/markup-compatibility/2006" xmlns:a14="http://schemas.microsoft.com/office/drawing/2010/main">
+        <mc:Choice Requires="a14">
           <p:sp>
             <p:nvSpPr>
               <p:cNvPr id="39" name="TextBox 38">
@@ -8304,7 +8307,7 @@
             </p:txBody>
           </p:sp>
         </mc:Choice>
-        <mc:Fallback>
+        <mc:Fallback xmlns="">
           <p:sp>
             <p:nvSpPr>
               <p:cNvPr id="39" name="TextBox 38">
@@ -8436,8 +8439,8 @@
           </a:fontRef>
         </p:style>
       </p:cxnSp>
-      <mc:AlternateContent xmlns:mc="http://schemas.openxmlformats.org/markup-compatibility/2006">
-        <mc:Choice xmlns:a14="http://schemas.microsoft.com/office/drawing/2010/main" Requires="a14">
+      <mc:AlternateContent xmlns:mc="http://schemas.openxmlformats.org/markup-compatibility/2006" xmlns:a14="http://schemas.microsoft.com/office/drawing/2010/main">
+        <mc:Choice Requires="a14">
           <p:sp>
             <p:nvSpPr>
               <p:cNvPr id="42" name="TextBox 41">
@@ -8506,7 +8509,7 @@
             </p:txBody>
           </p:sp>
         </mc:Choice>
-        <mc:Fallback>
+        <mc:Fallback xmlns="">
           <p:sp>
             <p:nvSpPr>
               <p:cNvPr id="42" name="TextBox 41">
@@ -8551,8 +8554,8 @@
           </p:sp>
         </mc:Fallback>
       </mc:AlternateContent>
-      <mc:AlternateContent xmlns:mc="http://schemas.openxmlformats.org/markup-compatibility/2006">
-        <mc:Choice xmlns:a14="http://schemas.microsoft.com/office/drawing/2010/main" Requires="a14">
+      <mc:AlternateContent xmlns:mc="http://schemas.openxmlformats.org/markup-compatibility/2006" xmlns:a14="http://schemas.microsoft.com/office/drawing/2010/main">
+        <mc:Choice Requires="a14">
           <p:sp>
             <p:nvSpPr>
               <p:cNvPr id="43" name="TextBox 42">
@@ -8621,7 +8624,7 @@
             </p:txBody>
           </p:sp>
         </mc:Choice>
-        <mc:Fallback>
+        <mc:Fallback xmlns="">
           <p:sp>
             <p:nvSpPr>
               <p:cNvPr id="43" name="TextBox 42">
@@ -8666,8 +8669,8 @@
           </p:sp>
         </mc:Fallback>
       </mc:AlternateContent>
-      <mc:AlternateContent xmlns:mc="http://schemas.openxmlformats.org/markup-compatibility/2006">
-        <mc:Choice xmlns:a14="http://schemas.microsoft.com/office/drawing/2010/main" Requires="a14">
+      <mc:AlternateContent xmlns:mc="http://schemas.openxmlformats.org/markup-compatibility/2006" xmlns:a14="http://schemas.microsoft.com/office/drawing/2010/main">
+        <mc:Choice Requires="a14">
           <p:sp>
             <p:nvSpPr>
               <p:cNvPr id="44" name="TextBox 43">
@@ -8736,7 +8739,7 @@
             </p:txBody>
           </p:sp>
         </mc:Choice>
-        <mc:Fallback>
+        <mc:Fallback xmlns="">
           <p:sp>
             <p:nvSpPr>
               <p:cNvPr id="44" name="TextBox 43">
@@ -8781,8 +8784,8 @@
           </p:sp>
         </mc:Fallback>
       </mc:AlternateContent>
-      <mc:AlternateContent xmlns:mc="http://schemas.openxmlformats.org/markup-compatibility/2006">
-        <mc:Choice xmlns:a14="http://schemas.microsoft.com/office/drawing/2010/main" Requires="a14">
+      <mc:AlternateContent xmlns:mc="http://schemas.openxmlformats.org/markup-compatibility/2006" xmlns:a14="http://schemas.microsoft.com/office/drawing/2010/main">
+        <mc:Choice Requires="a14">
           <p:sp>
             <p:nvSpPr>
               <p:cNvPr id="45" name="TextBox 44">
@@ -8851,7 +8854,7 @@
             </p:txBody>
           </p:sp>
         </mc:Choice>
-        <mc:Fallback>
+        <mc:Fallback xmlns="">
           <p:sp>
             <p:nvSpPr>
               <p:cNvPr id="45" name="TextBox 44">
@@ -8896,8 +8899,8 @@
           </p:sp>
         </mc:Fallback>
       </mc:AlternateContent>
-      <mc:AlternateContent xmlns:mc="http://schemas.openxmlformats.org/markup-compatibility/2006">
-        <mc:Choice xmlns:a14="http://schemas.microsoft.com/office/drawing/2010/main" Requires="a14">
+      <mc:AlternateContent xmlns:mc="http://schemas.openxmlformats.org/markup-compatibility/2006" xmlns:a14="http://schemas.microsoft.com/office/drawing/2010/main">
+        <mc:Choice Requires="a14">
           <p:sp>
             <p:nvSpPr>
               <p:cNvPr id="46" name="TextBox 45">
@@ -8966,7 +8969,7 @@
             </p:txBody>
           </p:sp>
         </mc:Choice>
-        <mc:Fallback>
+        <mc:Fallback xmlns="">
           <p:sp>
             <p:nvSpPr>
               <p:cNvPr id="46" name="TextBox 45">
@@ -9011,8 +9014,8 @@
           </p:sp>
         </mc:Fallback>
       </mc:AlternateContent>
-      <mc:AlternateContent xmlns:mc="http://schemas.openxmlformats.org/markup-compatibility/2006">
-        <mc:Choice xmlns:a14="http://schemas.microsoft.com/office/drawing/2010/main" Requires="a14">
+      <mc:AlternateContent xmlns:mc="http://schemas.openxmlformats.org/markup-compatibility/2006" xmlns:a14="http://schemas.microsoft.com/office/drawing/2010/main">
+        <mc:Choice Requires="a14">
           <p:sp>
             <p:nvSpPr>
               <p:cNvPr id="47" name="TextBox 46">
@@ -9081,7 +9084,7 @@
             </p:txBody>
           </p:sp>
         </mc:Choice>
-        <mc:Fallback>
+        <mc:Fallback xmlns="">
           <p:sp>
             <p:nvSpPr>
               <p:cNvPr id="47" name="TextBox 46">
@@ -9262,8 +9265,8 @@
           </a:p>
         </p:txBody>
       </p:sp>
-      <mc:AlternateContent xmlns:mc="http://schemas.openxmlformats.org/markup-compatibility/2006">
-        <mc:Choice xmlns:a14="http://schemas.microsoft.com/office/drawing/2010/main" Requires="a14">
+      <mc:AlternateContent xmlns:mc="http://schemas.openxmlformats.org/markup-compatibility/2006" xmlns:a14="http://schemas.microsoft.com/office/drawing/2010/main">
+        <mc:Choice Requires="a14">
           <p:sp>
             <p:nvSpPr>
               <p:cNvPr id="109" name="TextBox 108">
@@ -9313,7 +9316,7 @@
             </p:txBody>
           </p:sp>
         </mc:Choice>
-        <mc:Fallback>
+        <mc:Fallback xmlns="">
           <p:sp>
             <p:nvSpPr>
               <p:cNvPr id="109" name="TextBox 108">
@@ -9358,8 +9361,8 @@
           </p:sp>
         </mc:Fallback>
       </mc:AlternateContent>
-      <mc:AlternateContent xmlns:mc="http://schemas.openxmlformats.org/markup-compatibility/2006">
-        <mc:Choice xmlns:a14="http://schemas.microsoft.com/office/drawing/2010/main" Requires="a14">
+      <mc:AlternateContent xmlns:mc="http://schemas.openxmlformats.org/markup-compatibility/2006" xmlns:a14="http://schemas.microsoft.com/office/drawing/2010/main">
+        <mc:Choice Requires="a14">
           <p:sp>
             <p:nvSpPr>
               <p:cNvPr id="110" name="TextBox 109">
@@ -9409,7 +9412,7 @@
             </p:txBody>
           </p:sp>
         </mc:Choice>
-        <mc:Fallback>
+        <mc:Fallback xmlns="">
           <p:sp>
             <p:nvSpPr>
               <p:cNvPr id="110" name="TextBox 109">
@@ -9454,8 +9457,8 @@
           </p:sp>
         </mc:Fallback>
       </mc:AlternateContent>
-      <mc:AlternateContent xmlns:mc="http://schemas.openxmlformats.org/markup-compatibility/2006">
-        <mc:Choice xmlns:a14="http://schemas.microsoft.com/office/drawing/2010/main" Requires="a14">
+      <mc:AlternateContent xmlns:mc="http://schemas.openxmlformats.org/markup-compatibility/2006" xmlns:a14="http://schemas.microsoft.com/office/drawing/2010/main">
+        <mc:Choice Requires="a14">
           <p:sp>
             <p:nvSpPr>
               <p:cNvPr id="111" name="TextBox 110">
@@ -9505,7 +9508,7 @@
             </p:txBody>
           </p:sp>
         </mc:Choice>
-        <mc:Fallback>
+        <mc:Fallback xmlns="">
           <p:sp>
             <p:nvSpPr>
               <p:cNvPr id="111" name="TextBox 110">
@@ -9550,8 +9553,8 @@
           </p:sp>
         </mc:Fallback>
       </mc:AlternateContent>
-      <mc:AlternateContent xmlns:mc="http://schemas.openxmlformats.org/markup-compatibility/2006">
-        <mc:Choice xmlns:a14="http://schemas.microsoft.com/office/drawing/2010/main" Requires="a14">
+      <mc:AlternateContent xmlns:mc="http://schemas.openxmlformats.org/markup-compatibility/2006" xmlns:a14="http://schemas.microsoft.com/office/drawing/2010/main">
+        <mc:Choice Requires="a14">
           <p:sp>
             <p:nvSpPr>
               <p:cNvPr id="112" name="TextBox 111">
@@ -9601,7 +9604,7 @@
             </p:txBody>
           </p:sp>
         </mc:Choice>
-        <mc:Fallback>
+        <mc:Fallback xmlns="">
           <p:sp>
             <p:nvSpPr>
               <p:cNvPr id="112" name="TextBox 111">
@@ -9674,7 +9677,6 @@
           </a:bodyPr>
           <a:lstStyle/>
           <a:p>
-            <a:pPr/>
             <a:r>
               <a:rPr lang="en-US" altLang="ko-KR" sz="1400" b="0" dirty="0"/>
               <a:t>3</a:t>
@@ -9682,8 +9684,8 @@
           </a:p>
         </p:txBody>
       </p:sp>
-      <mc:AlternateContent xmlns:mc="http://schemas.openxmlformats.org/markup-compatibility/2006">
-        <mc:Choice xmlns:a14="http://schemas.microsoft.com/office/drawing/2010/main" Requires="a14">
+      <mc:AlternateContent xmlns:mc="http://schemas.openxmlformats.org/markup-compatibility/2006" xmlns:a14="http://schemas.microsoft.com/office/drawing/2010/main">
+        <mc:Choice Requires="a14">
           <p:sp>
             <p:nvSpPr>
               <p:cNvPr id="114" name="TextBox 113">
@@ -9733,7 +9735,7 @@
             </p:txBody>
           </p:sp>
         </mc:Choice>
-        <mc:Fallback>
+        <mc:Fallback xmlns="">
           <p:sp>
             <p:nvSpPr>
               <p:cNvPr id="114" name="TextBox 113">
@@ -9865,8 +9867,8 @@
           </a:fontRef>
         </p:style>
       </p:cxnSp>
-      <mc:AlternateContent xmlns:mc="http://schemas.openxmlformats.org/markup-compatibility/2006">
-        <mc:Choice xmlns:a14="http://schemas.microsoft.com/office/drawing/2010/main" Requires="a14">
+      <mc:AlternateContent xmlns:mc="http://schemas.openxmlformats.org/markup-compatibility/2006" xmlns:a14="http://schemas.microsoft.com/office/drawing/2010/main">
+        <mc:Choice Requires="a14">
           <p:sp>
             <p:nvSpPr>
               <p:cNvPr id="117" name="TextBox 116">
@@ -9935,7 +9937,7 @@
             </p:txBody>
           </p:sp>
         </mc:Choice>
-        <mc:Fallback>
+        <mc:Fallback xmlns="">
           <p:sp>
             <p:nvSpPr>
               <p:cNvPr id="117" name="TextBox 116">
@@ -9980,8 +9982,8 @@
           </p:sp>
         </mc:Fallback>
       </mc:AlternateContent>
-      <mc:AlternateContent xmlns:mc="http://schemas.openxmlformats.org/markup-compatibility/2006">
-        <mc:Choice xmlns:a14="http://schemas.microsoft.com/office/drawing/2010/main" Requires="a14">
+      <mc:AlternateContent xmlns:mc="http://schemas.openxmlformats.org/markup-compatibility/2006" xmlns:a14="http://schemas.microsoft.com/office/drawing/2010/main">
+        <mc:Choice Requires="a14">
           <p:sp>
             <p:nvSpPr>
               <p:cNvPr id="118" name="TextBox 117">
@@ -10050,7 +10052,7 @@
             </p:txBody>
           </p:sp>
         </mc:Choice>
-        <mc:Fallback>
+        <mc:Fallback xmlns="">
           <p:sp>
             <p:nvSpPr>
               <p:cNvPr id="118" name="TextBox 117">
@@ -10095,8 +10097,8 @@
           </p:sp>
         </mc:Fallback>
       </mc:AlternateContent>
-      <mc:AlternateContent xmlns:mc="http://schemas.openxmlformats.org/markup-compatibility/2006">
-        <mc:Choice xmlns:a14="http://schemas.microsoft.com/office/drawing/2010/main" Requires="a14">
+      <mc:AlternateContent xmlns:mc="http://schemas.openxmlformats.org/markup-compatibility/2006" xmlns:a14="http://schemas.microsoft.com/office/drawing/2010/main">
+        <mc:Choice Requires="a14">
           <p:sp>
             <p:nvSpPr>
               <p:cNvPr id="119" name="TextBox 118">
@@ -10165,7 +10167,7 @@
             </p:txBody>
           </p:sp>
         </mc:Choice>
-        <mc:Fallback>
+        <mc:Fallback xmlns="">
           <p:sp>
             <p:nvSpPr>
               <p:cNvPr id="119" name="TextBox 118">
@@ -10210,8 +10212,8 @@
           </p:sp>
         </mc:Fallback>
       </mc:AlternateContent>
-      <mc:AlternateContent xmlns:mc="http://schemas.openxmlformats.org/markup-compatibility/2006">
-        <mc:Choice xmlns:a14="http://schemas.microsoft.com/office/drawing/2010/main" Requires="a14">
+      <mc:AlternateContent xmlns:mc="http://schemas.openxmlformats.org/markup-compatibility/2006" xmlns:a14="http://schemas.microsoft.com/office/drawing/2010/main">
+        <mc:Choice Requires="a14">
           <p:sp>
             <p:nvSpPr>
               <p:cNvPr id="120" name="TextBox 119">
@@ -10280,7 +10282,7 @@
             </p:txBody>
           </p:sp>
         </mc:Choice>
-        <mc:Fallback>
+        <mc:Fallback xmlns="">
           <p:sp>
             <p:nvSpPr>
               <p:cNvPr id="120" name="TextBox 119">
@@ -10325,8 +10327,8 @@
           </p:sp>
         </mc:Fallback>
       </mc:AlternateContent>
-      <mc:AlternateContent xmlns:mc="http://schemas.openxmlformats.org/markup-compatibility/2006">
-        <mc:Choice xmlns:a14="http://schemas.microsoft.com/office/drawing/2010/main" Requires="a14">
+      <mc:AlternateContent xmlns:mc="http://schemas.openxmlformats.org/markup-compatibility/2006" xmlns:a14="http://schemas.microsoft.com/office/drawing/2010/main">
+        <mc:Choice Requires="a14">
           <p:sp>
             <p:nvSpPr>
               <p:cNvPr id="121" name="TextBox 120">
@@ -10395,7 +10397,7 @@
             </p:txBody>
           </p:sp>
         </mc:Choice>
-        <mc:Fallback>
+        <mc:Fallback xmlns="">
           <p:sp>
             <p:nvSpPr>
               <p:cNvPr id="121" name="TextBox 120">
@@ -10440,8 +10442,8 @@
           </p:sp>
         </mc:Fallback>
       </mc:AlternateContent>
-      <mc:AlternateContent xmlns:mc="http://schemas.openxmlformats.org/markup-compatibility/2006">
-        <mc:Choice xmlns:a14="http://schemas.microsoft.com/office/drawing/2010/main" Requires="a14">
+      <mc:AlternateContent xmlns:mc="http://schemas.openxmlformats.org/markup-compatibility/2006" xmlns:a14="http://schemas.microsoft.com/office/drawing/2010/main">
+        <mc:Choice Requires="a14">
           <p:sp>
             <p:nvSpPr>
               <p:cNvPr id="122" name="TextBox 121">
@@ -10510,7 +10512,7 @@
             </p:txBody>
           </p:sp>
         </mc:Choice>
-        <mc:Fallback>
+        <mc:Fallback xmlns="">
           <p:sp>
             <p:nvSpPr>
               <p:cNvPr id="122" name="TextBox 121">
@@ -10741,8 +10743,8 @@
           </a:p>
         </p:txBody>
       </p:sp>
-      <mc:AlternateContent xmlns:mc="http://schemas.openxmlformats.org/markup-compatibility/2006">
-        <mc:Choice xmlns:a14="http://schemas.microsoft.com/office/drawing/2010/main" Requires="a14">
+      <mc:AlternateContent xmlns:mc="http://schemas.openxmlformats.org/markup-compatibility/2006" xmlns:a14="http://schemas.microsoft.com/office/drawing/2010/main">
+        <mc:Choice Requires="a14">
           <p:sp>
             <p:nvSpPr>
               <p:cNvPr id="127" name="TextBox 126">
@@ -10771,6 +10773,7 @@
               </a:bodyPr>
               <a:lstStyle/>
               <a:p>
+                <a:pPr/>
                 <a14:m>
                   <m:oMathPara xmlns:m="http://schemas.openxmlformats.org/officeDocument/2006/math">
                     <m:oMathParaPr>
@@ -10803,7 +10806,7 @@
             </p:txBody>
           </p:sp>
         </mc:Choice>
-        <mc:Fallback>
+        <mc:Fallback xmlns="">
           <p:sp>
             <p:nvSpPr>
               <p:cNvPr id="127" name="TextBox 126">
@@ -11095,8 +11098,8 @@
           </a:fontRef>
         </p:style>
       </p:cxnSp>
-      <mc:AlternateContent xmlns:mc="http://schemas.openxmlformats.org/markup-compatibility/2006">
-        <mc:Choice xmlns:a14="http://schemas.microsoft.com/office/drawing/2010/main" Requires="a14">
+      <mc:AlternateContent xmlns:mc="http://schemas.openxmlformats.org/markup-compatibility/2006" xmlns:a14="http://schemas.microsoft.com/office/drawing/2010/main">
+        <mc:Choice Requires="a14">
           <p:sp>
             <p:nvSpPr>
               <p:cNvPr id="168" name="TextBox 167">
@@ -11973,7 +11976,7 @@
             </p:txBody>
           </p:sp>
         </mc:Choice>
-        <mc:Fallback>
+        <mc:Fallback xmlns="">
           <p:sp>
             <p:nvSpPr>
               <p:cNvPr id="168" name="TextBox 167">
@@ -12048,12 +12051,2934 @@
           <a:chExt cx="0" cy="0"/>
         </a:xfrm>
       </p:grpSpPr>
+      <mc:AlternateContent xmlns:mc="http://schemas.openxmlformats.org/markup-compatibility/2006">
+        <mc:Choice xmlns:a14="http://schemas.microsoft.com/office/drawing/2010/main" Requires="a14">
+          <p:sp>
+            <p:nvSpPr>
+              <p:cNvPr id="5" name="TextBox 4">
+                <a:extLst>
+                  <a:ext uri="{FF2B5EF4-FFF2-40B4-BE49-F238E27FC236}">
+                    <a16:creationId xmlns:a16="http://schemas.microsoft.com/office/drawing/2014/main" id="{4DFB60F5-B1C4-60C0-D495-92DE405C3C5A}"/>
+                  </a:ext>
+                </a:extLst>
+              </p:cNvPr>
+              <p:cNvSpPr txBox="1"/>
+              <p:nvPr/>
+            </p:nvSpPr>
+            <p:spPr>
+              <a:xfrm>
+                <a:off x="264937" y="602281"/>
+                <a:ext cx="11662126" cy="4711546"/>
+              </a:xfrm>
+              <a:prstGeom prst="rect">
+                <a:avLst/>
+              </a:prstGeom>
+              <a:noFill/>
+            </p:spPr>
+            <p:txBody>
+              <a:bodyPr wrap="square" rtlCol="0">
+                <a:spAutoFit/>
+              </a:bodyPr>
+              <a:lstStyle/>
+              <a:p>
+                <a:pPr marL="285750" indent="-285750">
+                  <a:lnSpc>
+                    <a:spcPct val="150000"/>
+                  </a:lnSpc>
+                  <a:buFont typeface="맑은 고딕" panose="020B0503020000020004" pitchFamily="50" charset="-127"/>
+                  <a:buChar char="-"/>
+                </a:pPr>
+                <a:r>
+                  <a:rPr lang="en-US" altLang="ko-KR" sz="1400" dirty="0"/>
+                  <a:t>fig 3b</a:t>
+                </a:r>
+                <a:r>
+                  <a:rPr lang="ko-KR" altLang="en-US" sz="1400" dirty="0"/>
+                  <a:t>에서 분할의 </a:t>
+                </a:r>
+                <a:r>
+                  <a:rPr lang="en-US" altLang="ko-KR" sz="1400" dirty="0"/>
+                  <a:t>cost</a:t>
+                </a:r>
+                <a:r>
+                  <a:rPr lang="ko-KR" altLang="en-US" sz="1400" dirty="0"/>
+                  <a:t>는 다음과 같이 계산된다</a:t>
+                </a:r>
+                <a:endParaRPr lang="en-US" altLang="ko-KR" sz="1400" dirty="0"/>
+              </a:p>
+              <a:p>
+                <a:pPr marL="742950" lvl="1" indent="-285750">
+                  <a:lnSpc>
+                    <a:spcPct val="150000"/>
+                  </a:lnSpc>
+                  <a:buFont typeface="맑은 고딕" panose="020B0503020000020004" pitchFamily="50" charset="-127"/>
+                  <a:buChar char="-"/>
+                </a:pPr>
+                <a14:m>
+                  <m:oMath xmlns:m="http://schemas.openxmlformats.org/officeDocument/2006/math">
+                    <m:sSub>
+                      <m:sSubPr>
+                        <m:ctrlPr>
+                          <a:rPr lang="en-US" altLang="ko-KR" sz="1400" b="0" i="1" smtClean="0">
+                            <a:latin typeface="Cambria Math" panose="02040503050406030204" pitchFamily="18" charset="0"/>
+                          </a:rPr>
+                        </m:ctrlPr>
+                      </m:sSubPr>
+                      <m:e>
+                        <m:r>
+                          <a:rPr lang="en-US" altLang="ko-KR" sz="1400" b="0" i="1" smtClean="0">
+                            <a:latin typeface="Cambria Math" panose="02040503050406030204" pitchFamily="18" charset="0"/>
+                          </a:rPr>
+                          <m:t>𝑤</m:t>
+                        </m:r>
+                      </m:e>
+                      <m:sub>
+                        <m:r>
+                          <a:rPr lang="en-US" altLang="ko-KR" sz="1400" b="0" i="1" smtClean="0">
+                            <a:latin typeface="Cambria Math" panose="02040503050406030204" pitchFamily="18" charset="0"/>
+                          </a:rPr>
+                          <m:t>1</m:t>
+                        </m:r>
+                      </m:sub>
+                    </m:sSub>
+                    <m:sSub>
+                      <m:sSubPr>
+                        <m:ctrlPr>
+                          <a:rPr lang="en-US" altLang="ko-KR" sz="1400" b="0" i="1" smtClean="0">
+                            <a:latin typeface="Cambria Math" panose="02040503050406030204" pitchFamily="18" charset="0"/>
+                          </a:rPr>
+                        </m:ctrlPr>
+                      </m:sSubPr>
+                      <m:e>
+                        <m:r>
+                          <a:rPr lang="en-US" altLang="ko-KR" sz="1400" b="0" i="1" smtClean="0">
+                            <a:latin typeface="Cambria Math" panose="02040503050406030204" pitchFamily="18" charset="0"/>
+                          </a:rPr>
+                          <m:t>𝑤</m:t>
+                        </m:r>
+                      </m:e>
+                      <m:sub>
+                        <m:r>
+                          <a:rPr lang="en-US" altLang="ko-KR" sz="1400" b="0" i="1" smtClean="0">
+                            <a:latin typeface="Cambria Math" panose="02040503050406030204" pitchFamily="18" charset="0"/>
+                          </a:rPr>
+                          <m:t>2</m:t>
+                        </m:r>
+                      </m:sub>
+                    </m:sSub>
+                    <m:sSub>
+                      <m:sSubPr>
+                        <m:ctrlPr>
+                          <a:rPr lang="en-US" altLang="ko-KR" sz="1400" b="0" i="1" smtClean="0">
+                            <a:latin typeface="Cambria Math" panose="02040503050406030204" pitchFamily="18" charset="0"/>
+                          </a:rPr>
+                        </m:ctrlPr>
+                      </m:sSubPr>
+                      <m:e>
+                        <m:r>
+                          <a:rPr lang="en-US" altLang="ko-KR" sz="1400" b="0" i="1" smtClean="0">
+                            <a:latin typeface="Cambria Math" panose="02040503050406030204" pitchFamily="18" charset="0"/>
+                          </a:rPr>
+                          <m:t>𝑤</m:t>
+                        </m:r>
+                      </m:e>
+                      <m:sub>
+                        <m:r>
+                          <a:rPr lang="en-US" altLang="ko-KR" sz="1400" b="0" i="1" smtClean="0">
+                            <a:latin typeface="Cambria Math" panose="02040503050406030204" pitchFamily="18" charset="0"/>
+                          </a:rPr>
+                          <m:t>3</m:t>
+                        </m:r>
+                      </m:sub>
+                    </m:sSub>
+                    <m:r>
+                      <a:rPr lang="en-US" altLang="ko-KR" sz="1400" b="0" i="1" smtClean="0">
+                        <a:latin typeface="Cambria Math" panose="02040503050406030204" pitchFamily="18" charset="0"/>
+                      </a:rPr>
+                      <m:t>+</m:t>
+                    </m:r>
+                    <m:sSub>
+                      <m:sSubPr>
+                        <m:ctrlPr>
+                          <a:rPr lang="en-US" altLang="ko-KR" sz="1400" b="0" i="1" smtClean="0">
+                            <a:latin typeface="Cambria Math" panose="02040503050406030204" pitchFamily="18" charset="0"/>
+                          </a:rPr>
+                        </m:ctrlPr>
+                      </m:sSubPr>
+                      <m:e>
+                        <m:r>
+                          <a:rPr lang="en-US" altLang="ko-KR" sz="1400" b="0" i="1" smtClean="0">
+                            <a:latin typeface="Cambria Math" panose="02040503050406030204" pitchFamily="18" charset="0"/>
+                          </a:rPr>
+                          <m:t>𝑤</m:t>
+                        </m:r>
+                      </m:e>
+                      <m:sub>
+                        <m:r>
+                          <a:rPr lang="en-US" altLang="ko-KR" sz="1400" b="0" i="1" smtClean="0">
+                            <a:latin typeface="Cambria Math" panose="02040503050406030204" pitchFamily="18" charset="0"/>
+                          </a:rPr>
+                          <m:t>2</m:t>
+                        </m:r>
+                      </m:sub>
+                    </m:sSub>
+                    <m:d>
+                      <m:dPr>
+                        <m:ctrlPr>
+                          <a:rPr lang="en-US" altLang="ko-KR" sz="1400" b="0" i="1" smtClean="0">
+                            <a:latin typeface="Cambria Math" panose="02040503050406030204" pitchFamily="18" charset="0"/>
+                          </a:rPr>
+                        </m:ctrlPr>
+                      </m:dPr>
+                      <m:e>
+                        <m:sSub>
+                          <m:sSubPr>
+                            <m:ctrlPr>
+                              <a:rPr lang="en-US" altLang="ko-KR" sz="1400" b="0" i="1" smtClean="0">
+                                <a:latin typeface="Cambria Math" panose="02040503050406030204" pitchFamily="18" charset="0"/>
+                              </a:rPr>
+                            </m:ctrlPr>
+                          </m:sSubPr>
+                          <m:e>
+                            <m:r>
+                              <a:rPr lang="en-US" altLang="ko-KR" sz="1400" b="0" i="1" smtClean="0">
+                                <a:latin typeface="Cambria Math" panose="02040503050406030204" pitchFamily="18" charset="0"/>
+                              </a:rPr>
+                              <m:t>𝑤</m:t>
+                            </m:r>
+                          </m:e>
+                          <m:sub>
+                            <m:r>
+                              <a:rPr lang="en-US" altLang="ko-KR" sz="1400" b="0" i="1" smtClean="0">
+                                <a:latin typeface="Cambria Math" panose="02040503050406030204" pitchFamily="18" charset="0"/>
+                              </a:rPr>
+                              <m:t>𝑐</m:t>
+                            </m:r>
+                          </m:sub>
+                        </m:sSub>
+                        <m:sSub>
+                          <m:sSubPr>
+                            <m:ctrlPr>
+                              <a:rPr lang="en-US" altLang="ko-KR" sz="1400" b="0" i="1" smtClean="0">
+                                <a:latin typeface="Cambria Math" panose="02040503050406030204" pitchFamily="18" charset="0"/>
+                              </a:rPr>
+                            </m:ctrlPr>
+                          </m:sSubPr>
+                          <m:e>
+                            <m:r>
+                              <a:rPr lang="en-US" altLang="ko-KR" sz="1400" b="0" i="1" smtClean="0">
+                                <a:latin typeface="Cambria Math" panose="02040503050406030204" pitchFamily="18" charset="0"/>
+                              </a:rPr>
+                              <m:t>𝑤</m:t>
+                            </m:r>
+                          </m:e>
+                          <m:sub>
+                            <m:r>
+                              <a:rPr lang="en-US" altLang="ko-KR" sz="1400" b="0" i="1" smtClean="0">
+                                <a:latin typeface="Cambria Math" panose="02040503050406030204" pitchFamily="18" charset="0"/>
+                              </a:rPr>
+                              <m:t>𝑑</m:t>
+                            </m:r>
+                          </m:sub>
+                        </m:sSub>
+                        <m:r>
+                          <a:rPr lang="en-US" altLang="ko-KR" sz="1400" b="0" i="1" smtClean="0">
+                            <a:latin typeface="Cambria Math" panose="02040503050406030204" pitchFamily="18" charset="0"/>
+                          </a:rPr>
+                          <m:t>+</m:t>
+                        </m:r>
+                        <m:sSub>
+                          <m:sSubPr>
+                            <m:ctrlPr>
+                              <a:rPr lang="en-US" altLang="ko-KR" sz="1400" b="0" i="1" smtClean="0">
+                                <a:latin typeface="Cambria Math" panose="02040503050406030204" pitchFamily="18" charset="0"/>
+                              </a:rPr>
+                            </m:ctrlPr>
+                          </m:sSubPr>
+                          <m:e>
+                            <m:r>
+                              <a:rPr lang="en-US" altLang="ko-KR" sz="1400" b="0" i="1" smtClean="0">
+                                <a:latin typeface="Cambria Math" panose="02040503050406030204" pitchFamily="18" charset="0"/>
+                              </a:rPr>
+                              <m:t>𝑤</m:t>
+                            </m:r>
+                          </m:e>
+                          <m:sub>
+                            <m:r>
+                              <a:rPr lang="en-US" altLang="ko-KR" sz="1400" b="0" i="1" smtClean="0">
+                                <a:latin typeface="Cambria Math" panose="02040503050406030204" pitchFamily="18" charset="0"/>
+                              </a:rPr>
+                              <m:t>𝑑</m:t>
+                            </m:r>
+                          </m:sub>
+                        </m:sSub>
+                        <m:sSub>
+                          <m:sSubPr>
+                            <m:ctrlPr>
+                              <a:rPr lang="en-US" altLang="ko-KR" sz="1400" b="0" i="1" smtClean="0">
+                                <a:latin typeface="Cambria Math" panose="02040503050406030204" pitchFamily="18" charset="0"/>
+                              </a:rPr>
+                            </m:ctrlPr>
+                          </m:sSubPr>
+                          <m:e>
+                            <m:r>
+                              <a:rPr lang="en-US" altLang="ko-KR" sz="1400" b="0" i="1" smtClean="0">
+                                <a:latin typeface="Cambria Math" panose="02040503050406030204" pitchFamily="18" charset="0"/>
+                              </a:rPr>
+                              <m:t>𝑤</m:t>
+                            </m:r>
+                          </m:e>
+                          <m:sub>
+                            <m:r>
+                              <a:rPr lang="en-US" altLang="ko-KR" sz="1400" b="0" i="1" smtClean="0">
+                                <a:latin typeface="Cambria Math" panose="02040503050406030204" pitchFamily="18" charset="0"/>
+                              </a:rPr>
+                              <m:t>𝑒</m:t>
+                            </m:r>
+                          </m:sub>
+                        </m:sSub>
+                        <m:r>
+                          <a:rPr lang="en-US" altLang="ko-KR" sz="1400" b="0" i="1" smtClean="0">
+                            <a:latin typeface="Cambria Math" panose="02040503050406030204" pitchFamily="18" charset="0"/>
+                          </a:rPr>
+                          <m:t>+</m:t>
+                        </m:r>
+                        <m:sSub>
+                          <m:sSubPr>
+                            <m:ctrlPr>
+                              <a:rPr lang="en-US" altLang="ko-KR" sz="1400" b="0" i="1" smtClean="0">
+                                <a:latin typeface="Cambria Math" panose="02040503050406030204" pitchFamily="18" charset="0"/>
+                              </a:rPr>
+                            </m:ctrlPr>
+                          </m:sSubPr>
+                          <m:e>
+                            <m:r>
+                              <a:rPr lang="en-US" altLang="ko-KR" sz="1400" b="0" i="1" smtClean="0">
+                                <a:latin typeface="Cambria Math" panose="02040503050406030204" pitchFamily="18" charset="0"/>
+                              </a:rPr>
+                              <m:t>𝑤</m:t>
+                            </m:r>
+                          </m:e>
+                          <m:sub>
+                            <m:r>
+                              <a:rPr lang="en-US" altLang="ko-KR" sz="1400" b="0" i="1" smtClean="0">
+                                <a:latin typeface="Cambria Math" panose="02040503050406030204" pitchFamily="18" charset="0"/>
+                              </a:rPr>
+                              <m:t>𝑒</m:t>
+                            </m:r>
+                          </m:sub>
+                        </m:sSub>
+                        <m:sSub>
+                          <m:sSubPr>
+                            <m:ctrlPr>
+                              <a:rPr lang="en-US" altLang="ko-KR" sz="1400" b="0" i="1" smtClean="0">
+                                <a:latin typeface="Cambria Math" panose="02040503050406030204" pitchFamily="18" charset="0"/>
+                              </a:rPr>
+                            </m:ctrlPr>
+                          </m:sSubPr>
+                          <m:e>
+                            <m:r>
+                              <a:rPr lang="en-US" altLang="ko-KR" sz="1400" b="0" i="1" smtClean="0">
+                                <a:latin typeface="Cambria Math" panose="02040503050406030204" pitchFamily="18" charset="0"/>
+                              </a:rPr>
+                              <m:t>𝑤</m:t>
+                            </m:r>
+                          </m:e>
+                          <m:sub>
+                            <m:r>
+                              <a:rPr lang="en-US" altLang="ko-KR" sz="1400" b="0" i="1" smtClean="0">
+                                <a:latin typeface="Cambria Math" panose="02040503050406030204" pitchFamily="18" charset="0"/>
+                              </a:rPr>
+                              <m:t>𝑓</m:t>
+                            </m:r>
+                          </m:sub>
+                        </m:sSub>
+                        <m:r>
+                          <a:rPr lang="en-US" altLang="ko-KR" sz="1400" b="0" i="1" smtClean="0">
+                            <a:latin typeface="Cambria Math" panose="02040503050406030204" pitchFamily="18" charset="0"/>
+                          </a:rPr>
+                          <m:t>+…+</m:t>
+                        </m:r>
+                        <m:sSub>
+                          <m:sSubPr>
+                            <m:ctrlPr>
+                              <a:rPr lang="en-US" altLang="ko-KR" sz="1400" b="0" i="1" smtClean="0">
+                                <a:latin typeface="Cambria Math" panose="02040503050406030204" pitchFamily="18" charset="0"/>
+                              </a:rPr>
+                            </m:ctrlPr>
+                          </m:sSubPr>
+                          <m:e>
+                            <m:r>
+                              <a:rPr lang="en-US" altLang="ko-KR" sz="1400" b="0" i="1" smtClean="0">
+                                <a:latin typeface="Cambria Math" panose="02040503050406030204" pitchFamily="18" charset="0"/>
+                              </a:rPr>
+                              <m:t>𝑤</m:t>
+                            </m:r>
+                          </m:e>
+                          <m:sub>
+                            <m:r>
+                              <a:rPr lang="en-US" altLang="ko-KR" sz="1400" b="0" i="1" smtClean="0">
+                                <a:latin typeface="Cambria Math" panose="02040503050406030204" pitchFamily="18" charset="0"/>
+                              </a:rPr>
+                              <m:t>h</m:t>
+                            </m:r>
+                          </m:sub>
+                        </m:sSub>
+                        <m:sSub>
+                          <m:sSubPr>
+                            <m:ctrlPr>
+                              <a:rPr lang="en-US" altLang="ko-KR" sz="1400" b="0" i="1" smtClean="0">
+                                <a:latin typeface="Cambria Math" panose="02040503050406030204" pitchFamily="18" charset="0"/>
+                              </a:rPr>
+                            </m:ctrlPr>
+                          </m:sSubPr>
+                          <m:e>
+                            <m:r>
+                              <a:rPr lang="en-US" altLang="ko-KR" sz="1400" b="0" i="1" smtClean="0">
+                                <a:latin typeface="Cambria Math" panose="02040503050406030204" pitchFamily="18" charset="0"/>
+                              </a:rPr>
+                              <m:t>𝑤</m:t>
+                            </m:r>
+                          </m:e>
+                          <m:sub>
+                            <m:r>
+                              <a:rPr lang="en-US" altLang="ko-KR" sz="1400" b="0" i="1" smtClean="0">
+                                <a:latin typeface="Cambria Math" panose="02040503050406030204" pitchFamily="18" charset="0"/>
+                              </a:rPr>
+                              <m:t>𝑖</m:t>
+                            </m:r>
+                          </m:sub>
+                        </m:sSub>
+                        <m:r>
+                          <a:rPr lang="en-US" altLang="ko-KR" sz="1400" b="0" i="1" smtClean="0">
+                            <a:latin typeface="Cambria Math" panose="02040503050406030204" pitchFamily="18" charset="0"/>
+                          </a:rPr>
+                          <m:t>+</m:t>
+                        </m:r>
+                        <m:sSub>
+                          <m:sSubPr>
+                            <m:ctrlPr>
+                              <a:rPr lang="en-US" altLang="ko-KR" sz="1400" b="0" i="1" smtClean="0">
+                                <a:latin typeface="Cambria Math" panose="02040503050406030204" pitchFamily="18" charset="0"/>
+                              </a:rPr>
+                            </m:ctrlPr>
+                          </m:sSubPr>
+                          <m:e>
+                            <m:r>
+                              <a:rPr lang="en-US" altLang="ko-KR" sz="1400" b="0" i="1" smtClean="0">
+                                <a:latin typeface="Cambria Math" panose="02040503050406030204" pitchFamily="18" charset="0"/>
+                              </a:rPr>
+                              <m:t>𝑤</m:t>
+                            </m:r>
+                          </m:e>
+                          <m:sub>
+                            <m:r>
+                              <a:rPr lang="en-US" altLang="ko-KR" sz="1400" b="0" i="1" smtClean="0">
+                                <a:latin typeface="Cambria Math" panose="02040503050406030204" pitchFamily="18" charset="0"/>
+                              </a:rPr>
+                              <m:t>𝑖</m:t>
+                            </m:r>
+                          </m:sub>
+                        </m:sSub>
+                        <m:sSub>
+                          <m:sSubPr>
+                            <m:ctrlPr>
+                              <a:rPr lang="en-US" altLang="ko-KR" sz="1400" b="0" i="1" smtClean="0">
+                                <a:latin typeface="Cambria Math" panose="02040503050406030204" pitchFamily="18" charset="0"/>
+                              </a:rPr>
+                            </m:ctrlPr>
+                          </m:sSubPr>
+                          <m:e>
+                            <m:r>
+                              <a:rPr lang="en-US" altLang="ko-KR" sz="1400" b="0" i="1" smtClean="0">
+                                <a:latin typeface="Cambria Math" panose="02040503050406030204" pitchFamily="18" charset="0"/>
+                              </a:rPr>
+                              <m:t>𝑤</m:t>
+                            </m:r>
+                          </m:e>
+                          <m:sub>
+                            <m:r>
+                              <a:rPr lang="en-US" altLang="ko-KR" sz="1400" b="0" i="1" smtClean="0">
+                                <a:latin typeface="Cambria Math" panose="02040503050406030204" pitchFamily="18" charset="0"/>
+                              </a:rPr>
+                              <m:t>3</m:t>
+                            </m:r>
+                          </m:sub>
+                        </m:sSub>
+                      </m:e>
+                    </m:d>
+                  </m:oMath>
+                </a14:m>
+                <a:br>
+                  <a:rPr lang="en-US" altLang="ko-KR" sz="1400" b="0" i="1" dirty="0">
+                    <a:latin typeface="Cambria Math" panose="02040503050406030204" pitchFamily="18" charset="0"/>
+                  </a:rPr>
+                </a:br>
+                <a14:m>
+                  <m:oMath xmlns:m="http://schemas.openxmlformats.org/officeDocument/2006/math">
+                    <m:r>
+                      <a:rPr lang="en-US" altLang="ko-KR" sz="1400" b="0" i="1" smtClean="0">
+                        <a:latin typeface="Cambria Math" panose="02040503050406030204" pitchFamily="18" charset="0"/>
+                      </a:rPr>
+                      <m:t>=</m:t>
+                    </m:r>
+                    <m:sSub>
+                      <m:sSubPr>
+                        <m:ctrlPr>
+                          <a:rPr lang="en-US" altLang="ko-KR" sz="1400" b="0" i="1" smtClean="0">
+                            <a:latin typeface="Cambria Math" panose="02040503050406030204" pitchFamily="18" charset="0"/>
+                          </a:rPr>
+                        </m:ctrlPr>
+                      </m:sSubPr>
+                      <m:e>
+                        <m:r>
+                          <a:rPr lang="en-US" altLang="ko-KR" sz="1400" b="0" i="1" smtClean="0">
+                            <a:latin typeface="Cambria Math" panose="02040503050406030204" pitchFamily="18" charset="0"/>
+                          </a:rPr>
+                          <m:t>𝑤</m:t>
+                        </m:r>
+                      </m:e>
+                      <m:sub>
+                        <m:r>
+                          <a:rPr lang="en-US" altLang="ko-KR" sz="1400" b="0" i="1" smtClean="0">
+                            <a:latin typeface="Cambria Math" panose="02040503050406030204" pitchFamily="18" charset="0"/>
+                          </a:rPr>
+                          <m:t>1</m:t>
+                        </m:r>
+                      </m:sub>
+                    </m:sSub>
+                    <m:sSub>
+                      <m:sSubPr>
+                        <m:ctrlPr>
+                          <a:rPr lang="en-US" altLang="ko-KR" sz="1400" b="0" i="1" smtClean="0">
+                            <a:latin typeface="Cambria Math" panose="02040503050406030204" pitchFamily="18" charset="0"/>
+                          </a:rPr>
+                        </m:ctrlPr>
+                      </m:sSubPr>
+                      <m:e>
+                        <m:r>
+                          <a:rPr lang="en-US" altLang="ko-KR" sz="1400" b="0" i="1" smtClean="0">
+                            <a:latin typeface="Cambria Math" panose="02040503050406030204" pitchFamily="18" charset="0"/>
+                          </a:rPr>
+                          <m:t>𝑤</m:t>
+                        </m:r>
+                      </m:e>
+                      <m:sub>
+                        <m:r>
+                          <a:rPr lang="en-US" altLang="ko-KR" sz="1400" b="0" i="1" smtClean="0">
+                            <a:latin typeface="Cambria Math" panose="02040503050406030204" pitchFamily="18" charset="0"/>
+                          </a:rPr>
+                          <m:t>2</m:t>
+                        </m:r>
+                      </m:sub>
+                    </m:sSub>
+                    <m:sSub>
+                      <m:sSubPr>
+                        <m:ctrlPr>
+                          <a:rPr lang="en-US" altLang="ko-KR" sz="1400" b="0" i="1" smtClean="0">
+                            <a:latin typeface="Cambria Math" panose="02040503050406030204" pitchFamily="18" charset="0"/>
+                          </a:rPr>
+                        </m:ctrlPr>
+                      </m:sSubPr>
+                      <m:e>
+                        <m:r>
+                          <a:rPr lang="en-US" altLang="ko-KR" sz="1400" b="0" i="1" smtClean="0">
+                            <a:latin typeface="Cambria Math" panose="02040503050406030204" pitchFamily="18" charset="0"/>
+                          </a:rPr>
+                          <m:t>𝑤</m:t>
+                        </m:r>
+                      </m:e>
+                      <m:sub>
+                        <m:r>
+                          <a:rPr lang="en-US" altLang="ko-KR" sz="1400" b="0" i="1" smtClean="0">
+                            <a:latin typeface="Cambria Math" panose="02040503050406030204" pitchFamily="18" charset="0"/>
+                          </a:rPr>
+                          <m:t>3</m:t>
+                        </m:r>
+                      </m:sub>
+                    </m:sSub>
+                    <m:r>
+                      <a:rPr lang="en-US" altLang="ko-KR" sz="1400" b="0" i="1" smtClean="0">
+                        <a:latin typeface="Cambria Math" panose="02040503050406030204" pitchFamily="18" charset="0"/>
+                      </a:rPr>
+                      <m:t>+</m:t>
+                    </m:r>
+                    <m:sSub>
+                      <m:sSubPr>
+                        <m:ctrlPr>
+                          <a:rPr lang="en-US" altLang="ko-KR" sz="1400" b="0" i="1" smtClean="0">
+                            <a:latin typeface="Cambria Math" panose="02040503050406030204" pitchFamily="18" charset="0"/>
+                          </a:rPr>
+                        </m:ctrlPr>
+                      </m:sSubPr>
+                      <m:e>
+                        <m:r>
+                          <a:rPr lang="en-US" altLang="ko-KR" sz="1400" b="0" i="1" smtClean="0">
+                            <a:latin typeface="Cambria Math" panose="02040503050406030204" pitchFamily="18" charset="0"/>
+                          </a:rPr>
+                          <m:t>𝑤</m:t>
+                        </m:r>
+                      </m:e>
+                      <m:sub>
+                        <m:r>
+                          <a:rPr lang="en-US" altLang="ko-KR" sz="1400" b="0" i="1" smtClean="0">
+                            <a:latin typeface="Cambria Math" panose="02040503050406030204" pitchFamily="18" charset="0"/>
+                          </a:rPr>
+                          <m:t>2</m:t>
+                        </m:r>
+                      </m:sub>
+                    </m:sSub>
+                    <m:d>
+                      <m:dPr>
+                        <m:ctrlPr>
+                          <a:rPr lang="en-US" altLang="ko-KR" sz="1400" b="0" i="1" smtClean="0">
+                            <a:latin typeface="Cambria Math" panose="02040503050406030204" pitchFamily="18" charset="0"/>
+                          </a:rPr>
+                        </m:ctrlPr>
+                      </m:dPr>
+                      <m:e>
+                        <m:sSub>
+                          <m:sSubPr>
+                            <m:ctrlPr>
+                              <a:rPr lang="en-US" altLang="ko-KR" sz="1400" b="0" i="1" smtClean="0">
+                                <a:latin typeface="Cambria Math" panose="02040503050406030204" pitchFamily="18" charset="0"/>
+                              </a:rPr>
+                            </m:ctrlPr>
+                          </m:sSubPr>
+                          <m:e>
+                            <m:r>
+                              <a:rPr lang="en-US" altLang="ko-KR" sz="1400" b="0" i="1" smtClean="0">
+                                <a:latin typeface="Cambria Math" panose="02040503050406030204" pitchFamily="18" charset="0"/>
+                              </a:rPr>
+                              <m:t>𝑤</m:t>
+                            </m:r>
+                          </m:e>
+                          <m:sub>
+                            <m:r>
+                              <a:rPr lang="en-US" altLang="ko-KR" sz="1400" b="0" i="1" smtClean="0">
+                                <a:latin typeface="Cambria Math" panose="02040503050406030204" pitchFamily="18" charset="0"/>
+                              </a:rPr>
+                              <m:t>𝑐</m:t>
+                            </m:r>
+                          </m:sub>
+                        </m:sSub>
+                        <m:r>
+                          <a:rPr lang="en-US" altLang="ko-KR" sz="1400" b="0" i="1" smtClean="0">
+                            <a:latin typeface="Cambria Math" panose="02040503050406030204" pitchFamily="18" charset="0"/>
+                          </a:rPr>
+                          <m:t>:</m:t>
+                        </m:r>
+                        <m:sSub>
+                          <m:sSubPr>
+                            <m:ctrlPr>
+                              <a:rPr lang="en-US" altLang="ko-KR" sz="1400" b="0" i="1" smtClean="0">
+                                <a:latin typeface="Cambria Math" panose="02040503050406030204" pitchFamily="18" charset="0"/>
+                              </a:rPr>
+                            </m:ctrlPr>
+                          </m:sSubPr>
+                          <m:e>
+                            <m:r>
+                              <a:rPr lang="en-US" altLang="ko-KR" sz="1400" b="0" i="1" smtClean="0">
+                                <a:latin typeface="Cambria Math" panose="02040503050406030204" pitchFamily="18" charset="0"/>
+                              </a:rPr>
+                              <m:t>𝑤</m:t>
+                            </m:r>
+                          </m:e>
+                          <m:sub>
+                            <m:r>
+                              <a:rPr lang="en-US" altLang="ko-KR" sz="1400" b="0" i="1" smtClean="0">
+                                <a:latin typeface="Cambria Math" panose="02040503050406030204" pitchFamily="18" charset="0"/>
+                              </a:rPr>
+                              <m:t>3</m:t>
+                            </m:r>
+                          </m:sub>
+                        </m:sSub>
+                      </m:e>
+                    </m:d>
+                    <m:r>
+                      <a:rPr lang="en-US" altLang="ko-KR" sz="1400" b="0" i="1" smtClean="0">
+                        <a:latin typeface="Cambria Math" panose="02040503050406030204" pitchFamily="18" charset="0"/>
+                      </a:rPr>
+                      <m:t>   (1)</m:t>
+                    </m:r>
+                  </m:oMath>
+                </a14:m>
+                <a:endParaRPr lang="en-US" altLang="ko-KR" sz="1400" dirty="0"/>
+              </a:p>
+              <a:p>
+                <a:pPr marL="285750" indent="-285750">
+                  <a:lnSpc>
+                    <a:spcPct val="150000"/>
+                  </a:lnSpc>
+                  <a:buFont typeface="맑은 고딕" panose="020B0503020000020004" pitchFamily="50" charset="-127"/>
+                  <a:buChar char="-"/>
+                </a:pPr>
+                <a:r>
+                  <a:rPr lang="en-US" altLang="ko-KR" sz="1400" dirty="0"/>
+                  <a:t>fig 3</a:t>
+                </a:r>
+                <a:r>
+                  <a:rPr lang="ko-KR" altLang="en-US" sz="1400" dirty="0"/>
+                  <a:t>의 다각형에서 </a:t>
+                </a:r>
+                <a14:m>
+                  <m:oMath xmlns:m="http://schemas.openxmlformats.org/officeDocument/2006/math">
+                    <m:sSub>
+                      <m:sSubPr>
+                        <m:ctrlPr>
+                          <a:rPr lang="en-US" altLang="ko-KR" sz="1400" b="0" i="1" smtClean="0">
+                            <a:latin typeface="Cambria Math" panose="02040503050406030204" pitchFamily="18" charset="0"/>
+                          </a:rPr>
+                        </m:ctrlPr>
+                      </m:sSubPr>
+                      <m:e>
+                        <m:r>
+                          <a:rPr lang="en-US" altLang="ko-KR" sz="1400" b="0" i="1" smtClean="0">
+                            <a:latin typeface="Cambria Math" panose="02040503050406030204" pitchFamily="18" charset="0"/>
+                          </a:rPr>
+                          <m:t>𝐻</m:t>
+                        </m:r>
+                      </m:e>
+                      <m:sub>
+                        <m:r>
+                          <a:rPr lang="en-US" altLang="ko-KR" sz="1400" b="0" i="1" smtClean="0">
+                            <a:latin typeface="Cambria Math" panose="02040503050406030204" pitchFamily="18" charset="0"/>
+                          </a:rPr>
+                          <m:t>0</m:t>
+                        </m:r>
+                      </m:sub>
+                    </m:sSub>
+                    <m:r>
+                      <a:rPr lang="en-US" altLang="ko-KR" sz="1400" b="0" i="1" smtClean="0">
+                        <a:latin typeface="Cambria Math" panose="02040503050406030204" pitchFamily="18" charset="0"/>
+                      </a:rPr>
+                      <m:t>(</m:t>
+                    </m:r>
+                    <m:r>
+                      <a:rPr lang="en-US" altLang="ko-KR" sz="1400" b="0" i="1" smtClean="0">
+                        <a:latin typeface="Cambria Math" panose="02040503050406030204" pitchFamily="18" charset="0"/>
+                      </a:rPr>
+                      <m:t>𝑛𝑜</m:t>
+                    </m:r>
+                    <m:r>
+                      <a:rPr lang="en-US" altLang="ko-KR" sz="1400" b="0" i="1" smtClean="0">
+                        <a:latin typeface="Cambria Math" panose="02040503050406030204" pitchFamily="18" charset="0"/>
+                      </a:rPr>
+                      <m:t> </m:t>
+                    </m:r>
+                    <m:r>
+                      <a:rPr lang="en-US" altLang="ko-KR" sz="1400" b="0" i="1" smtClean="0">
+                        <a:latin typeface="Cambria Math" panose="02040503050406030204" pitchFamily="18" charset="0"/>
+                      </a:rPr>
+                      <m:t>h</m:t>
+                    </m:r>
+                    <m:r>
+                      <a:rPr lang="en-US" altLang="ko-KR" sz="1400" b="0" i="1" smtClean="0">
+                        <a:latin typeface="Cambria Math" panose="02040503050406030204" pitchFamily="18" charset="0"/>
+                      </a:rPr>
+                      <m:t>−</m:t>
+                    </m:r>
+                    <m:r>
+                      <a:rPr lang="en-US" altLang="ko-KR" sz="1400" b="0" i="1" smtClean="0">
+                        <a:latin typeface="Cambria Math" panose="02040503050406030204" pitchFamily="18" charset="0"/>
+                      </a:rPr>
+                      <m:t>𝑎𝑟𝑐</m:t>
+                    </m:r>
+                    <m:r>
+                      <a:rPr lang="en-US" altLang="ko-KR" sz="1400" b="0" i="1" smtClean="0">
+                        <a:latin typeface="Cambria Math" panose="02040503050406030204" pitchFamily="18" charset="0"/>
+                      </a:rPr>
+                      <m:t>)</m:t>
+                    </m:r>
+                  </m:oMath>
+                </a14:m>
+                <a:r>
+                  <a:rPr lang="ko-KR" altLang="en-US" sz="1400" dirty="0"/>
+                  <a:t>의 </a:t>
+                </a:r>
+                <a:r>
+                  <a:rPr lang="en-US" altLang="ko-KR" sz="1400" dirty="0"/>
+                  <a:t>cost</a:t>
+                </a:r>
+                <a:r>
+                  <a:rPr lang="ko-KR" altLang="en-US" sz="1400" dirty="0"/>
+                  <a:t>는 다음과 같다</a:t>
+                </a:r>
+                <a:r>
+                  <a:rPr lang="en-US" altLang="ko-KR" sz="1400" dirty="0"/>
+                  <a:t>.</a:t>
+                </a:r>
+              </a:p>
+              <a:p>
+                <a:pPr marL="742950" lvl="1" indent="-285750">
+                  <a:lnSpc>
+                    <a:spcPct val="150000"/>
+                  </a:lnSpc>
+                  <a:buFont typeface="맑은 고딕" panose="020B0503020000020004" pitchFamily="50" charset="-127"/>
+                  <a:buChar char="-"/>
+                </a:pPr>
+                <a14:m>
+                  <m:oMath xmlns:m="http://schemas.openxmlformats.org/officeDocument/2006/math">
+                    <m:r>
+                      <a:rPr lang="en-US" altLang="ko-KR" sz="1400" b="0" i="1" smtClean="0">
+                        <a:latin typeface="Cambria Math" panose="02040503050406030204" pitchFamily="18" charset="0"/>
+                      </a:rPr>
+                      <m:t>𝐹𝑎𝑛</m:t>
+                    </m:r>
+                    <m:d>
+                      <m:dPr>
+                        <m:ctrlPr>
+                          <a:rPr lang="en-US" altLang="ko-KR" sz="1400" b="0" i="1" smtClean="0">
+                            <a:latin typeface="Cambria Math" panose="02040503050406030204" pitchFamily="18" charset="0"/>
+                          </a:rPr>
+                        </m:ctrlPr>
+                      </m:dPr>
+                      <m:e>
+                        <m:sSub>
+                          <m:sSubPr>
+                            <m:ctrlPr>
+                              <a:rPr lang="en-US" altLang="ko-KR" sz="1400" b="0" i="1" smtClean="0">
+                                <a:latin typeface="Cambria Math" panose="02040503050406030204" pitchFamily="18" charset="0"/>
+                              </a:rPr>
+                            </m:ctrlPr>
+                          </m:sSubPr>
+                          <m:e>
+                            <m:r>
+                              <a:rPr lang="en-US" altLang="ko-KR" sz="1400" b="0" i="1" smtClean="0">
+                                <a:latin typeface="Cambria Math" panose="02040503050406030204" pitchFamily="18" charset="0"/>
+                              </a:rPr>
+                              <m:t>𝑤</m:t>
+                            </m:r>
+                          </m:e>
+                          <m:sub>
+                            <m:r>
+                              <a:rPr lang="en-US" altLang="ko-KR" sz="1400" b="0" i="1" smtClean="0">
+                                <a:latin typeface="Cambria Math" panose="02040503050406030204" pitchFamily="18" charset="0"/>
+                              </a:rPr>
+                              <m:t>1</m:t>
+                            </m:r>
+                          </m:sub>
+                        </m:sSub>
+                      </m:e>
+                      <m:e>
+                        <m:sSub>
+                          <m:sSubPr>
+                            <m:ctrlPr>
+                              <a:rPr lang="en-US" altLang="ko-KR" sz="1400" b="0" i="1" smtClean="0">
+                                <a:latin typeface="Cambria Math" panose="02040503050406030204" pitchFamily="18" charset="0"/>
+                              </a:rPr>
+                            </m:ctrlPr>
+                          </m:sSubPr>
+                          <m:e>
+                            <m:r>
+                              <a:rPr lang="en-US" altLang="ko-KR" sz="1400" b="0" i="1" smtClean="0">
+                                <a:latin typeface="Cambria Math" panose="02040503050406030204" pitchFamily="18" charset="0"/>
+                              </a:rPr>
+                              <m:t>𝑤</m:t>
+                            </m:r>
+                          </m:e>
+                          <m:sub>
+                            <m:r>
+                              <a:rPr lang="en-US" altLang="ko-KR" sz="1400" b="0" i="1" smtClean="0">
+                                <a:latin typeface="Cambria Math" panose="02040503050406030204" pitchFamily="18" charset="0"/>
+                              </a:rPr>
+                              <m:t>2</m:t>
+                            </m:r>
+                          </m:sub>
+                        </m:sSub>
+                        <m:r>
+                          <a:rPr lang="en-US" altLang="ko-KR" sz="1400" b="0" i="1" smtClean="0">
+                            <a:latin typeface="Cambria Math" panose="02040503050406030204" pitchFamily="18" charset="0"/>
+                          </a:rPr>
+                          <m:t>,…</m:t>
+                        </m:r>
+                        <m:sSub>
+                          <m:sSubPr>
+                            <m:ctrlPr>
+                              <a:rPr lang="en-US" altLang="ko-KR" sz="1400" b="0" i="1" smtClean="0">
+                                <a:latin typeface="Cambria Math" panose="02040503050406030204" pitchFamily="18" charset="0"/>
+                              </a:rPr>
+                            </m:ctrlPr>
+                          </m:sSubPr>
+                          <m:e>
+                            <m:r>
+                              <a:rPr lang="en-US" altLang="ko-KR" sz="1400" b="0" i="1" smtClean="0">
+                                <a:latin typeface="Cambria Math" panose="02040503050406030204" pitchFamily="18" charset="0"/>
+                              </a:rPr>
+                              <m:t>𝑤</m:t>
+                            </m:r>
+                          </m:e>
+                          <m:sub>
+                            <m:r>
+                              <a:rPr lang="en-US" altLang="ko-KR" sz="1400" b="0" i="1" smtClean="0">
+                                <a:latin typeface="Cambria Math" panose="02040503050406030204" pitchFamily="18" charset="0"/>
+                              </a:rPr>
+                              <m:t>3</m:t>
+                            </m:r>
+                          </m:sub>
+                        </m:sSub>
+                      </m:e>
+                    </m:d>
+                    <m:r>
+                      <a:rPr lang="en-US" altLang="ko-KR" sz="1400" b="0" i="1" smtClean="0">
+                        <a:latin typeface="Cambria Math" panose="02040503050406030204" pitchFamily="18" charset="0"/>
+                      </a:rPr>
+                      <m:t>=</m:t>
+                    </m:r>
+                    <m:sSub>
+                      <m:sSubPr>
+                        <m:ctrlPr>
+                          <a:rPr lang="en-US" altLang="ko-KR" sz="1400" b="0" i="1" smtClean="0">
+                            <a:latin typeface="Cambria Math" panose="02040503050406030204" pitchFamily="18" charset="0"/>
+                          </a:rPr>
+                        </m:ctrlPr>
+                      </m:sSubPr>
+                      <m:e>
+                        <m:r>
+                          <a:rPr lang="en-US" altLang="ko-KR" sz="1400" b="0" i="1" smtClean="0">
+                            <a:latin typeface="Cambria Math" panose="02040503050406030204" pitchFamily="18" charset="0"/>
+                          </a:rPr>
+                          <m:t>𝑤</m:t>
+                        </m:r>
+                      </m:e>
+                      <m:sub>
+                        <m:r>
+                          <a:rPr lang="en-US" altLang="ko-KR" sz="1400" b="0" i="1" smtClean="0">
+                            <a:latin typeface="Cambria Math" panose="02040503050406030204" pitchFamily="18" charset="0"/>
+                          </a:rPr>
+                          <m:t>1</m:t>
+                        </m:r>
+                      </m:sub>
+                    </m:sSub>
+                    <m:d>
+                      <m:dPr>
+                        <m:ctrlPr>
+                          <a:rPr lang="en-US" altLang="ko-KR" sz="1400" b="0" i="1" smtClean="0">
+                            <a:latin typeface="Cambria Math" panose="02040503050406030204" pitchFamily="18" charset="0"/>
+                          </a:rPr>
+                        </m:ctrlPr>
+                      </m:dPr>
+                      <m:e>
+                        <m:sSub>
+                          <m:sSubPr>
+                            <m:ctrlPr>
+                              <a:rPr lang="en-US" altLang="ko-KR" sz="1400" b="0" i="1" smtClean="0">
+                                <a:latin typeface="Cambria Math" panose="02040503050406030204" pitchFamily="18" charset="0"/>
+                              </a:rPr>
+                            </m:ctrlPr>
+                          </m:sSubPr>
+                          <m:e>
+                            <m:r>
+                              <a:rPr lang="en-US" altLang="ko-KR" sz="1400" b="0" i="1" smtClean="0">
+                                <a:latin typeface="Cambria Math" panose="02040503050406030204" pitchFamily="18" charset="0"/>
+                              </a:rPr>
+                              <m:t>𝑤</m:t>
+                            </m:r>
+                          </m:e>
+                          <m:sub>
+                            <m:r>
+                              <a:rPr lang="en-US" altLang="ko-KR" sz="1400" b="0" i="1" smtClean="0">
+                                <a:latin typeface="Cambria Math" panose="02040503050406030204" pitchFamily="18" charset="0"/>
+                              </a:rPr>
+                              <m:t>2</m:t>
+                            </m:r>
+                          </m:sub>
+                        </m:sSub>
+                        <m:r>
+                          <a:rPr lang="en-US" altLang="ko-KR" sz="1400" b="0" i="1" smtClean="0">
+                            <a:latin typeface="Cambria Math" panose="02040503050406030204" pitchFamily="18" charset="0"/>
+                          </a:rPr>
+                          <m:t>:</m:t>
+                        </m:r>
+                        <m:sSub>
+                          <m:sSubPr>
+                            <m:ctrlPr>
+                              <a:rPr lang="en-US" altLang="ko-KR" sz="1400" b="0" i="1" smtClean="0">
+                                <a:latin typeface="Cambria Math" panose="02040503050406030204" pitchFamily="18" charset="0"/>
+                              </a:rPr>
+                            </m:ctrlPr>
+                          </m:sSubPr>
+                          <m:e>
+                            <m:r>
+                              <a:rPr lang="en-US" altLang="ko-KR" sz="1400" b="0" i="1" smtClean="0">
+                                <a:latin typeface="Cambria Math" panose="02040503050406030204" pitchFamily="18" charset="0"/>
+                              </a:rPr>
+                              <m:t>𝑤</m:t>
+                            </m:r>
+                          </m:e>
+                          <m:sub>
+                            <m:r>
+                              <a:rPr lang="en-US" altLang="ko-KR" sz="1400" b="0" i="1" smtClean="0">
+                                <a:latin typeface="Cambria Math" panose="02040503050406030204" pitchFamily="18" charset="0"/>
+                              </a:rPr>
+                              <m:t>3</m:t>
+                            </m:r>
+                          </m:sub>
+                        </m:sSub>
+                      </m:e>
+                    </m:d>
+                    <m:r>
+                      <a:rPr lang="en-US" altLang="ko-KR" sz="1400" b="0" i="1" smtClean="0">
+                        <a:latin typeface="Cambria Math" panose="02040503050406030204" pitchFamily="18" charset="0"/>
+                      </a:rPr>
+                      <m:t>   (2)</m:t>
+                    </m:r>
+                  </m:oMath>
+                </a14:m>
+                <a:endParaRPr lang="en-US" altLang="ko-KR" sz="1400" dirty="0"/>
+              </a:p>
+              <a:p>
+                <a:pPr marL="285750" indent="-285750">
+                  <a:lnSpc>
+                    <a:spcPct val="150000"/>
+                  </a:lnSpc>
+                  <a:buFont typeface="맑은 고딕" panose="020B0503020000020004" pitchFamily="50" charset="-127"/>
+                  <a:buChar char="-"/>
+                </a:pPr>
+                <a14:m>
+                  <m:oMath xmlns:m="http://schemas.openxmlformats.org/officeDocument/2006/math">
+                    <m:sSub>
+                      <m:sSubPr>
+                        <m:ctrlPr>
+                          <a:rPr lang="en-US" altLang="ko-KR" sz="1400" b="0" i="1" smtClean="0">
+                            <a:latin typeface="Cambria Math" panose="02040503050406030204" pitchFamily="18" charset="0"/>
+                          </a:rPr>
+                        </m:ctrlPr>
+                      </m:sSubPr>
+                      <m:e>
+                        <m:r>
+                          <a:rPr lang="en-US" altLang="ko-KR" sz="1400" b="0" i="1" smtClean="0">
+                            <a:latin typeface="Cambria Math" panose="02040503050406030204" pitchFamily="18" charset="0"/>
+                          </a:rPr>
+                          <m:t>𝐻</m:t>
+                        </m:r>
+                      </m:e>
+                      <m:sub>
+                        <m:r>
+                          <a:rPr lang="en-US" altLang="ko-KR" sz="1400" b="0" i="1" smtClean="0">
+                            <a:latin typeface="Cambria Math" panose="02040503050406030204" pitchFamily="18" charset="0"/>
+                          </a:rPr>
+                          <m:t>0</m:t>
+                        </m:r>
+                      </m:sub>
+                    </m:sSub>
+                    <m:r>
+                      <a:rPr lang="en-US" altLang="ko-KR" sz="1400" b="0" i="1" smtClean="0">
+                        <a:latin typeface="Cambria Math" panose="02040503050406030204" pitchFamily="18" charset="0"/>
+                      </a:rPr>
+                      <m:t> </m:t>
+                    </m:r>
+                  </m:oMath>
+                </a14:m>
+                <a:r>
+                  <a:rPr lang="ko-KR" altLang="en-US" sz="1400" dirty="0"/>
+                  <a:t>보다 </a:t>
+                </a:r>
+                <a14:m>
+                  <m:oMath xmlns:m="http://schemas.openxmlformats.org/officeDocument/2006/math">
+                    <m:sSub>
+                      <m:sSubPr>
+                        <m:ctrlPr>
+                          <a:rPr lang="en-US" altLang="ko-KR" sz="1400" b="0" i="1" smtClean="0">
+                            <a:latin typeface="Cambria Math" panose="02040503050406030204" pitchFamily="18" charset="0"/>
+                          </a:rPr>
+                        </m:ctrlPr>
+                      </m:sSubPr>
+                      <m:e>
+                        <m:r>
+                          <a:rPr lang="en-US" altLang="ko-KR" sz="1400" b="0" i="1" smtClean="0">
+                            <a:latin typeface="Cambria Math" panose="02040503050406030204" pitchFamily="18" charset="0"/>
+                          </a:rPr>
+                          <m:t>𝐻</m:t>
+                        </m:r>
+                      </m:e>
+                      <m:sub>
+                        <m:r>
+                          <a:rPr lang="en-US" altLang="ko-KR" sz="1400" b="0" i="1" smtClean="0">
+                            <a:latin typeface="Cambria Math" panose="02040503050406030204" pitchFamily="18" charset="0"/>
+                          </a:rPr>
+                          <m:t>1</m:t>
+                        </m:r>
+                      </m:sub>
+                    </m:sSub>
+                    <m:r>
+                      <a:rPr lang="ko-KR" altLang="en-US" sz="1400" i="1">
+                        <a:latin typeface="Cambria Math" panose="02040503050406030204" pitchFamily="18" charset="0"/>
+                      </a:rPr>
+                      <m:t>의</m:t>
+                    </m:r>
+                  </m:oMath>
+                </a14:m>
+                <a:r>
+                  <a:rPr lang="en-US" altLang="ko-KR" sz="1400" dirty="0"/>
+                  <a:t> cost</a:t>
+                </a:r>
+                <a:r>
+                  <a:rPr lang="ko-KR" altLang="en-US" sz="1400" dirty="0"/>
+                  <a:t>가</a:t>
+                </a:r>
+                <a:r>
+                  <a:rPr lang="en-US" altLang="ko-KR" sz="1400" dirty="0"/>
+                  <a:t> </a:t>
+                </a:r>
+                <a:r>
+                  <a:rPr lang="ko-KR" altLang="en-US" sz="1400" dirty="0"/>
+                  <a:t>더 작을 조건은 </a:t>
+                </a:r>
+                <a:r>
+                  <a:rPr lang="en-US" altLang="ko-KR" sz="1400" dirty="0"/>
+                  <a:t>(1) &lt; (2)</a:t>
+                </a:r>
+              </a:p>
+              <a:p>
+                <a:pPr marL="742950" lvl="1" indent="-285750">
+                  <a:lnSpc>
+                    <a:spcPct val="150000"/>
+                  </a:lnSpc>
+                  <a:buFont typeface="맑은 고딕" panose="020B0503020000020004" pitchFamily="50" charset="-127"/>
+                  <a:buChar char="-"/>
+                </a:pPr>
+                <a14:m>
+                  <m:oMath xmlns:m="http://schemas.openxmlformats.org/officeDocument/2006/math">
+                    <m:sSub>
+                      <m:sSubPr>
+                        <m:ctrlPr>
+                          <a:rPr lang="en-US" altLang="ko-KR" sz="1400" b="0" i="1" smtClean="0">
+                            <a:latin typeface="Cambria Math" panose="02040503050406030204" pitchFamily="18" charset="0"/>
+                          </a:rPr>
+                        </m:ctrlPr>
+                      </m:sSubPr>
+                      <m:e>
+                        <m:r>
+                          <a:rPr lang="en-US" altLang="ko-KR" sz="1400" b="0" i="1" smtClean="0">
+                            <a:latin typeface="Cambria Math" panose="02040503050406030204" pitchFamily="18" charset="0"/>
+                          </a:rPr>
+                          <m:t>𝑤</m:t>
+                        </m:r>
+                      </m:e>
+                      <m:sub>
+                        <m:r>
+                          <a:rPr lang="en-US" altLang="ko-KR" sz="1400" b="0" i="1" smtClean="0">
+                            <a:latin typeface="Cambria Math" panose="02040503050406030204" pitchFamily="18" charset="0"/>
+                          </a:rPr>
+                          <m:t>1</m:t>
+                        </m:r>
+                      </m:sub>
+                    </m:sSub>
+                    <m:sSub>
+                      <m:sSubPr>
+                        <m:ctrlPr>
+                          <a:rPr lang="en-US" altLang="ko-KR" sz="1400" b="0" i="1" smtClean="0">
+                            <a:latin typeface="Cambria Math" panose="02040503050406030204" pitchFamily="18" charset="0"/>
+                          </a:rPr>
+                        </m:ctrlPr>
+                      </m:sSubPr>
+                      <m:e>
+                        <m:r>
+                          <a:rPr lang="en-US" altLang="ko-KR" sz="1400" b="0" i="1" smtClean="0">
+                            <a:latin typeface="Cambria Math" panose="02040503050406030204" pitchFamily="18" charset="0"/>
+                          </a:rPr>
+                          <m:t>𝑤</m:t>
+                        </m:r>
+                      </m:e>
+                      <m:sub>
+                        <m:r>
+                          <a:rPr lang="en-US" altLang="ko-KR" sz="1400" b="0" i="1" smtClean="0">
+                            <a:latin typeface="Cambria Math" panose="02040503050406030204" pitchFamily="18" charset="0"/>
+                          </a:rPr>
+                          <m:t>2</m:t>
+                        </m:r>
+                      </m:sub>
+                    </m:sSub>
+                    <m:sSub>
+                      <m:sSubPr>
+                        <m:ctrlPr>
+                          <a:rPr lang="en-US" altLang="ko-KR" sz="1400" b="0" i="1" smtClean="0">
+                            <a:latin typeface="Cambria Math" panose="02040503050406030204" pitchFamily="18" charset="0"/>
+                          </a:rPr>
+                        </m:ctrlPr>
+                      </m:sSubPr>
+                      <m:e>
+                        <m:r>
+                          <a:rPr lang="en-US" altLang="ko-KR" sz="1400" b="0" i="1" smtClean="0">
+                            <a:latin typeface="Cambria Math" panose="02040503050406030204" pitchFamily="18" charset="0"/>
+                          </a:rPr>
+                          <m:t>𝑤</m:t>
+                        </m:r>
+                      </m:e>
+                      <m:sub>
+                        <m:r>
+                          <a:rPr lang="en-US" altLang="ko-KR" sz="1400" b="0" i="1" smtClean="0">
+                            <a:latin typeface="Cambria Math" panose="02040503050406030204" pitchFamily="18" charset="0"/>
+                          </a:rPr>
+                          <m:t>3</m:t>
+                        </m:r>
+                      </m:sub>
+                    </m:sSub>
+                    <m:r>
+                      <a:rPr lang="en-US" altLang="ko-KR" sz="1400" b="0" i="1" smtClean="0">
+                        <a:latin typeface="Cambria Math" panose="02040503050406030204" pitchFamily="18" charset="0"/>
+                      </a:rPr>
+                      <m:t>+</m:t>
+                    </m:r>
+                    <m:sSub>
+                      <m:sSubPr>
+                        <m:ctrlPr>
+                          <a:rPr lang="en-US" altLang="ko-KR" sz="1400" b="0" i="1" smtClean="0">
+                            <a:latin typeface="Cambria Math" panose="02040503050406030204" pitchFamily="18" charset="0"/>
+                          </a:rPr>
+                        </m:ctrlPr>
+                      </m:sSubPr>
+                      <m:e>
+                        <m:r>
+                          <a:rPr lang="en-US" altLang="ko-KR" sz="1400" b="0" i="1" smtClean="0">
+                            <a:latin typeface="Cambria Math" panose="02040503050406030204" pitchFamily="18" charset="0"/>
+                          </a:rPr>
+                          <m:t>𝑤</m:t>
+                        </m:r>
+                      </m:e>
+                      <m:sub>
+                        <m:r>
+                          <a:rPr lang="en-US" altLang="ko-KR" sz="1400" b="0" i="1" smtClean="0">
+                            <a:latin typeface="Cambria Math" panose="02040503050406030204" pitchFamily="18" charset="0"/>
+                          </a:rPr>
+                          <m:t>2</m:t>
+                        </m:r>
+                      </m:sub>
+                    </m:sSub>
+                    <m:d>
+                      <m:dPr>
+                        <m:ctrlPr>
+                          <a:rPr lang="en-US" altLang="ko-KR" sz="1400" b="0" i="1" smtClean="0">
+                            <a:latin typeface="Cambria Math" panose="02040503050406030204" pitchFamily="18" charset="0"/>
+                          </a:rPr>
+                        </m:ctrlPr>
+                      </m:dPr>
+                      <m:e>
+                        <m:sSub>
+                          <m:sSubPr>
+                            <m:ctrlPr>
+                              <a:rPr lang="en-US" altLang="ko-KR" sz="1400" b="0" i="1" smtClean="0">
+                                <a:latin typeface="Cambria Math" panose="02040503050406030204" pitchFamily="18" charset="0"/>
+                              </a:rPr>
+                            </m:ctrlPr>
+                          </m:sSubPr>
+                          <m:e>
+                            <m:r>
+                              <a:rPr lang="en-US" altLang="ko-KR" sz="1400" b="0" i="1" smtClean="0">
+                                <a:latin typeface="Cambria Math" panose="02040503050406030204" pitchFamily="18" charset="0"/>
+                              </a:rPr>
+                              <m:t>𝑤</m:t>
+                            </m:r>
+                          </m:e>
+                          <m:sub>
+                            <m:r>
+                              <a:rPr lang="en-US" altLang="ko-KR" sz="1400" b="0" i="1" smtClean="0">
+                                <a:latin typeface="Cambria Math" panose="02040503050406030204" pitchFamily="18" charset="0"/>
+                              </a:rPr>
+                              <m:t>𝑐</m:t>
+                            </m:r>
+                          </m:sub>
+                        </m:sSub>
+                        <m:r>
+                          <a:rPr lang="en-US" altLang="ko-KR" sz="1400" b="0" i="1" smtClean="0">
+                            <a:latin typeface="Cambria Math" panose="02040503050406030204" pitchFamily="18" charset="0"/>
+                          </a:rPr>
+                          <m:t>:</m:t>
+                        </m:r>
+                        <m:sSub>
+                          <m:sSubPr>
+                            <m:ctrlPr>
+                              <a:rPr lang="en-US" altLang="ko-KR" sz="1400" b="0" i="1" smtClean="0">
+                                <a:latin typeface="Cambria Math" panose="02040503050406030204" pitchFamily="18" charset="0"/>
+                              </a:rPr>
+                            </m:ctrlPr>
+                          </m:sSubPr>
+                          <m:e>
+                            <m:r>
+                              <a:rPr lang="en-US" altLang="ko-KR" sz="1400" b="0" i="1" smtClean="0">
+                                <a:latin typeface="Cambria Math" panose="02040503050406030204" pitchFamily="18" charset="0"/>
+                              </a:rPr>
+                              <m:t>𝑤</m:t>
+                            </m:r>
+                          </m:e>
+                          <m:sub>
+                            <m:r>
+                              <a:rPr lang="en-US" altLang="ko-KR" sz="1400" b="0" i="1" smtClean="0">
+                                <a:latin typeface="Cambria Math" panose="02040503050406030204" pitchFamily="18" charset="0"/>
+                              </a:rPr>
+                              <m:t>3</m:t>
+                            </m:r>
+                          </m:sub>
+                        </m:sSub>
+                      </m:e>
+                    </m:d>
+                    <m:r>
+                      <a:rPr lang="en-US" altLang="ko-KR" sz="1400" b="0" i="1" smtClean="0">
+                        <a:latin typeface="Cambria Math" panose="02040503050406030204" pitchFamily="18" charset="0"/>
+                      </a:rPr>
+                      <m:t>&lt;</m:t>
+                    </m:r>
+                    <m:sSub>
+                      <m:sSubPr>
+                        <m:ctrlPr>
+                          <a:rPr lang="en-US" altLang="ko-KR" sz="1400" b="0" i="1" smtClean="0">
+                            <a:latin typeface="Cambria Math" panose="02040503050406030204" pitchFamily="18" charset="0"/>
+                          </a:rPr>
+                        </m:ctrlPr>
+                      </m:sSubPr>
+                      <m:e>
+                        <m:r>
+                          <a:rPr lang="en-US" altLang="ko-KR" sz="1400" b="0" i="1" smtClean="0">
+                            <a:latin typeface="Cambria Math" panose="02040503050406030204" pitchFamily="18" charset="0"/>
+                          </a:rPr>
+                          <m:t>𝑤</m:t>
+                        </m:r>
+                      </m:e>
+                      <m:sub>
+                        <m:r>
+                          <a:rPr lang="en-US" altLang="ko-KR" sz="1400" b="0" i="1" smtClean="0">
+                            <a:latin typeface="Cambria Math" panose="02040503050406030204" pitchFamily="18" charset="0"/>
+                          </a:rPr>
+                          <m:t>1</m:t>
+                        </m:r>
+                      </m:sub>
+                    </m:sSub>
+                    <m:d>
+                      <m:dPr>
+                        <m:ctrlPr>
+                          <a:rPr lang="en-US" altLang="ko-KR" sz="1400" b="0" i="1" smtClean="0">
+                            <a:latin typeface="Cambria Math" panose="02040503050406030204" pitchFamily="18" charset="0"/>
+                          </a:rPr>
+                        </m:ctrlPr>
+                      </m:dPr>
+                      <m:e>
+                        <m:sSub>
+                          <m:sSubPr>
+                            <m:ctrlPr>
+                              <a:rPr lang="en-US" altLang="ko-KR" sz="1400" b="0" i="1" smtClean="0">
+                                <a:latin typeface="Cambria Math" panose="02040503050406030204" pitchFamily="18" charset="0"/>
+                              </a:rPr>
+                            </m:ctrlPr>
+                          </m:sSubPr>
+                          <m:e>
+                            <m:r>
+                              <a:rPr lang="en-US" altLang="ko-KR" sz="1400" b="0" i="1" smtClean="0">
+                                <a:latin typeface="Cambria Math" panose="02040503050406030204" pitchFamily="18" charset="0"/>
+                              </a:rPr>
+                              <m:t>𝑤</m:t>
+                            </m:r>
+                          </m:e>
+                          <m:sub>
+                            <m:r>
+                              <a:rPr lang="en-US" altLang="ko-KR" sz="1400" b="0" i="1" smtClean="0">
+                                <a:latin typeface="Cambria Math" panose="02040503050406030204" pitchFamily="18" charset="0"/>
+                              </a:rPr>
+                              <m:t>2</m:t>
+                            </m:r>
+                          </m:sub>
+                        </m:sSub>
+                        <m:r>
+                          <a:rPr lang="en-US" altLang="ko-KR" sz="1400" b="0" i="1" smtClean="0">
+                            <a:latin typeface="Cambria Math" panose="02040503050406030204" pitchFamily="18" charset="0"/>
+                          </a:rPr>
+                          <m:t>:</m:t>
+                        </m:r>
+                        <m:sSub>
+                          <m:sSubPr>
+                            <m:ctrlPr>
+                              <a:rPr lang="en-US" altLang="ko-KR" sz="1400" b="0" i="1" smtClean="0">
+                                <a:latin typeface="Cambria Math" panose="02040503050406030204" pitchFamily="18" charset="0"/>
+                              </a:rPr>
+                            </m:ctrlPr>
+                          </m:sSubPr>
+                          <m:e>
+                            <m:r>
+                              <a:rPr lang="en-US" altLang="ko-KR" sz="1400" b="0" i="1" smtClean="0">
+                                <a:latin typeface="Cambria Math" panose="02040503050406030204" pitchFamily="18" charset="0"/>
+                              </a:rPr>
+                              <m:t>𝑤</m:t>
+                            </m:r>
+                          </m:e>
+                          <m:sub>
+                            <m:r>
+                              <a:rPr lang="en-US" altLang="ko-KR" sz="1400" b="0" i="1" smtClean="0">
+                                <a:latin typeface="Cambria Math" panose="02040503050406030204" pitchFamily="18" charset="0"/>
+                              </a:rPr>
+                              <m:t>3</m:t>
+                            </m:r>
+                          </m:sub>
+                        </m:sSub>
+                      </m:e>
+                    </m:d>
+                  </m:oMath>
+                </a14:m>
+                <a:endParaRPr lang="en-US" altLang="ko-KR" sz="1400" b="0" dirty="0"/>
+              </a:p>
+              <a:p>
+                <a:pPr marL="742950" lvl="1" indent="-285750">
+                  <a:lnSpc>
+                    <a:spcPct val="150000"/>
+                  </a:lnSpc>
+                  <a:buFont typeface="맑은 고딕" panose="020B0503020000020004" pitchFamily="50" charset="-127"/>
+                  <a:buChar char="-"/>
+                </a:pPr>
+                <a14:m>
+                  <m:oMath xmlns:m="http://schemas.openxmlformats.org/officeDocument/2006/math">
+                    <m:f>
+                      <m:fPr>
+                        <m:ctrlPr>
+                          <a:rPr lang="en-US" altLang="ko-KR" sz="1400" b="0" i="1" smtClean="0">
+                            <a:latin typeface="Cambria Math" panose="02040503050406030204" pitchFamily="18" charset="0"/>
+                          </a:rPr>
+                        </m:ctrlPr>
+                      </m:fPr>
+                      <m:num>
+                        <m:sSub>
+                          <m:sSubPr>
+                            <m:ctrlPr>
+                              <a:rPr lang="en-US" altLang="ko-KR" sz="1400" b="0" i="1" smtClean="0">
+                                <a:latin typeface="Cambria Math" panose="02040503050406030204" pitchFamily="18" charset="0"/>
+                              </a:rPr>
+                            </m:ctrlPr>
+                          </m:sSubPr>
+                          <m:e>
+                            <m:r>
+                              <a:rPr lang="en-US" altLang="ko-KR" sz="1400" b="0" i="1" smtClean="0">
+                                <a:latin typeface="Cambria Math" panose="02040503050406030204" pitchFamily="18" charset="0"/>
+                              </a:rPr>
+                              <m:t>𝑤</m:t>
+                            </m:r>
+                          </m:e>
+                          <m:sub>
+                            <m:r>
+                              <a:rPr lang="en-US" altLang="ko-KR" sz="1400" b="0" i="1" smtClean="0">
+                                <a:latin typeface="Cambria Math" panose="02040503050406030204" pitchFamily="18" charset="0"/>
+                              </a:rPr>
+                              <m:t>2</m:t>
+                            </m:r>
+                          </m:sub>
+                        </m:sSub>
+                        <m:d>
+                          <m:dPr>
+                            <m:ctrlPr>
+                              <a:rPr lang="en-US" altLang="ko-KR" sz="1400" b="0" i="1" smtClean="0">
+                                <a:latin typeface="Cambria Math" panose="02040503050406030204" pitchFamily="18" charset="0"/>
+                              </a:rPr>
+                            </m:ctrlPr>
+                          </m:dPr>
+                          <m:e>
+                            <m:sSub>
+                              <m:sSubPr>
+                                <m:ctrlPr>
+                                  <a:rPr lang="en-US" altLang="ko-KR" sz="1400" b="0" i="1" smtClean="0">
+                                    <a:latin typeface="Cambria Math" panose="02040503050406030204" pitchFamily="18" charset="0"/>
+                                  </a:rPr>
+                                </m:ctrlPr>
+                              </m:sSubPr>
+                              <m:e>
+                                <m:r>
+                                  <a:rPr lang="en-US" altLang="ko-KR" sz="1400" b="0" i="1" smtClean="0">
+                                    <a:latin typeface="Cambria Math" panose="02040503050406030204" pitchFamily="18" charset="0"/>
+                                  </a:rPr>
+                                  <m:t>𝑤</m:t>
+                                </m:r>
+                              </m:e>
+                              <m:sub>
+                                <m:r>
+                                  <a:rPr lang="en-US" altLang="ko-KR" sz="1400" b="0" i="1" smtClean="0">
+                                    <a:latin typeface="Cambria Math" panose="02040503050406030204" pitchFamily="18" charset="0"/>
+                                  </a:rPr>
+                                  <m:t>𝑐</m:t>
+                                </m:r>
+                              </m:sub>
+                            </m:sSub>
+                            <m:r>
+                              <a:rPr lang="en-US" altLang="ko-KR" sz="1400" b="0" i="1" smtClean="0">
+                                <a:latin typeface="Cambria Math" panose="02040503050406030204" pitchFamily="18" charset="0"/>
+                              </a:rPr>
+                              <m:t>:</m:t>
+                            </m:r>
+                            <m:sSub>
+                              <m:sSubPr>
+                                <m:ctrlPr>
+                                  <a:rPr lang="en-US" altLang="ko-KR" sz="1400" b="0" i="1" smtClean="0">
+                                    <a:latin typeface="Cambria Math" panose="02040503050406030204" pitchFamily="18" charset="0"/>
+                                  </a:rPr>
+                                </m:ctrlPr>
+                              </m:sSubPr>
+                              <m:e>
+                                <m:r>
+                                  <a:rPr lang="en-US" altLang="ko-KR" sz="1400" b="0" i="1" smtClean="0">
+                                    <a:latin typeface="Cambria Math" panose="02040503050406030204" pitchFamily="18" charset="0"/>
+                                  </a:rPr>
+                                  <m:t>𝑤</m:t>
+                                </m:r>
+                              </m:e>
+                              <m:sub>
+                                <m:r>
+                                  <a:rPr lang="en-US" altLang="ko-KR" sz="1400" b="0" i="1" smtClean="0">
+                                    <a:latin typeface="Cambria Math" panose="02040503050406030204" pitchFamily="18" charset="0"/>
+                                  </a:rPr>
+                                  <m:t>3</m:t>
+                                </m:r>
+                              </m:sub>
+                            </m:sSub>
+                          </m:e>
+                        </m:d>
+                      </m:num>
+                      <m:den>
+                        <m:d>
+                          <m:dPr>
+                            <m:ctrlPr>
+                              <a:rPr lang="en-US" altLang="ko-KR" sz="1400" b="0" i="1" smtClean="0">
+                                <a:latin typeface="Cambria Math" panose="02040503050406030204" pitchFamily="18" charset="0"/>
+                              </a:rPr>
+                            </m:ctrlPr>
+                          </m:dPr>
+                          <m:e>
+                            <m:sSub>
+                              <m:sSubPr>
+                                <m:ctrlPr>
+                                  <a:rPr lang="en-US" altLang="ko-KR" sz="1400" b="0" i="1" smtClean="0">
+                                    <a:latin typeface="Cambria Math" panose="02040503050406030204" pitchFamily="18" charset="0"/>
+                                  </a:rPr>
+                                </m:ctrlPr>
+                              </m:sSubPr>
+                              <m:e>
+                                <m:r>
+                                  <a:rPr lang="en-US" altLang="ko-KR" sz="1400" b="0" i="1" smtClean="0">
+                                    <a:latin typeface="Cambria Math" panose="02040503050406030204" pitchFamily="18" charset="0"/>
+                                  </a:rPr>
+                                  <m:t>𝑤</m:t>
+                                </m:r>
+                              </m:e>
+                              <m:sub>
+                                <m:r>
+                                  <a:rPr lang="en-US" altLang="ko-KR" sz="1400" b="0" i="1" smtClean="0">
+                                    <a:latin typeface="Cambria Math" panose="02040503050406030204" pitchFamily="18" charset="0"/>
+                                  </a:rPr>
+                                  <m:t>2</m:t>
+                                </m:r>
+                              </m:sub>
+                            </m:sSub>
+                            <m:r>
+                              <a:rPr lang="en-US" altLang="ko-KR" sz="1400" b="0" i="1" smtClean="0">
+                                <a:latin typeface="Cambria Math" panose="02040503050406030204" pitchFamily="18" charset="0"/>
+                              </a:rPr>
+                              <m:t>:</m:t>
+                            </m:r>
+                            <m:sSub>
+                              <m:sSubPr>
+                                <m:ctrlPr>
+                                  <a:rPr lang="en-US" altLang="ko-KR" sz="1400" b="0" i="1" smtClean="0">
+                                    <a:latin typeface="Cambria Math" panose="02040503050406030204" pitchFamily="18" charset="0"/>
+                                  </a:rPr>
+                                </m:ctrlPr>
+                              </m:sSubPr>
+                              <m:e>
+                                <m:r>
+                                  <a:rPr lang="en-US" altLang="ko-KR" sz="1400" b="0" i="1" smtClean="0">
+                                    <a:latin typeface="Cambria Math" panose="02040503050406030204" pitchFamily="18" charset="0"/>
+                                  </a:rPr>
+                                  <m:t>𝑤</m:t>
+                                </m:r>
+                              </m:e>
+                              <m:sub>
+                                <m:r>
+                                  <a:rPr lang="en-US" altLang="ko-KR" sz="1400" b="0" i="1" smtClean="0">
+                                    <a:latin typeface="Cambria Math" panose="02040503050406030204" pitchFamily="18" charset="0"/>
+                                  </a:rPr>
+                                  <m:t>3</m:t>
+                                </m:r>
+                              </m:sub>
+                            </m:sSub>
+                          </m:e>
+                        </m:d>
+                        <m:r>
+                          <a:rPr lang="en-US" altLang="ko-KR" sz="1400" b="0" i="1" smtClean="0">
+                            <a:latin typeface="Cambria Math" panose="02040503050406030204" pitchFamily="18" charset="0"/>
+                          </a:rPr>
+                          <m:t>−</m:t>
+                        </m:r>
+                        <m:sSub>
+                          <m:sSubPr>
+                            <m:ctrlPr>
+                              <a:rPr lang="en-US" altLang="ko-KR" sz="1400" b="0" i="1" smtClean="0">
+                                <a:latin typeface="Cambria Math" panose="02040503050406030204" pitchFamily="18" charset="0"/>
+                              </a:rPr>
+                            </m:ctrlPr>
+                          </m:sSubPr>
+                          <m:e>
+                            <m:r>
+                              <a:rPr lang="en-US" altLang="ko-KR" sz="1400" b="0" i="1" smtClean="0">
+                                <a:latin typeface="Cambria Math" panose="02040503050406030204" pitchFamily="18" charset="0"/>
+                              </a:rPr>
+                              <m:t>𝑤</m:t>
+                            </m:r>
+                          </m:e>
+                          <m:sub>
+                            <m:r>
+                              <a:rPr lang="en-US" altLang="ko-KR" sz="1400" b="0" i="1" smtClean="0">
+                                <a:latin typeface="Cambria Math" panose="02040503050406030204" pitchFamily="18" charset="0"/>
+                              </a:rPr>
+                              <m:t>2</m:t>
+                            </m:r>
+                          </m:sub>
+                        </m:sSub>
+                        <m:sSub>
+                          <m:sSubPr>
+                            <m:ctrlPr>
+                              <a:rPr lang="en-US" altLang="ko-KR" sz="1400" b="0" i="1" smtClean="0">
+                                <a:latin typeface="Cambria Math" panose="02040503050406030204" pitchFamily="18" charset="0"/>
+                              </a:rPr>
+                            </m:ctrlPr>
+                          </m:sSubPr>
+                          <m:e>
+                            <m:r>
+                              <a:rPr lang="en-US" altLang="ko-KR" sz="1400" b="0" i="1" smtClean="0">
+                                <a:latin typeface="Cambria Math" panose="02040503050406030204" pitchFamily="18" charset="0"/>
+                              </a:rPr>
+                              <m:t>𝑤</m:t>
+                            </m:r>
+                          </m:e>
+                          <m:sub>
+                            <m:r>
+                              <a:rPr lang="en-US" altLang="ko-KR" sz="1400" b="0" i="1" smtClean="0">
+                                <a:latin typeface="Cambria Math" panose="02040503050406030204" pitchFamily="18" charset="0"/>
+                              </a:rPr>
+                              <m:t>3</m:t>
+                            </m:r>
+                          </m:sub>
+                        </m:sSub>
+                      </m:den>
+                    </m:f>
+                    <m:r>
+                      <a:rPr lang="en-US" altLang="ko-KR" sz="1400" b="0" i="1" smtClean="0">
+                        <a:latin typeface="Cambria Math" panose="02040503050406030204" pitchFamily="18" charset="0"/>
+                      </a:rPr>
+                      <m:t>&lt;</m:t>
+                    </m:r>
+                    <m:sSub>
+                      <m:sSubPr>
+                        <m:ctrlPr>
+                          <a:rPr lang="en-US" altLang="ko-KR" sz="1400" b="0" i="1" smtClean="0">
+                            <a:latin typeface="Cambria Math" panose="02040503050406030204" pitchFamily="18" charset="0"/>
+                          </a:rPr>
+                        </m:ctrlPr>
+                      </m:sSubPr>
+                      <m:e>
+                        <m:r>
+                          <a:rPr lang="en-US" altLang="ko-KR" sz="1400" b="0" i="1" smtClean="0">
+                            <a:latin typeface="Cambria Math" panose="02040503050406030204" pitchFamily="18" charset="0"/>
+                          </a:rPr>
+                          <m:t>𝑤</m:t>
+                        </m:r>
+                      </m:e>
+                      <m:sub>
+                        <m:r>
+                          <a:rPr lang="en-US" altLang="ko-KR" sz="1400" b="0" i="1" smtClean="0">
+                            <a:latin typeface="Cambria Math" panose="02040503050406030204" pitchFamily="18" charset="0"/>
+                          </a:rPr>
+                          <m:t>1</m:t>
+                        </m:r>
+                      </m:sub>
+                    </m:sSub>
+                  </m:oMath>
+                </a14:m>
+                <a:endParaRPr lang="en-US" altLang="ko-KR" sz="1400" dirty="0"/>
+              </a:p>
+              <a:p>
+                <a:pPr marL="285750" indent="-285750">
+                  <a:lnSpc>
+                    <a:spcPct val="150000"/>
+                  </a:lnSpc>
+                  <a:buFont typeface="맑은 고딕" panose="020B0503020000020004" pitchFamily="50" charset="-127"/>
+                  <a:buChar char="-"/>
+                </a:pPr>
+                <a:r>
+                  <a:rPr lang="ko-KR" altLang="en-US" sz="1400" dirty="0"/>
+                  <a:t>비슷하게 </a:t>
+                </a:r>
+                <a:r>
+                  <a:rPr lang="en-US" altLang="ko-KR" sz="1400" dirty="0"/>
+                  <a:t>fig 3a</a:t>
+                </a:r>
+                <a:r>
+                  <a:rPr lang="ko-KR" altLang="en-US" sz="1400" dirty="0"/>
+                  <a:t>가 </a:t>
+                </a:r>
+                <a14:m>
+                  <m:oMath xmlns:m="http://schemas.openxmlformats.org/officeDocument/2006/math">
+                    <m:sSub>
+                      <m:sSubPr>
+                        <m:ctrlPr>
+                          <a:rPr lang="en-US" altLang="ko-KR" sz="1400" b="0" i="1" smtClean="0">
+                            <a:latin typeface="Cambria Math" panose="02040503050406030204" pitchFamily="18" charset="0"/>
+                          </a:rPr>
+                        </m:ctrlPr>
+                      </m:sSubPr>
+                      <m:e>
+                        <m:r>
+                          <a:rPr lang="en-US" altLang="ko-KR" sz="1400" b="0" i="1" smtClean="0">
+                            <a:latin typeface="Cambria Math" panose="02040503050406030204" pitchFamily="18" charset="0"/>
+                          </a:rPr>
+                          <m:t>𝐻</m:t>
+                        </m:r>
+                      </m:e>
+                      <m:sub>
+                        <m:r>
+                          <a:rPr lang="en-US" altLang="ko-KR" sz="1400" b="0" i="1" smtClean="0">
+                            <a:latin typeface="Cambria Math" panose="02040503050406030204" pitchFamily="18" charset="0"/>
+                          </a:rPr>
+                          <m:t>0</m:t>
+                        </m:r>
+                      </m:sub>
+                    </m:sSub>
+                    <m:r>
+                      <a:rPr lang="ko-KR" altLang="en-US" sz="1400" i="1">
+                        <a:latin typeface="Cambria Math" panose="02040503050406030204" pitchFamily="18" charset="0"/>
+                      </a:rPr>
+                      <m:t>보</m:t>
+                    </m:r>
+                  </m:oMath>
+                </a14:m>
+                <a:r>
+                  <a:rPr lang="ko-KR" altLang="en-US" sz="1400" dirty="0"/>
+                  <a:t>다 작은 조건은</a:t>
+                </a:r>
+                <a:endParaRPr lang="en-US" altLang="ko-KR" sz="1400" dirty="0"/>
+              </a:p>
+              <a:p>
+                <a:pPr marL="742950" lvl="1" indent="-285750">
+                  <a:lnSpc>
+                    <a:spcPct val="150000"/>
+                  </a:lnSpc>
+                  <a:buFont typeface="맑은 고딕" panose="020B0503020000020004" pitchFamily="50" charset="-127"/>
+                  <a:buChar char="-"/>
+                </a:pPr>
+                <a14:m>
+                  <m:oMath xmlns:m="http://schemas.openxmlformats.org/officeDocument/2006/math">
+                    <m:sSub>
+                      <m:sSubPr>
+                        <m:ctrlPr>
+                          <a:rPr lang="en-US" altLang="ko-KR" sz="1400" b="0" i="1" smtClean="0">
+                            <a:latin typeface="Cambria Math" panose="02040503050406030204" pitchFamily="18" charset="0"/>
+                          </a:rPr>
+                        </m:ctrlPr>
+                      </m:sSubPr>
+                      <m:e>
+                        <m:r>
+                          <a:rPr lang="en-US" altLang="ko-KR" sz="1400" b="0" i="1" smtClean="0">
+                            <a:latin typeface="Cambria Math" panose="02040503050406030204" pitchFamily="18" charset="0"/>
+                          </a:rPr>
+                          <m:t>𝑤</m:t>
+                        </m:r>
+                      </m:e>
+                      <m:sub>
+                        <m:r>
+                          <a:rPr lang="en-US" altLang="ko-KR" sz="1400" b="0" i="1" smtClean="0">
+                            <a:latin typeface="Cambria Math" panose="02040503050406030204" pitchFamily="18" charset="0"/>
+                          </a:rPr>
+                          <m:t>𝑐</m:t>
+                        </m:r>
+                      </m:sub>
+                    </m:sSub>
+                    <m:d>
+                      <m:dPr>
+                        <m:ctrlPr>
+                          <a:rPr lang="en-US" altLang="ko-KR" sz="1400" b="0" i="1" smtClean="0">
+                            <a:latin typeface="Cambria Math" panose="02040503050406030204" pitchFamily="18" charset="0"/>
+                          </a:rPr>
+                        </m:ctrlPr>
+                      </m:dPr>
+                      <m:e>
+                        <m:sSub>
+                          <m:sSubPr>
+                            <m:ctrlPr>
+                              <a:rPr lang="en-US" altLang="ko-KR" sz="1400" b="0" i="1" smtClean="0">
+                                <a:latin typeface="Cambria Math" panose="02040503050406030204" pitchFamily="18" charset="0"/>
+                              </a:rPr>
+                            </m:ctrlPr>
+                          </m:sSubPr>
+                          <m:e>
+                            <m:r>
+                              <a:rPr lang="en-US" altLang="ko-KR" sz="1400" b="0" i="1" smtClean="0">
+                                <a:latin typeface="Cambria Math" panose="02040503050406030204" pitchFamily="18" charset="0"/>
+                              </a:rPr>
+                              <m:t>𝑤</m:t>
+                            </m:r>
+                          </m:e>
+                          <m:sub>
+                            <m:r>
+                              <a:rPr lang="en-US" altLang="ko-KR" sz="1400" b="0" i="1" smtClean="0">
+                                <a:latin typeface="Cambria Math" panose="02040503050406030204" pitchFamily="18" charset="0"/>
+                              </a:rPr>
+                              <m:t>𝑑</m:t>
+                            </m:r>
+                          </m:sub>
+                        </m:sSub>
+                        <m:r>
+                          <a:rPr lang="en-US" altLang="ko-KR" sz="1400" b="0" i="1" smtClean="0">
+                            <a:latin typeface="Cambria Math" panose="02040503050406030204" pitchFamily="18" charset="0"/>
+                          </a:rPr>
+                          <m:t>:</m:t>
+                        </m:r>
+                        <m:sSub>
+                          <m:sSubPr>
+                            <m:ctrlPr>
+                              <a:rPr lang="en-US" altLang="ko-KR" sz="1400" b="0" i="1" smtClean="0">
+                                <a:latin typeface="Cambria Math" panose="02040503050406030204" pitchFamily="18" charset="0"/>
+                              </a:rPr>
+                            </m:ctrlPr>
+                          </m:sSubPr>
+                          <m:e>
+                            <m:r>
+                              <a:rPr lang="en-US" altLang="ko-KR" sz="1400" b="0" i="1" smtClean="0">
+                                <a:latin typeface="Cambria Math" panose="02040503050406030204" pitchFamily="18" charset="0"/>
+                              </a:rPr>
+                              <m:t>𝑤</m:t>
+                            </m:r>
+                          </m:e>
+                          <m:sub>
+                            <m:r>
+                              <a:rPr lang="en-US" altLang="ko-KR" sz="1400" b="0" i="1" smtClean="0">
+                                <a:latin typeface="Cambria Math" panose="02040503050406030204" pitchFamily="18" charset="0"/>
+                              </a:rPr>
+                              <m:t>𝑖</m:t>
+                            </m:r>
+                          </m:sub>
+                        </m:sSub>
+                      </m:e>
+                    </m:d>
+                    <m:r>
+                      <a:rPr lang="en-US" altLang="ko-KR" sz="1400" b="0" i="1" smtClean="0">
+                        <a:latin typeface="Cambria Math" panose="02040503050406030204" pitchFamily="18" charset="0"/>
+                      </a:rPr>
+                      <m:t>+</m:t>
+                    </m:r>
+                    <m:sSub>
+                      <m:sSubPr>
+                        <m:ctrlPr>
+                          <a:rPr lang="en-US" altLang="ko-KR" sz="1400" b="0" i="1" smtClean="0">
+                            <a:solidFill>
+                              <a:schemeClr val="accent6">
+                                <a:lumMod val="60000"/>
+                                <a:lumOff val="40000"/>
+                              </a:schemeClr>
+                            </a:solidFill>
+                            <a:latin typeface="Cambria Math" panose="02040503050406030204" pitchFamily="18" charset="0"/>
+                          </a:rPr>
+                        </m:ctrlPr>
+                      </m:sSubPr>
+                      <m:e>
+                        <m:r>
+                          <a:rPr lang="en-US" altLang="ko-KR" sz="1400" b="0" i="1" smtClean="0">
+                            <a:solidFill>
+                              <a:schemeClr val="accent6">
+                                <a:lumMod val="60000"/>
+                                <a:lumOff val="40000"/>
+                              </a:schemeClr>
+                            </a:solidFill>
+                            <a:latin typeface="Cambria Math" panose="02040503050406030204" pitchFamily="18" charset="0"/>
+                          </a:rPr>
+                          <m:t>𝑤</m:t>
+                        </m:r>
+                      </m:e>
+                      <m:sub>
+                        <m:r>
+                          <a:rPr lang="en-US" altLang="ko-KR" sz="1400" b="0" i="1" smtClean="0">
+                            <a:solidFill>
+                              <a:schemeClr val="accent6">
+                                <a:lumMod val="60000"/>
+                                <a:lumOff val="40000"/>
+                              </a:schemeClr>
+                            </a:solidFill>
+                            <a:latin typeface="Cambria Math" panose="02040503050406030204" pitchFamily="18" charset="0"/>
+                          </a:rPr>
+                          <m:t>1</m:t>
+                        </m:r>
+                      </m:sub>
+                    </m:sSub>
+                    <m:sSub>
+                      <m:sSubPr>
+                        <m:ctrlPr>
+                          <a:rPr lang="en-US" altLang="ko-KR" sz="1400" b="0" i="1" smtClean="0">
+                            <a:solidFill>
+                              <a:schemeClr val="accent6">
+                                <a:lumMod val="60000"/>
+                                <a:lumOff val="40000"/>
+                              </a:schemeClr>
+                            </a:solidFill>
+                            <a:latin typeface="Cambria Math" panose="02040503050406030204" pitchFamily="18" charset="0"/>
+                          </a:rPr>
+                        </m:ctrlPr>
+                      </m:sSubPr>
+                      <m:e>
+                        <m:r>
+                          <a:rPr lang="en-US" altLang="ko-KR" sz="1400" b="0" i="1" smtClean="0">
+                            <a:solidFill>
+                              <a:schemeClr val="accent6">
+                                <a:lumMod val="60000"/>
+                                <a:lumOff val="40000"/>
+                              </a:schemeClr>
+                            </a:solidFill>
+                            <a:latin typeface="Cambria Math" panose="02040503050406030204" pitchFamily="18" charset="0"/>
+                          </a:rPr>
+                          <m:t>𝑤</m:t>
+                        </m:r>
+                      </m:e>
+                      <m:sub>
+                        <m:r>
+                          <a:rPr lang="en-US" altLang="ko-KR" sz="1400" b="0" i="1" smtClean="0">
+                            <a:solidFill>
+                              <a:schemeClr val="accent6">
+                                <a:lumMod val="60000"/>
+                                <a:lumOff val="40000"/>
+                              </a:schemeClr>
+                            </a:solidFill>
+                            <a:latin typeface="Cambria Math" panose="02040503050406030204" pitchFamily="18" charset="0"/>
+                          </a:rPr>
+                          <m:t>2</m:t>
+                        </m:r>
+                      </m:sub>
+                    </m:sSub>
+                    <m:sSub>
+                      <m:sSubPr>
+                        <m:ctrlPr>
+                          <a:rPr lang="en-US" altLang="ko-KR" sz="1400" b="0" i="1" smtClean="0">
+                            <a:solidFill>
+                              <a:schemeClr val="accent6">
+                                <a:lumMod val="60000"/>
+                                <a:lumOff val="40000"/>
+                              </a:schemeClr>
+                            </a:solidFill>
+                            <a:latin typeface="Cambria Math" panose="02040503050406030204" pitchFamily="18" charset="0"/>
+                          </a:rPr>
+                        </m:ctrlPr>
+                      </m:sSubPr>
+                      <m:e>
+                        <m:r>
+                          <a:rPr lang="en-US" altLang="ko-KR" sz="1400" b="0" i="1" smtClean="0">
+                            <a:solidFill>
+                              <a:schemeClr val="accent6">
+                                <a:lumMod val="60000"/>
+                                <a:lumOff val="40000"/>
+                              </a:schemeClr>
+                            </a:solidFill>
+                            <a:latin typeface="Cambria Math" panose="02040503050406030204" pitchFamily="18" charset="0"/>
+                          </a:rPr>
+                          <m:t>𝑤</m:t>
+                        </m:r>
+                      </m:e>
+                      <m:sub>
+                        <m:r>
+                          <a:rPr lang="en-US" altLang="ko-KR" sz="1400" b="0" i="1" smtClean="0">
+                            <a:solidFill>
+                              <a:schemeClr val="accent6">
+                                <a:lumMod val="60000"/>
+                                <a:lumOff val="40000"/>
+                              </a:schemeClr>
+                            </a:solidFill>
+                            <a:latin typeface="Cambria Math" panose="02040503050406030204" pitchFamily="18" charset="0"/>
+                          </a:rPr>
+                          <m:t>𝑐</m:t>
+                        </m:r>
+                      </m:sub>
+                    </m:sSub>
+                    <m:r>
+                      <a:rPr lang="en-US" altLang="ko-KR" sz="1400" b="0" i="1" smtClean="0">
+                        <a:latin typeface="Cambria Math" panose="02040503050406030204" pitchFamily="18" charset="0"/>
+                      </a:rPr>
+                      <m:t>+</m:t>
+                    </m:r>
+                    <m:sSub>
+                      <m:sSubPr>
+                        <m:ctrlPr>
+                          <a:rPr lang="en-US" altLang="ko-KR" sz="1400" b="0" i="1" smtClean="0">
+                            <a:latin typeface="Cambria Math" panose="02040503050406030204" pitchFamily="18" charset="0"/>
+                          </a:rPr>
+                        </m:ctrlPr>
+                      </m:sSubPr>
+                      <m:e>
+                        <m:r>
+                          <a:rPr lang="en-US" altLang="ko-KR" sz="1400" b="0" i="1" smtClean="0">
+                            <a:latin typeface="Cambria Math" panose="02040503050406030204" pitchFamily="18" charset="0"/>
+                          </a:rPr>
+                          <m:t>𝑤</m:t>
+                        </m:r>
+                      </m:e>
+                      <m:sub>
+                        <m:r>
+                          <a:rPr lang="en-US" altLang="ko-KR" sz="1400" b="0" i="1" smtClean="0">
+                            <a:latin typeface="Cambria Math" panose="02040503050406030204" pitchFamily="18" charset="0"/>
+                          </a:rPr>
+                          <m:t>1</m:t>
+                        </m:r>
+                      </m:sub>
+                    </m:sSub>
+                    <m:sSub>
+                      <m:sSubPr>
+                        <m:ctrlPr>
+                          <a:rPr lang="en-US" altLang="ko-KR" sz="1400" b="0" i="1" smtClean="0">
+                            <a:latin typeface="Cambria Math" panose="02040503050406030204" pitchFamily="18" charset="0"/>
+                          </a:rPr>
+                        </m:ctrlPr>
+                      </m:sSubPr>
+                      <m:e>
+                        <m:r>
+                          <a:rPr lang="en-US" altLang="ko-KR" sz="1400" b="0" i="1" smtClean="0">
+                            <a:latin typeface="Cambria Math" panose="02040503050406030204" pitchFamily="18" charset="0"/>
+                          </a:rPr>
+                          <m:t>𝑤</m:t>
+                        </m:r>
+                      </m:e>
+                      <m:sub>
+                        <m:r>
+                          <a:rPr lang="en-US" altLang="ko-KR" sz="1400" b="0" i="1" smtClean="0">
+                            <a:latin typeface="Cambria Math" panose="02040503050406030204" pitchFamily="18" charset="0"/>
+                          </a:rPr>
+                          <m:t>𝑐</m:t>
+                        </m:r>
+                      </m:sub>
+                    </m:sSub>
+                    <m:sSub>
+                      <m:sSubPr>
+                        <m:ctrlPr>
+                          <a:rPr lang="en-US" altLang="ko-KR" sz="1400" b="0" i="1" smtClean="0">
+                            <a:latin typeface="Cambria Math" panose="02040503050406030204" pitchFamily="18" charset="0"/>
+                          </a:rPr>
+                        </m:ctrlPr>
+                      </m:sSubPr>
+                      <m:e>
+                        <m:r>
+                          <a:rPr lang="en-US" altLang="ko-KR" sz="1400" b="0" i="1" smtClean="0">
+                            <a:latin typeface="Cambria Math" panose="02040503050406030204" pitchFamily="18" charset="0"/>
+                          </a:rPr>
+                          <m:t>𝑤</m:t>
+                        </m:r>
+                      </m:e>
+                      <m:sub>
+                        <m:r>
+                          <a:rPr lang="en-US" altLang="ko-KR" sz="1400" b="0" i="1" smtClean="0">
+                            <a:latin typeface="Cambria Math" panose="02040503050406030204" pitchFamily="18" charset="0"/>
+                          </a:rPr>
+                          <m:t>𝑖</m:t>
+                        </m:r>
+                      </m:sub>
+                    </m:sSub>
+                    <m:r>
+                      <a:rPr lang="en-US" altLang="ko-KR" sz="1400" b="0" i="1" smtClean="0">
+                        <a:latin typeface="Cambria Math" panose="02040503050406030204" pitchFamily="18" charset="0"/>
+                      </a:rPr>
+                      <m:t>+</m:t>
+                    </m:r>
+                    <m:sSub>
+                      <m:sSubPr>
+                        <m:ctrlPr>
+                          <a:rPr lang="en-US" altLang="ko-KR" sz="1400" b="0" i="1" smtClean="0">
+                            <a:solidFill>
+                              <a:srgbClr val="00B050"/>
+                            </a:solidFill>
+                            <a:latin typeface="Cambria Math" panose="02040503050406030204" pitchFamily="18" charset="0"/>
+                          </a:rPr>
+                        </m:ctrlPr>
+                      </m:sSubPr>
+                      <m:e>
+                        <m:r>
+                          <a:rPr lang="en-US" altLang="ko-KR" sz="1400" b="0" i="1" smtClean="0">
+                            <a:solidFill>
+                              <a:srgbClr val="00B050"/>
+                            </a:solidFill>
+                            <a:latin typeface="Cambria Math" panose="02040503050406030204" pitchFamily="18" charset="0"/>
+                          </a:rPr>
+                          <m:t>𝑤</m:t>
+                        </m:r>
+                      </m:e>
+                      <m:sub>
+                        <m:r>
+                          <a:rPr lang="en-US" altLang="ko-KR" sz="1400" b="0" i="1" smtClean="0">
+                            <a:solidFill>
+                              <a:srgbClr val="00B050"/>
+                            </a:solidFill>
+                            <a:latin typeface="Cambria Math" panose="02040503050406030204" pitchFamily="18" charset="0"/>
+                          </a:rPr>
+                          <m:t>1</m:t>
+                        </m:r>
+                      </m:sub>
+                    </m:sSub>
+                    <m:sSub>
+                      <m:sSubPr>
+                        <m:ctrlPr>
+                          <a:rPr lang="en-US" altLang="ko-KR" sz="1400" b="0" i="1" smtClean="0">
+                            <a:solidFill>
+                              <a:srgbClr val="00B050"/>
+                            </a:solidFill>
+                            <a:latin typeface="Cambria Math" panose="02040503050406030204" pitchFamily="18" charset="0"/>
+                          </a:rPr>
+                        </m:ctrlPr>
+                      </m:sSubPr>
+                      <m:e>
+                        <m:r>
+                          <a:rPr lang="en-US" altLang="ko-KR" sz="1400" b="0" i="1" smtClean="0">
+                            <a:solidFill>
+                              <a:srgbClr val="00B050"/>
+                            </a:solidFill>
+                            <a:latin typeface="Cambria Math" panose="02040503050406030204" pitchFamily="18" charset="0"/>
+                          </a:rPr>
+                          <m:t>𝑤</m:t>
+                        </m:r>
+                      </m:e>
+                      <m:sub>
+                        <m:r>
+                          <a:rPr lang="en-US" altLang="ko-KR" sz="1400" b="0" i="1" smtClean="0">
+                            <a:solidFill>
+                              <a:srgbClr val="00B050"/>
+                            </a:solidFill>
+                            <a:latin typeface="Cambria Math" panose="02040503050406030204" pitchFamily="18" charset="0"/>
+                          </a:rPr>
+                          <m:t>3</m:t>
+                        </m:r>
+                      </m:sub>
+                    </m:sSub>
+                    <m:sSub>
+                      <m:sSubPr>
+                        <m:ctrlPr>
+                          <a:rPr lang="en-US" altLang="ko-KR" sz="1400" b="0" i="1" smtClean="0">
+                            <a:solidFill>
+                              <a:srgbClr val="00B050"/>
+                            </a:solidFill>
+                            <a:latin typeface="Cambria Math" panose="02040503050406030204" pitchFamily="18" charset="0"/>
+                          </a:rPr>
+                        </m:ctrlPr>
+                      </m:sSubPr>
+                      <m:e>
+                        <m:r>
+                          <a:rPr lang="en-US" altLang="ko-KR" sz="1400" b="0" i="1" smtClean="0">
+                            <a:solidFill>
+                              <a:srgbClr val="00B050"/>
+                            </a:solidFill>
+                            <a:latin typeface="Cambria Math" panose="02040503050406030204" pitchFamily="18" charset="0"/>
+                          </a:rPr>
+                          <m:t>𝑤</m:t>
+                        </m:r>
+                      </m:e>
+                      <m:sub>
+                        <m:r>
+                          <a:rPr lang="en-US" altLang="ko-KR" sz="1400" b="0" i="1" smtClean="0">
+                            <a:solidFill>
+                              <a:srgbClr val="00B050"/>
+                            </a:solidFill>
+                            <a:latin typeface="Cambria Math" panose="02040503050406030204" pitchFamily="18" charset="0"/>
+                          </a:rPr>
+                          <m:t>𝑖</m:t>
+                        </m:r>
+                      </m:sub>
+                    </m:sSub>
+                  </m:oMath>
+                </a14:m>
+                <a:r>
+                  <a:rPr lang="en-US" altLang="ko-KR" sz="1400" dirty="0"/>
+                  <a:t> &lt; </a:t>
+                </a:r>
+                <a14:m>
+                  <m:oMath xmlns:m="http://schemas.openxmlformats.org/officeDocument/2006/math">
+                    <m:sSub>
+                      <m:sSubPr>
+                        <m:ctrlPr>
+                          <a:rPr lang="en-US" altLang="ko-KR" sz="1400" b="0" i="1" smtClean="0">
+                            <a:latin typeface="Cambria Math" panose="02040503050406030204" pitchFamily="18" charset="0"/>
+                          </a:rPr>
+                        </m:ctrlPr>
+                      </m:sSubPr>
+                      <m:e>
+                        <m:r>
+                          <a:rPr lang="en-US" altLang="ko-KR" sz="1400" b="0" i="1" smtClean="0">
+                            <a:latin typeface="Cambria Math" panose="02040503050406030204" pitchFamily="18" charset="0"/>
+                          </a:rPr>
+                          <m:t>𝑤</m:t>
+                        </m:r>
+                      </m:e>
+                      <m:sub>
+                        <m:r>
+                          <a:rPr lang="en-US" altLang="ko-KR" sz="1400" b="0" i="1" smtClean="0">
+                            <a:latin typeface="Cambria Math" panose="02040503050406030204" pitchFamily="18" charset="0"/>
+                          </a:rPr>
+                          <m:t>1</m:t>
+                        </m:r>
+                      </m:sub>
+                    </m:sSub>
+                    <m:d>
+                      <m:dPr>
+                        <m:ctrlPr>
+                          <a:rPr lang="en-US" altLang="ko-KR" sz="1400" b="0" i="1" smtClean="0">
+                            <a:latin typeface="Cambria Math" panose="02040503050406030204" pitchFamily="18" charset="0"/>
+                          </a:rPr>
+                        </m:ctrlPr>
+                      </m:dPr>
+                      <m:e>
+                        <m:sSub>
+                          <m:sSubPr>
+                            <m:ctrlPr>
+                              <a:rPr lang="en-US" altLang="ko-KR" sz="1400" b="0" i="1" smtClean="0">
+                                <a:solidFill>
+                                  <a:schemeClr val="accent6">
+                                    <a:lumMod val="60000"/>
+                                    <a:lumOff val="40000"/>
+                                  </a:schemeClr>
+                                </a:solidFill>
+                                <a:latin typeface="Cambria Math" panose="02040503050406030204" pitchFamily="18" charset="0"/>
+                              </a:rPr>
+                            </m:ctrlPr>
+                          </m:sSubPr>
+                          <m:e>
+                            <m:r>
+                              <a:rPr lang="en-US" altLang="ko-KR" sz="1400" b="0" i="1" smtClean="0">
+                                <a:solidFill>
+                                  <a:schemeClr val="accent6">
+                                    <a:lumMod val="60000"/>
+                                    <a:lumOff val="40000"/>
+                                  </a:schemeClr>
+                                </a:solidFill>
+                                <a:latin typeface="Cambria Math" panose="02040503050406030204" pitchFamily="18" charset="0"/>
+                              </a:rPr>
+                              <m:t>𝑤</m:t>
+                            </m:r>
+                          </m:e>
+                          <m:sub>
+                            <m:r>
+                              <a:rPr lang="en-US" altLang="ko-KR" sz="1400" b="0" i="1" smtClean="0">
+                                <a:solidFill>
+                                  <a:schemeClr val="accent6">
+                                    <a:lumMod val="60000"/>
+                                    <a:lumOff val="40000"/>
+                                  </a:schemeClr>
+                                </a:solidFill>
+                                <a:latin typeface="Cambria Math" panose="02040503050406030204" pitchFamily="18" charset="0"/>
+                              </a:rPr>
+                              <m:t>2</m:t>
+                            </m:r>
+                          </m:sub>
+                        </m:sSub>
+                        <m:sSub>
+                          <m:sSubPr>
+                            <m:ctrlPr>
+                              <a:rPr lang="en-US" altLang="ko-KR" sz="1400" b="0" i="1" smtClean="0">
+                                <a:solidFill>
+                                  <a:schemeClr val="accent6">
+                                    <a:lumMod val="60000"/>
+                                    <a:lumOff val="40000"/>
+                                  </a:schemeClr>
+                                </a:solidFill>
+                                <a:latin typeface="Cambria Math" panose="02040503050406030204" pitchFamily="18" charset="0"/>
+                              </a:rPr>
+                            </m:ctrlPr>
+                          </m:sSubPr>
+                          <m:e>
+                            <m:r>
+                              <a:rPr lang="en-US" altLang="ko-KR" sz="1400" b="0" i="1" smtClean="0">
+                                <a:solidFill>
+                                  <a:schemeClr val="accent6">
+                                    <a:lumMod val="60000"/>
+                                    <a:lumOff val="40000"/>
+                                  </a:schemeClr>
+                                </a:solidFill>
+                                <a:latin typeface="Cambria Math" panose="02040503050406030204" pitchFamily="18" charset="0"/>
+                              </a:rPr>
+                              <m:t>𝑤</m:t>
+                            </m:r>
+                          </m:e>
+                          <m:sub>
+                            <m:r>
+                              <a:rPr lang="en-US" altLang="ko-KR" sz="1400" b="0" i="1" smtClean="0">
+                                <a:solidFill>
+                                  <a:schemeClr val="accent6">
+                                    <a:lumMod val="60000"/>
+                                    <a:lumOff val="40000"/>
+                                  </a:schemeClr>
+                                </a:solidFill>
+                                <a:latin typeface="Cambria Math" panose="02040503050406030204" pitchFamily="18" charset="0"/>
+                              </a:rPr>
+                              <m:t>𝑐</m:t>
+                            </m:r>
+                          </m:sub>
+                        </m:sSub>
+                        <m:r>
+                          <a:rPr lang="en-US" altLang="ko-KR" sz="1400" b="0" i="1" smtClean="0">
+                            <a:latin typeface="Cambria Math" panose="02040503050406030204" pitchFamily="18" charset="0"/>
+                          </a:rPr>
+                          <m:t>+</m:t>
+                        </m:r>
+                        <m:sSub>
+                          <m:sSubPr>
+                            <m:ctrlPr>
+                              <a:rPr lang="en-US" altLang="ko-KR" sz="1400" b="0" i="1" smtClean="0">
+                                <a:latin typeface="Cambria Math" panose="02040503050406030204" pitchFamily="18" charset="0"/>
+                              </a:rPr>
+                            </m:ctrlPr>
+                          </m:sSubPr>
+                          <m:e>
+                            <m:r>
+                              <a:rPr lang="en-US" altLang="ko-KR" sz="1400" b="0" i="1" smtClean="0">
+                                <a:latin typeface="Cambria Math" panose="02040503050406030204" pitchFamily="18" charset="0"/>
+                              </a:rPr>
+                              <m:t>𝑤</m:t>
+                            </m:r>
+                          </m:e>
+                          <m:sub>
+                            <m:r>
+                              <a:rPr lang="en-US" altLang="ko-KR" sz="1400" b="0" i="1" smtClean="0">
+                                <a:latin typeface="Cambria Math" panose="02040503050406030204" pitchFamily="18" charset="0"/>
+                              </a:rPr>
+                              <m:t>𝑐</m:t>
+                            </m:r>
+                          </m:sub>
+                        </m:sSub>
+                        <m:sSub>
+                          <m:sSubPr>
+                            <m:ctrlPr>
+                              <a:rPr lang="en-US" altLang="ko-KR" sz="1400" b="0" i="1" smtClean="0">
+                                <a:latin typeface="Cambria Math" panose="02040503050406030204" pitchFamily="18" charset="0"/>
+                              </a:rPr>
+                            </m:ctrlPr>
+                          </m:sSubPr>
+                          <m:e>
+                            <m:r>
+                              <a:rPr lang="en-US" altLang="ko-KR" sz="1400" b="0" i="1" smtClean="0">
+                                <a:latin typeface="Cambria Math" panose="02040503050406030204" pitchFamily="18" charset="0"/>
+                              </a:rPr>
+                              <m:t>𝑤</m:t>
+                            </m:r>
+                          </m:e>
+                          <m:sub>
+                            <m:r>
+                              <a:rPr lang="en-US" altLang="ko-KR" sz="1400" b="0" i="1" smtClean="0">
+                                <a:latin typeface="Cambria Math" panose="02040503050406030204" pitchFamily="18" charset="0"/>
+                              </a:rPr>
+                              <m:t>𝑑</m:t>
+                            </m:r>
+                          </m:sub>
+                        </m:sSub>
+                        <m:r>
+                          <a:rPr lang="en-US" altLang="ko-KR" sz="1400" b="0" i="1" smtClean="0">
+                            <a:latin typeface="Cambria Math" panose="02040503050406030204" pitchFamily="18" charset="0"/>
+                          </a:rPr>
+                          <m:t>+…+</m:t>
+                        </m:r>
+                        <m:sSub>
+                          <m:sSubPr>
+                            <m:ctrlPr>
+                              <a:rPr lang="en-US" altLang="ko-KR" sz="1400" b="0" i="1" smtClean="0">
+                                <a:latin typeface="Cambria Math" panose="02040503050406030204" pitchFamily="18" charset="0"/>
+                              </a:rPr>
+                            </m:ctrlPr>
+                          </m:sSubPr>
+                          <m:e>
+                            <m:r>
+                              <a:rPr lang="en-US" altLang="ko-KR" sz="1400" b="0" i="1" smtClean="0">
+                                <a:latin typeface="Cambria Math" panose="02040503050406030204" pitchFamily="18" charset="0"/>
+                              </a:rPr>
+                              <m:t>𝑤</m:t>
+                            </m:r>
+                          </m:e>
+                          <m:sub>
+                            <m:r>
+                              <a:rPr lang="en-US" altLang="ko-KR" sz="1400" b="0" i="1" smtClean="0">
+                                <a:latin typeface="Cambria Math" panose="02040503050406030204" pitchFamily="18" charset="0"/>
+                              </a:rPr>
+                              <m:t>h</m:t>
+                            </m:r>
+                          </m:sub>
+                        </m:sSub>
+                        <m:sSub>
+                          <m:sSubPr>
+                            <m:ctrlPr>
+                              <a:rPr lang="en-US" altLang="ko-KR" sz="1400" b="0" i="1" smtClean="0">
+                                <a:latin typeface="Cambria Math" panose="02040503050406030204" pitchFamily="18" charset="0"/>
+                              </a:rPr>
+                            </m:ctrlPr>
+                          </m:sSubPr>
+                          <m:e>
+                            <m:r>
+                              <a:rPr lang="en-US" altLang="ko-KR" sz="1400" b="0" i="1" smtClean="0">
+                                <a:latin typeface="Cambria Math" panose="02040503050406030204" pitchFamily="18" charset="0"/>
+                              </a:rPr>
+                              <m:t>𝑤</m:t>
+                            </m:r>
+                          </m:e>
+                          <m:sub>
+                            <m:r>
+                              <a:rPr lang="en-US" altLang="ko-KR" sz="1400" b="0" i="1" smtClean="0">
+                                <a:latin typeface="Cambria Math" panose="02040503050406030204" pitchFamily="18" charset="0"/>
+                              </a:rPr>
+                              <m:t>𝑖</m:t>
+                            </m:r>
+                          </m:sub>
+                        </m:sSub>
+                        <m:r>
+                          <a:rPr lang="en-US" altLang="ko-KR" sz="1400" b="0" i="1" smtClean="0">
+                            <a:latin typeface="Cambria Math" panose="02040503050406030204" pitchFamily="18" charset="0"/>
+                          </a:rPr>
+                          <m:t>+</m:t>
+                        </m:r>
+                        <m:sSub>
+                          <m:sSubPr>
+                            <m:ctrlPr>
+                              <a:rPr lang="en-US" altLang="ko-KR" sz="1400" b="0" i="1" smtClean="0">
+                                <a:solidFill>
+                                  <a:srgbClr val="00B050"/>
+                                </a:solidFill>
+                                <a:latin typeface="Cambria Math" panose="02040503050406030204" pitchFamily="18" charset="0"/>
+                              </a:rPr>
+                            </m:ctrlPr>
+                          </m:sSubPr>
+                          <m:e>
+                            <m:r>
+                              <a:rPr lang="en-US" altLang="ko-KR" sz="1400" b="0" i="1" smtClean="0">
+                                <a:solidFill>
+                                  <a:srgbClr val="00B050"/>
+                                </a:solidFill>
+                                <a:latin typeface="Cambria Math" panose="02040503050406030204" pitchFamily="18" charset="0"/>
+                              </a:rPr>
+                              <m:t>𝑤</m:t>
+                            </m:r>
+                          </m:e>
+                          <m:sub>
+                            <m:r>
+                              <a:rPr lang="en-US" altLang="ko-KR" sz="1400" b="0" i="1" smtClean="0">
+                                <a:solidFill>
+                                  <a:srgbClr val="00B050"/>
+                                </a:solidFill>
+                                <a:latin typeface="Cambria Math" panose="02040503050406030204" pitchFamily="18" charset="0"/>
+                              </a:rPr>
+                              <m:t>𝑖</m:t>
+                            </m:r>
+                          </m:sub>
+                        </m:sSub>
+                        <m:sSub>
+                          <m:sSubPr>
+                            <m:ctrlPr>
+                              <a:rPr lang="en-US" altLang="ko-KR" sz="1400" b="0" i="1" smtClean="0">
+                                <a:solidFill>
+                                  <a:srgbClr val="00B050"/>
+                                </a:solidFill>
+                                <a:latin typeface="Cambria Math" panose="02040503050406030204" pitchFamily="18" charset="0"/>
+                              </a:rPr>
+                            </m:ctrlPr>
+                          </m:sSubPr>
+                          <m:e>
+                            <m:r>
+                              <a:rPr lang="en-US" altLang="ko-KR" sz="1400" b="0" i="1" smtClean="0">
+                                <a:solidFill>
+                                  <a:srgbClr val="00B050"/>
+                                </a:solidFill>
+                                <a:latin typeface="Cambria Math" panose="02040503050406030204" pitchFamily="18" charset="0"/>
+                              </a:rPr>
+                              <m:t>𝑤</m:t>
+                            </m:r>
+                          </m:e>
+                          <m:sub>
+                            <m:r>
+                              <a:rPr lang="en-US" altLang="ko-KR" sz="1400" b="0" i="1" smtClean="0">
+                                <a:solidFill>
+                                  <a:srgbClr val="00B050"/>
+                                </a:solidFill>
+                                <a:latin typeface="Cambria Math" panose="02040503050406030204" pitchFamily="18" charset="0"/>
+                              </a:rPr>
+                              <m:t>3</m:t>
+                            </m:r>
+                          </m:sub>
+                        </m:sSub>
+                      </m:e>
+                    </m:d>
+                  </m:oMath>
+                </a14:m>
+                <a:endParaRPr lang="en-US" altLang="ko-KR" sz="1400" b="0" dirty="0"/>
+              </a:p>
+              <a:p>
+                <a:pPr marL="742950" lvl="1" indent="-285750">
+                  <a:lnSpc>
+                    <a:spcPct val="150000"/>
+                  </a:lnSpc>
+                  <a:buFont typeface="맑은 고딕" panose="020B0503020000020004" pitchFamily="50" charset="-127"/>
+                  <a:buChar char="-"/>
+                </a:pPr>
+                <a14:m>
+                  <m:oMath xmlns:m="http://schemas.openxmlformats.org/officeDocument/2006/math">
+                    <m:f>
+                      <m:fPr>
+                        <m:ctrlPr>
+                          <a:rPr lang="en-US" altLang="ko-KR" sz="1400" b="0" i="1" smtClean="0">
+                            <a:latin typeface="Cambria Math" panose="02040503050406030204" pitchFamily="18" charset="0"/>
+                          </a:rPr>
+                        </m:ctrlPr>
+                      </m:fPr>
+                      <m:num>
+                        <m:sSub>
+                          <m:sSubPr>
+                            <m:ctrlPr>
+                              <a:rPr lang="en-US" altLang="ko-KR" sz="1400" b="0" i="1" smtClean="0">
+                                <a:latin typeface="Cambria Math" panose="02040503050406030204" pitchFamily="18" charset="0"/>
+                              </a:rPr>
+                            </m:ctrlPr>
+                          </m:sSubPr>
+                          <m:e>
+                            <m:r>
+                              <a:rPr lang="en-US" altLang="ko-KR" sz="1400" b="0" i="1" smtClean="0">
+                                <a:latin typeface="Cambria Math" panose="02040503050406030204" pitchFamily="18" charset="0"/>
+                              </a:rPr>
+                              <m:t>𝑤</m:t>
+                            </m:r>
+                          </m:e>
+                          <m:sub>
+                            <m:r>
+                              <a:rPr lang="en-US" altLang="ko-KR" sz="1400" b="0" i="1" smtClean="0">
+                                <a:latin typeface="Cambria Math" panose="02040503050406030204" pitchFamily="18" charset="0"/>
+                              </a:rPr>
+                              <m:t>𝑐</m:t>
+                            </m:r>
+                          </m:sub>
+                        </m:sSub>
+                        <m:d>
+                          <m:dPr>
+                            <m:ctrlPr>
+                              <a:rPr lang="en-US" altLang="ko-KR" sz="1400" b="0" i="1" smtClean="0">
+                                <a:latin typeface="Cambria Math" panose="02040503050406030204" pitchFamily="18" charset="0"/>
+                              </a:rPr>
+                            </m:ctrlPr>
+                          </m:dPr>
+                          <m:e>
+                            <m:sSub>
+                              <m:sSubPr>
+                                <m:ctrlPr>
+                                  <a:rPr lang="en-US" altLang="ko-KR" sz="1400" b="0" i="1" smtClean="0">
+                                    <a:latin typeface="Cambria Math" panose="02040503050406030204" pitchFamily="18" charset="0"/>
+                                  </a:rPr>
+                                </m:ctrlPr>
+                              </m:sSubPr>
+                              <m:e>
+                                <m:r>
+                                  <a:rPr lang="en-US" altLang="ko-KR" sz="1400" b="0" i="1" smtClean="0">
+                                    <a:latin typeface="Cambria Math" panose="02040503050406030204" pitchFamily="18" charset="0"/>
+                                  </a:rPr>
+                                  <m:t>𝑤</m:t>
+                                </m:r>
+                              </m:e>
+                              <m:sub>
+                                <m:r>
+                                  <a:rPr lang="en-US" altLang="ko-KR" sz="1400" b="0" i="1" smtClean="0">
+                                    <a:latin typeface="Cambria Math" panose="02040503050406030204" pitchFamily="18" charset="0"/>
+                                  </a:rPr>
+                                  <m:t>𝑑</m:t>
+                                </m:r>
+                              </m:sub>
+                            </m:sSub>
+                            <m:r>
+                              <a:rPr lang="en-US" altLang="ko-KR" sz="1400" b="0" i="1" smtClean="0">
+                                <a:latin typeface="Cambria Math" panose="02040503050406030204" pitchFamily="18" charset="0"/>
+                              </a:rPr>
+                              <m:t>:</m:t>
+                            </m:r>
+                            <m:sSub>
+                              <m:sSubPr>
+                                <m:ctrlPr>
+                                  <a:rPr lang="en-US" altLang="ko-KR" sz="1400" b="0" i="1" smtClean="0">
+                                    <a:latin typeface="Cambria Math" panose="02040503050406030204" pitchFamily="18" charset="0"/>
+                                  </a:rPr>
+                                </m:ctrlPr>
+                              </m:sSubPr>
+                              <m:e>
+                                <m:r>
+                                  <a:rPr lang="en-US" altLang="ko-KR" sz="1400" b="0" i="1" smtClean="0">
+                                    <a:latin typeface="Cambria Math" panose="02040503050406030204" pitchFamily="18" charset="0"/>
+                                  </a:rPr>
+                                  <m:t>𝑤</m:t>
+                                </m:r>
+                              </m:e>
+                              <m:sub>
+                                <m:r>
+                                  <a:rPr lang="en-US" altLang="ko-KR" sz="1400" b="0" i="1" smtClean="0">
+                                    <a:latin typeface="Cambria Math" panose="02040503050406030204" pitchFamily="18" charset="0"/>
+                                  </a:rPr>
+                                  <m:t>𝑖</m:t>
+                                </m:r>
+                              </m:sub>
+                            </m:sSub>
+                          </m:e>
+                        </m:d>
+                      </m:num>
+                      <m:den>
+                        <m:d>
+                          <m:dPr>
+                            <m:ctrlPr>
+                              <a:rPr lang="en-US" altLang="ko-KR" sz="1400" b="0" i="1" smtClean="0">
+                                <a:latin typeface="Cambria Math" panose="02040503050406030204" pitchFamily="18" charset="0"/>
+                              </a:rPr>
+                            </m:ctrlPr>
+                          </m:dPr>
+                          <m:e>
+                            <m:sSub>
+                              <m:sSubPr>
+                                <m:ctrlPr>
+                                  <a:rPr lang="en-US" altLang="ko-KR" sz="1400" b="0" i="1" smtClean="0">
+                                    <a:latin typeface="Cambria Math" panose="02040503050406030204" pitchFamily="18" charset="0"/>
+                                  </a:rPr>
+                                </m:ctrlPr>
+                              </m:sSubPr>
+                              <m:e>
+                                <m:r>
+                                  <a:rPr lang="en-US" altLang="ko-KR" sz="1400" b="0" i="1" smtClean="0">
+                                    <a:latin typeface="Cambria Math" panose="02040503050406030204" pitchFamily="18" charset="0"/>
+                                  </a:rPr>
+                                  <m:t>𝑤</m:t>
+                                </m:r>
+                              </m:e>
+                              <m:sub>
+                                <m:r>
+                                  <a:rPr lang="en-US" altLang="ko-KR" sz="1400" b="0" i="1" smtClean="0">
+                                    <a:latin typeface="Cambria Math" panose="02040503050406030204" pitchFamily="18" charset="0"/>
+                                  </a:rPr>
+                                  <m:t>𝑐</m:t>
+                                </m:r>
+                              </m:sub>
+                            </m:sSub>
+                            <m:r>
+                              <a:rPr lang="en-US" altLang="ko-KR" sz="1400" b="0" i="1" smtClean="0">
+                                <a:latin typeface="Cambria Math" panose="02040503050406030204" pitchFamily="18" charset="0"/>
+                              </a:rPr>
+                              <m:t>:</m:t>
+                            </m:r>
+                            <m:sSub>
+                              <m:sSubPr>
+                                <m:ctrlPr>
+                                  <a:rPr lang="en-US" altLang="ko-KR" sz="1400" b="0" i="1" smtClean="0">
+                                    <a:latin typeface="Cambria Math" panose="02040503050406030204" pitchFamily="18" charset="0"/>
+                                  </a:rPr>
+                                </m:ctrlPr>
+                              </m:sSubPr>
+                              <m:e>
+                                <m:r>
+                                  <a:rPr lang="en-US" altLang="ko-KR" sz="1400" b="0" i="1" smtClean="0">
+                                    <a:latin typeface="Cambria Math" panose="02040503050406030204" pitchFamily="18" charset="0"/>
+                                  </a:rPr>
+                                  <m:t>𝑤</m:t>
+                                </m:r>
+                              </m:e>
+                              <m:sub>
+                                <m:r>
+                                  <a:rPr lang="en-US" altLang="ko-KR" sz="1400" b="0" i="1" smtClean="0">
+                                    <a:latin typeface="Cambria Math" panose="02040503050406030204" pitchFamily="18" charset="0"/>
+                                  </a:rPr>
+                                  <m:t>𝑖</m:t>
+                                </m:r>
+                              </m:sub>
+                            </m:sSub>
+                          </m:e>
+                        </m:d>
+                        <m:r>
+                          <a:rPr lang="en-US" altLang="ko-KR" sz="1400" b="0" i="1" smtClean="0">
+                            <a:latin typeface="Cambria Math" panose="02040503050406030204" pitchFamily="18" charset="0"/>
+                          </a:rPr>
+                          <m:t>−</m:t>
+                        </m:r>
+                        <m:sSub>
+                          <m:sSubPr>
+                            <m:ctrlPr>
+                              <a:rPr lang="en-US" altLang="ko-KR" sz="1400" b="0" i="1" smtClean="0">
+                                <a:latin typeface="Cambria Math" panose="02040503050406030204" pitchFamily="18" charset="0"/>
+                              </a:rPr>
+                            </m:ctrlPr>
+                          </m:sSubPr>
+                          <m:e>
+                            <m:r>
+                              <a:rPr lang="en-US" altLang="ko-KR" sz="1400" b="0" i="1" smtClean="0">
+                                <a:latin typeface="Cambria Math" panose="02040503050406030204" pitchFamily="18" charset="0"/>
+                              </a:rPr>
+                              <m:t>𝑤</m:t>
+                            </m:r>
+                          </m:e>
+                          <m:sub>
+                            <m:r>
+                              <a:rPr lang="en-US" altLang="ko-KR" sz="1400" b="0" i="1" smtClean="0">
+                                <a:latin typeface="Cambria Math" panose="02040503050406030204" pitchFamily="18" charset="0"/>
+                              </a:rPr>
+                              <m:t>𝑐</m:t>
+                            </m:r>
+                          </m:sub>
+                        </m:sSub>
+                        <m:sSub>
+                          <m:sSubPr>
+                            <m:ctrlPr>
+                              <a:rPr lang="en-US" altLang="ko-KR" sz="1400" b="0" i="1" smtClean="0">
+                                <a:latin typeface="Cambria Math" panose="02040503050406030204" pitchFamily="18" charset="0"/>
+                              </a:rPr>
+                            </m:ctrlPr>
+                          </m:sSubPr>
+                          <m:e>
+                            <m:r>
+                              <a:rPr lang="en-US" altLang="ko-KR" sz="1400" b="0" i="1" smtClean="0">
+                                <a:latin typeface="Cambria Math" panose="02040503050406030204" pitchFamily="18" charset="0"/>
+                              </a:rPr>
+                              <m:t>𝑤</m:t>
+                            </m:r>
+                          </m:e>
+                          <m:sub>
+                            <m:r>
+                              <a:rPr lang="en-US" altLang="ko-KR" sz="1400" b="0" i="1" smtClean="0">
+                                <a:latin typeface="Cambria Math" panose="02040503050406030204" pitchFamily="18" charset="0"/>
+                              </a:rPr>
+                              <m:t>𝑖</m:t>
+                            </m:r>
+                          </m:sub>
+                        </m:sSub>
+                      </m:den>
+                    </m:f>
+                    <m:r>
+                      <a:rPr lang="en-US" altLang="ko-KR" sz="1400" b="0" i="1" smtClean="0">
+                        <a:latin typeface="Cambria Math" panose="02040503050406030204" pitchFamily="18" charset="0"/>
+                      </a:rPr>
+                      <m:t>&lt;</m:t>
+                    </m:r>
+                    <m:sSub>
+                      <m:sSubPr>
+                        <m:ctrlPr>
+                          <a:rPr lang="en-US" altLang="ko-KR" sz="1400" b="0" i="1" smtClean="0">
+                            <a:latin typeface="Cambria Math" panose="02040503050406030204" pitchFamily="18" charset="0"/>
+                          </a:rPr>
+                        </m:ctrlPr>
+                      </m:sSubPr>
+                      <m:e>
+                        <m:r>
+                          <a:rPr lang="en-US" altLang="ko-KR" sz="1400" b="0" i="1" smtClean="0">
+                            <a:latin typeface="Cambria Math" panose="02040503050406030204" pitchFamily="18" charset="0"/>
+                          </a:rPr>
+                          <m:t>𝑤</m:t>
+                        </m:r>
+                      </m:e>
+                      <m:sub>
+                        <m:r>
+                          <a:rPr lang="en-US" altLang="ko-KR" sz="1400" b="0" i="1" smtClean="0">
+                            <a:latin typeface="Cambria Math" panose="02040503050406030204" pitchFamily="18" charset="0"/>
+                          </a:rPr>
+                          <m:t>1</m:t>
+                        </m:r>
+                      </m:sub>
+                    </m:sSub>
+                  </m:oMath>
+                </a14:m>
+                <a:r>
+                  <a:rPr lang="en-US" altLang="ko-KR" sz="1400" dirty="0"/>
+                  <a:t>   (3)</a:t>
+                </a:r>
+              </a:p>
+              <a:p>
+                <a:pPr marL="285750" indent="-285750">
+                  <a:lnSpc>
+                    <a:spcPct val="150000"/>
+                  </a:lnSpc>
+                  <a:buFont typeface="맑은 고딕" panose="020B0503020000020004" pitchFamily="50" charset="-127"/>
+                  <a:buChar char="-"/>
+                </a:pPr>
+                <a:r>
+                  <a:rPr lang="ko-KR" altLang="en-US" sz="1400" dirty="0"/>
+                  <a:t>모든 </a:t>
+                </a:r>
+                <a:r>
+                  <a:rPr lang="en-US" altLang="ko-KR" sz="1400" dirty="0"/>
+                  <a:t>class </a:t>
+                </a:r>
+                <a14:m>
+                  <m:oMath xmlns:m="http://schemas.openxmlformats.org/officeDocument/2006/math">
+                    <m:sSub>
+                      <m:sSubPr>
+                        <m:ctrlPr>
+                          <a:rPr lang="en-US" altLang="ko-KR" sz="1400" b="0" i="1" smtClean="0">
+                            <a:latin typeface="Cambria Math" panose="02040503050406030204" pitchFamily="18" charset="0"/>
+                          </a:rPr>
+                        </m:ctrlPr>
+                      </m:sSubPr>
+                      <m:e>
+                        <m:r>
+                          <a:rPr lang="en-US" altLang="ko-KR" sz="1400" b="0" i="1" smtClean="0">
+                            <a:latin typeface="Cambria Math" panose="02040503050406030204" pitchFamily="18" charset="0"/>
+                          </a:rPr>
+                          <m:t>𝐻</m:t>
+                        </m:r>
+                      </m:e>
+                      <m:sub>
+                        <m:r>
+                          <a:rPr lang="en-US" altLang="ko-KR" sz="1400" b="0" i="1" smtClean="0">
+                            <a:latin typeface="Cambria Math" panose="02040503050406030204" pitchFamily="18" charset="0"/>
+                          </a:rPr>
+                          <m:t>0</m:t>
+                        </m:r>
+                      </m:sub>
+                    </m:sSub>
+                    <m:r>
+                      <a:rPr lang="en-US" altLang="ko-KR" sz="1400" b="0" i="1" smtClean="0">
+                        <a:latin typeface="Cambria Math" panose="02040503050406030204" pitchFamily="18" charset="0"/>
+                      </a:rPr>
+                      <m:t>, </m:t>
+                    </m:r>
+                    <m:sSub>
+                      <m:sSubPr>
+                        <m:ctrlPr>
+                          <a:rPr lang="en-US" altLang="ko-KR" sz="1400" b="0" i="1" smtClean="0">
+                            <a:latin typeface="Cambria Math" panose="02040503050406030204" pitchFamily="18" charset="0"/>
+                          </a:rPr>
+                        </m:ctrlPr>
+                      </m:sSubPr>
+                      <m:e>
+                        <m:r>
+                          <a:rPr lang="en-US" altLang="ko-KR" sz="1400" b="0" i="1" smtClean="0">
+                            <a:latin typeface="Cambria Math" panose="02040503050406030204" pitchFamily="18" charset="0"/>
+                          </a:rPr>
+                          <m:t>𝐻</m:t>
+                        </m:r>
+                      </m:e>
+                      <m:sub>
+                        <m:r>
+                          <a:rPr lang="en-US" altLang="ko-KR" sz="1400" b="0" i="1" smtClean="0">
+                            <a:latin typeface="Cambria Math" panose="02040503050406030204" pitchFamily="18" charset="0"/>
+                          </a:rPr>
+                          <m:t>1</m:t>
+                        </m:r>
+                      </m:sub>
+                    </m:sSub>
+                    <m:r>
+                      <a:rPr lang="en-US" altLang="ko-KR" sz="1400" b="0" i="1" smtClean="0">
+                        <a:latin typeface="Cambria Math" panose="02040503050406030204" pitchFamily="18" charset="0"/>
+                      </a:rPr>
+                      <m:t>,…, </m:t>
+                    </m:r>
+                    <m:sSub>
+                      <m:sSubPr>
+                        <m:ctrlPr>
+                          <a:rPr lang="en-US" altLang="ko-KR" sz="1400" b="0" i="1" smtClean="0">
+                            <a:latin typeface="Cambria Math" panose="02040503050406030204" pitchFamily="18" charset="0"/>
+                          </a:rPr>
+                        </m:ctrlPr>
+                      </m:sSubPr>
+                      <m:e>
+                        <m:r>
+                          <a:rPr lang="en-US" altLang="ko-KR" sz="1400" b="0" i="1" smtClean="0">
+                            <a:latin typeface="Cambria Math" panose="02040503050406030204" pitchFamily="18" charset="0"/>
+                          </a:rPr>
+                          <m:t>𝐻</m:t>
+                        </m:r>
+                      </m:e>
+                      <m:sub>
+                        <m:r>
+                          <a:rPr lang="en-US" altLang="ko-KR" sz="1400" b="0" i="1" smtClean="0">
+                            <a:latin typeface="Cambria Math" panose="02040503050406030204" pitchFamily="18" charset="0"/>
+                          </a:rPr>
+                          <m:t>𝑛</m:t>
+                        </m:r>
+                        <m:r>
+                          <a:rPr lang="en-US" altLang="ko-KR" sz="1400" b="0" i="1" smtClean="0">
+                            <a:latin typeface="Cambria Math" panose="02040503050406030204" pitchFamily="18" charset="0"/>
+                          </a:rPr>
+                          <m:t>−3</m:t>
+                        </m:r>
+                      </m:sub>
+                    </m:sSub>
+                    <m:r>
+                      <a:rPr lang="ko-KR" altLang="en-US" sz="1400" i="1">
+                        <a:latin typeface="Cambria Math" panose="02040503050406030204" pitchFamily="18" charset="0"/>
+                      </a:rPr>
+                      <m:t>에</m:t>
+                    </m:r>
+                  </m:oMath>
+                </a14:m>
+                <a:r>
+                  <a:rPr lang="ko-KR" altLang="en-US" sz="1400" dirty="0"/>
+                  <a:t>서 가장 작은 </a:t>
+                </a:r>
+                <a:r>
+                  <a:rPr lang="en-US" altLang="ko-KR" sz="1400" dirty="0"/>
+                  <a:t>cost</a:t>
+                </a:r>
+                <a:r>
+                  <a:rPr lang="ko-KR" altLang="en-US" sz="1400" dirty="0"/>
+                  <a:t>를 가진 분할이 </a:t>
+                </a:r>
+                <a:r>
+                  <a:rPr lang="en-US" altLang="ko-KR" sz="1400" dirty="0"/>
+                  <a:t>l-optimum</a:t>
+                </a:r>
+                <a:r>
+                  <a:rPr lang="ko-KR" altLang="en-US" sz="1400" dirty="0"/>
+                  <a:t>이다</a:t>
+                </a:r>
+                <a:r>
+                  <a:rPr lang="en-US" altLang="ko-KR" sz="1400"/>
+                  <a:t>.</a:t>
+                </a:r>
+              </a:p>
+              <a:p>
+                <a:pPr marL="285750" indent="-285750">
+                  <a:lnSpc>
+                    <a:spcPct val="150000"/>
+                  </a:lnSpc>
+                  <a:buFont typeface="맑은 고딕" panose="020B0503020000020004" pitchFamily="50" charset="-127"/>
+                  <a:buChar char="-"/>
+                </a:pPr>
+                <a:endParaRPr lang="en-US" altLang="ko-KR" sz="1400" dirty="0"/>
+              </a:p>
+            </p:txBody>
+          </p:sp>
+        </mc:Choice>
+        <mc:Fallback>
+          <p:sp>
+            <p:nvSpPr>
+              <p:cNvPr id="5" name="TextBox 4">
+                <a:extLst>
+                  <a:ext uri="{FF2B5EF4-FFF2-40B4-BE49-F238E27FC236}">
+                    <a16:creationId xmlns:a16="http://schemas.microsoft.com/office/drawing/2014/main" id="{4DFB60F5-B1C4-60C0-D495-92DE405C3C5A}"/>
+                  </a:ext>
+                </a:extLst>
+              </p:cNvPr>
+              <p:cNvSpPr txBox="1">
+                <a:spLocks noRot="1" noChangeAspect="1" noMove="1" noResize="1" noEditPoints="1" noAdjustHandles="1" noChangeArrowheads="1" noChangeShapeType="1" noTextEdit="1"/>
+              </p:cNvSpPr>
+              <p:nvPr/>
+            </p:nvSpPr>
+            <p:spPr>
+              <a:xfrm>
+                <a:off x="264937" y="602281"/>
+                <a:ext cx="11662126" cy="4711546"/>
+              </a:xfrm>
+              <a:prstGeom prst="rect">
+                <a:avLst/>
+              </a:prstGeom>
+              <a:blipFill>
+                <a:blip r:embed="rId2"/>
+                <a:stretch>
+                  <a:fillRect l="-261"/>
+                </a:stretch>
+              </a:blipFill>
+            </p:spPr>
+            <p:txBody>
+              <a:bodyPr/>
+              <a:lstStyle/>
+              <a:p>
+                <a:r>
+                  <a:rPr lang="ko-KR" altLang="en-US">
+                    <a:noFill/>
+                  </a:rPr>
+                  <a:t> </a:t>
+                </a:r>
+              </a:p>
+            </p:txBody>
+          </p:sp>
+        </mc:Fallback>
+      </mc:AlternateContent>
       <p:sp>
         <p:nvSpPr>
-          <p:cNvPr id="4" name="TextBox 3">
+          <p:cNvPr id="3" name="TextBox 2">
             <a:extLst>
               <a:ext uri="{FF2B5EF4-FFF2-40B4-BE49-F238E27FC236}">
-                <a16:creationId xmlns:a16="http://schemas.microsoft.com/office/drawing/2014/main" id="{3892D74A-22E1-A816-2B99-9B990A260F40}"/>
+                <a16:creationId xmlns:a16="http://schemas.microsoft.com/office/drawing/2014/main" id="{8CFE9A76-8F71-7A5C-79DC-EFF34CE3CE43}"/>
               </a:ext>
             </a:extLst>
           </p:cNvPr>
@@ -12063,7 +14988,7 @@
         <p:spPr>
           <a:xfrm>
             <a:off x="264937" y="232949"/>
-            <a:ext cx="1338828" cy="369332"/>
+            <a:ext cx="1859805" cy="369332"/>
           </a:xfrm>
           <a:prstGeom prst="rect">
             <a:avLst/>
@@ -12078,54 +15003,42 @@
           <a:p>
             <a:r>
               <a:rPr lang="en-US" altLang="ko-KR" b="1" dirty="0"/>
-              <a:t>Lemma 3. </a:t>
+              <a:t>summary. 2 of </a:t>
             </a:r>
             <a:endParaRPr lang="ko-KR" altLang="en-US" b="1" dirty="0"/>
           </a:p>
         </p:txBody>
       </p:sp>
-      <p:sp>
-        <p:nvSpPr>
-          <p:cNvPr id="5" name="TextBox 4">
+      <p:pic>
+        <p:nvPicPr>
+          <p:cNvPr id="6" name="그림 5">
             <a:extLst>
               <a:ext uri="{FF2B5EF4-FFF2-40B4-BE49-F238E27FC236}">
-                <a16:creationId xmlns:a16="http://schemas.microsoft.com/office/drawing/2014/main" id="{4DFB60F5-B1C4-60C0-D495-92DE405C3C5A}"/>
+                <a16:creationId xmlns:a16="http://schemas.microsoft.com/office/drawing/2014/main" id="{0EE86B54-0678-BDFD-86C6-8445F6363B72}"/>
               </a:ext>
             </a:extLst>
           </p:cNvPr>
-          <p:cNvSpPr txBox="1"/>
+          <p:cNvPicPr>
+            <a:picLocks noChangeAspect="1"/>
+          </p:cNvPicPr>
           <p:nvPr/>
-        </p:nvSpPr>
+        </p:nvPicPr>
+        <p:blipFill>
+          <a:blip r:embed="rId3"/>
+          <a:stretch>
+            <a:fillRect/>
+          </a:stretch>
+        </p:blipFill>
         <p:spPr>
           <a:xfrm>
-            <a:off x="264937" y="602281"/>
-            <a:ext cx="11662126" cy="373885"/>
+            <a:off x="7241982" y="232949"/>
+            <a:ext cx="4950018" cy="2849823"/>
           </a:xfrm>
           <a:prstGeom prst="rect">
             <a:avLst/>
           </a:prstGeom>
-          <a:noFill/>
         </p:spPr>
-        <p:txBody>
-          <a:bodyPr wrap="square" rtlCol="0">
-            <a:spAutoFit/>
-          </a:bodyPr>
-          <a:lstStyle/>
-          <a:p>
-            <a:pPr marL="285750" indent="-285750">
-              <a:lnSpc>
-                <a:spcPct val="150000"/>
-              </a:lnSpc>
-              <a:buFont typeface="맑은 고딕" panose="020B0503020000020004" pitchFamily="50" charset="-127"/>
-              <a:buChar char="-"/>
-            </a:pPr>
-            <a:r>
-              <a:rPr lang="en-US" altLang="ko-KR" sz="1400" dirty="0"/>
-              <a:t>monotone</a:t>
-            </a:r>
-          </a:p>
-        </p:txBody>
-      </p:sp>
+      </p:pic>
     </p:spTree>
     <p:extLst>
       <p:ext uri="{BB962C8B-B14F-4D97-AF65-F5344CB8AC3E}">
@@ -12624,8 +15537,8 @@
           </a:p>
         </p:txBody>
       </p:sp>
-      <mc:AlternateContent xmlns:mc="http://schemas.openxmlformats.org/markup-compatibility/2006">
-        <mc:Choice xmlns:a14="http://schemas.microsoft.com/office/drawing/2010/main" Requires="a14">
+      <mc:AlternateContent xmlns:mc="http://schemas.openxmlformats.org/markup-compatibility/2006" xmlns:a14="http://schemas.microsoft.com/office/drawing/2010/main">
+        <mc:Choice Requires="a14">
           <p:sp>
             <p:nvSpPr>
               <p:cNvPr id="5" name="TextBox 4">
@@ -13007,7 +15920,7 @@
             </p:txBody>
           </p:sp>
         </mc:Choice>
-        <mc:Fallback>
+        <mc:Fallback xmlns="">
           <p:sp>
             <p:nvSpPr>
               <p:cNvPr id="5" name="TextBox 4">
@@ -13052,8 +15965,8 @@
           </p:sp>
         </mc:Fallback>
       </mc:AlternateContent>
-      <mc:AlternateContent xmlns:mc="http://schemas.openxmlformats.org/markup-compatibility/2006">
-        <mc:Choice xmlns:a14="http://schemas.microsoft.com/office/drawing/2010/main" Requires="a14">
+      <mc:AlternateContent xmlns:mc="http://schemas.openxmlformats.org/markup-compatibility/2006" xmlns:a14="http://schemas.microsoft.com/office/drawing/2010/main">
+        <mc:Choice Requires="a14">
           <p:sp>
             <p:nvSpPr>
               <p:cNvPr id="3" name="TextBox 2">
@@ -13103,7 +16016,7 @@
             </p:txBody>
           </p:sp>
         </mc:Choice>
-        <mc:Fallback>
+        <mc:Fallback xmlns="">
           <p:sp>
             <p:nvSpPr>
               <p:cNvPr id="3" name="TextBox 2">
@@ -13148,8 +16061,8 @@
           </p:sp>
         </mc:Fallback>
       </mc:AlternateContent>
-      <mc:AlternateContent xmlns:mc="http://schemas.openxmlformats.org/markup-compatibility/2006">
-        <mc:Choice xmlns:a14="http://schemas.microsoft.com/office/drawing/2010/main" Requires="a14">
+      <mc:AlternateContent xmlns:mc="http://schemas.openxmlformats.org/markup-compatibility/2006" xmlns:a14="http://schemas.microsoft.com/office/drawing/2010/main">
+        <mc:Choice Requires="a14">
           <p:sp>
             <p:nvSpPr>
               <p:cNvPr id="7" name="TextBox 6">
@@ -13199,7 +16112,7 @@
             </p:txBody>
           </p:sp>
         </mc:Choice>
-        <mc:Fallback>
+        <mc:Fallback xmlns="">
           <p:sp>
             <p:nvSpPr>
               <p:cNvPr id="7" name="TextBox 6">
@@ -13244,8 +16157,8 @@
           </p:sp>
         </mc:Fallback>
       </mc:AlternateContent>
-      <mc:AlternateContent xmlns:mc="http://schemas.openxmlformats.org/markup-compatibility/2006">
-        <mc:Choice xmlns:a14="http://schemas.microsoft.com/office/drawing/2010/main" Requires="a14">
+      <mc:AlternateContent xmlns:mc="http://schemas.openxmlformats.org/markup-compatibility/2006" xmlns:a14="http://schemas.microsoft.com/office/drawing/2010/main">
+        <mc:Choice Requires="a14">
           <p:sp>
             <p:nvSpPr>
               <p:cNvPr id="8" name="TextBox 7">
@@ -13295,7 +16208,7 @@
             </p:txBody>
           </p:sp>
         </mc:Choice>
-        <mc:Fallback>
+        <mc:Fallback xmlns="">
           <p:sp>
             <p:nvSpPr>
               <p:cNvPr id="8" name="TextBox 7">
@@ -13340,8 +16253,8 @@
           </p:sp>
         </mc:Fallback>
       </mc:AlternateContent>
-      <mc:AlternateContent xmlns:mc="http://schemas.openxmlformats.org/markup-compatibility/2006">
-        <mc:Choice xmlns:a14="http://schemas.microsoft.com/office/drawing/2010/main" Requires="a14">
+      <mc:AlternateContent xmlns:mc="http://schemas.openxmlformats.org/markup-compatibility/2006" xmlns:a14="http://schemas.microsoft.com/office/drawing/2010/main">
+        <mc:Choice Requires="a14">
           <p:sp>
             <p:nvSpPr>
               <p:cNvPr id="9" name="TextBox 8">
@@ -13391,7 +16304,7 @@
             </p:txBody>
           </p:sp>
         </mc:Choice>
-        <mc:Fallback>
+        <mc:Fallback xmlns="">
           <p:sp>
             <p:nvSpPr>
               <p:cNvPr id="9" name="TextBox 8">
@@ -13436,8 +16349,8 @@
           </p:sp>
         </mc:Fallback>
       </mc:AlternateContent>
-      <mc:AlternateContent xmlns:mc="http://schemas.openxmlformats.org/markup-compatibility/2006">
-        <mc:Choice xmlns:a14="http://schemas.microsoft.com/office/drawing/2010/main" Requires="a14">
+      <mc:AlternateContent xmlns:mc="http://schemas.openxmlformats.org/markup-compatibility/2006" xmlns:a14="http://schemas.microsoft.com/office/drawing/2010/main">
+        <mc:Choice Requires="a14">
           <p:sp>
             <p:nvSpPr>
               <p:cNvPr id="10" name="TextBox 9">
@@ -13487,7 +16400,7 @@
             </p:txBody>
           </p:sp>
         </mc:Choice>
-        <mc:Fallback>
+        <mc:Fallback xmlns="">
           <p:sp>
             <p:nvSpPr>
               <p:cNvPr id="10" name="TextBox 9">
@@ -13532,8 +16445,8 @@
           </p:sp>
         </mc:Fallback>
       </mc:AlternateContent>
-      <mc:AlternateContent xmlns:mc="http://schemas.openxmlformats.org/markup-compatibility/2006">
-        <mc:Choice xmlns:a14="http://schemas.microsoft.com/office/drawing/2010/main" Requires="a14">
+      <mc:AlternateContent xmlns:mc="http://schemas.openxmlformats.org/markup-compatibility/2006" xmlns:a14="http://schemas.microsoft.com/office/drawing/2010/main">
+        <mc:Choice Requires="a14">
           <p:sp>
             <p:nvSpPr>
               <p:cNvPr id="11" name="TextBox 10">
@@ -13583,7 +16496,7 @@
             </p:txBody>
           </p:sp>
         </mc:Choice>
-        <mc:Fallback>
+        <mc:Fallback xmlns="">
           <p:sp>
             <p:nvSpPr>
               <p:cNvPr id="11" name="TextBox 10">
@@ -13628,8 +16541,8 @@
           </p:sp>
         </mc:Fallback>
       </mc:AlternateContent>
-      <mc:AlternateContent xmlns:mc="http://schemas.openxmlformats.org/markup-compatibility/2006">
-        <mc:Choice xmlns:a14="http://schemas.microsoft.com/office/drawing/2010/main" Requires="a14">
+      <mc:AlternateContent xmlns:mc="http://schemas.openxmlformats.org/markup-compatibility/2006" xmlns:a14="http://schemas.microsoft.com/office/drawing/2010/main">
+        <mc:Choice Requires="a14">
           <p:sp>
             <p:nvSpPr>
               <p:cNvPr id="12" name="TextBox 11">
@@ -13679,7 +16592,7 @@
             </p:txBody>
           </p:sp>
         </mc:Choice>
-        <mc:Fallback>
+        <mc:Fallback xmlns="">
           <p:sp>
             <p:nvSpPr>
               <p:cNvPr id="12" name="TextBox 11">
@@ -13724,8 +16637,8 @@
           </p:sp>
         </mc:Fallback>
       </mc:AlternateContent>
-      <mc:AlternateContent xmlns:mc="http://schemas.openxmlformats.org/markup-compatibility/2006">
-        <mc:Choice xmlns:a14="http://schemas.microsoft.com/office/drawing/2010/main" Requires="a14">
+      <mc:AlternateContent xmlns:mc="http://schemas.openxmlformats.org/markup-compatibility/2006" xmlns:a14="http://schemas.microsoft.com/office/drawing/2010/main">
+        <mc:Choice Requires="a14">
           <p:sp>
             <p:nvSpPr>
               <p:cNvPr id="13" name="TextBox 12">
@@ -13775,7 +16688,7 @@
             </p:txBody>
           </p:sp>
         </mc:Choice>
-        <mc:Fallback>
+        <mc:Fallback xmlns="">
           <p:sp>
             <p:nvSpPr>
               <p:cNvPr id="13" name="TextBox 12">
@@ -13820,8 +16733,8 @@
           </p:sp>
         </mc:Fallback>
       </mc:AlternateContent>
-      <mc:AlternateContent xmlns:mc="http://schemas.openxmlformats.org/markup-compatibility/2006">
-        <mc:Choice xmlns:a14="http://schemas.microsoft.com/office/drawing/2010/main" Requires="a14">
+      <mc:AlternateContent xmlns:mc="http://schemas.openxmlformats.org/markup-compatibility/2006" xmlns:a14="http://schemas.microsoft.com/office/drawing/2010/main">
+        <mc:Choice Requires="a14">
           <p:sp>
             <p:nvSpPr>
               <p:cNvPr id="14" name="TextBox 13">
@@ -13890,7 +16803,7 @@
             </p:txBody>
           </p:sp>
         </mc:Choice>
-        <mc:Fallback>
+        <mc:Fallback xmlns="">
           <p:sp>
             <p:nvSpPr>
               <p:cNvPr id="14" name="TextBox 13">
@@ -13935,8 +16848,8 @@
           </p:sp>
         </mc:Fallback>
       </mc:AlternateContent>
-      <mc:AlternateContent xmlns:mc="http://schemas.openxmlformats.org/markup-compatibility/2006">
-        <mc:Choice xmlns:a14="http://schemas.microsoft.com/office/drawing/2010/main" Requires="a14">
+      <mc:AlternateContent xmlns:mc="http://schemas.openxmlformats.org/markup-compatibility/2006" xmlns:a14="http://schemas.microsoft.com/office/drawing/2010/main">
+        <mc:Choice Requires="a14">
           <p:sp>
             <p:nvSpPr>
               <p:cNvPr id="15" name="TextBox 14">
@@ -14005,7 +16918,7 @@
             </p:txBody>
           </p:sp>
         </mc:Choice>
-        <mc:Fallback>
+        <mc:Fallback xmlns="">
           <p:sp>
             <p:nvSpPr>
               <p:cNvPr id="15" name="TextBox 14">
@@ -14050,8 +16963,8 @@
           </p:sp>
         </mc:Fallback>
       </mc:AlternateContent>
-      <mc:AlternateContent xmlns:mc="http://schemas.openxmlformats.org/markup-compatibility/2006">
-        <mc:Choice xmlns:a14="http://schemas.microsoft.com/office/drawing/2010/main" Requires="a14">
+      <mc:AlternateContent xmlns:mc="http://schemas.openxmlformats.org/markup-compatibility/2006" xmlns:a14="http://schemas.microsoft.com/office/drawing/2010/main">
+        <mc:Choice Requires="a14">
           <p:sp>
             <p:nvSpPr>
               <p:cNvPr id="16" name="TextBox 15">
@@ -14120,7 +17033,7 @@
             </p:txBody>
           </p:sp>
         </mc:Choice>
-        <mc:Fallback>
+        <mc:Fallback xmlns="">
           <p:sp>
             <p:nvSpPr>
               <p:cNvPr id="16" name="TextBox 15">
@@ -14165,8 +17078,8 @@
           </p:sp>
         </mc:Fallback>
       </mc:AlternateContent>
-      <mc:AlternateContent xmlns:mc="http://schemas.openxmlformats.org/markup-compatibility/2006">
-        <mc:Choice xmlns:a14="http://schemas.microsoft.com/office/drawing/2010/main" Requires="a14">
+      <mc:AlternateContent xmlns:mc="http://schemas.openxmlformats.org/markup-compatibility/2006" xmlns:a14="http://schemas.microsoft.com/office/drawing/2010/main">
+        <mc:Choice Requires="a14">
           <p:sp>
             <p:nvSpPr>
               <p:cNvPr id="17" name="TextBox 16">
@@ -14235,7 +17148,7 @@
             </p:txBody>
           </p:sp>
         </mc:Choice>
-        <mc:Fallback>
+        <mc:Fallback xmlns="">
           <p:sp>
             <p:nvSpPr>
               <p:cNvPr id="17" name="TextBox 16">
@@ -14280,8 +17193,8 @@
           </p:sp>
         </mc:Fallback>
       </mc:AlternateContent>
-      <mc:AlternateContent xmlns:mc="http://schemas.openxmlformats.org/markup-compatibility/2006">
-        <mc:Choice xmlns:a14="http://schemas.microsoft.com/office/drawing/2010/main" Requires="a14">
+      <mc:AlternateContent xmlns:mc="http://schemas.openxmlformats.org/markup-compatibility/2006" xmlns:a14="http://schemas.microsoft.com/office/drawing/2010/main">
+        <mc:Choice Requires="a14">
           <p:sp>
             <p:nvSpPr>
               <p:cNvPr id="18" name="TextBox 17">
@@ -14350,7 +17263,7 @@
             </p:txBody>
           </p:sp>
         </mc:Choice>
-        <mc:Fallback>
+        <mc:Fallback xmlns="">
           <p:sp>
             <p:nvSpPr>
               <p:cNvPr id="18" name="TextBox 17">
@@ -14395,8 +17308,8 @@
           </p:sp>
         </mc:Fallback>
       </mc:AlternateContent>
-      <mc:AlternateContent xmlns:mc="http://schemas.openxmlformats.org/markup-compatibility/2006">
-        <mc:Choice xmlns:a14="http://schemas.microsoft.com/office/drawing/2010/main" Requires="a14">
+      <mc:AlternateContent xmlns:mc="http://schemas.openxmlformats.org/markup-compatibility/2006" xmlns:a14="http://schemas.microsoft.com/office/drawing/2010/main">
+        <mc:Choice Requires="a14">
           <p:sp>
             <p:nvSpPr>
               <p:cNvPr id="19" name="TextBox 18">
@@ -14465,7 +17378,7 @@
             </p:txBody>
           </p:sp>
         </mc:Choice>
-        <mc:Fallback>
+        <mc:Fallback xmlns="">
           <p:sp>
             <p:nvSpPr>
               <p:cNvPr id="19" name="TextBox 18">
@@ -14510,8 +17423,8 @@
           </p:sp>
         </mc:Fallback>
       </mc:AlternateContent>
-      <mc:AlternateContent xmlns:mc="http://schemas.openxmlformats.org/markup-compatibility/2006">
-        <mc:Choice xmlns:a14="http://schemas.microsoft.com/office/drawing/2010/main" Requires="a14">
+      <mc:AlternateContent xmlns:mc="http://schemas.openxmlformats.org/markup-compatibility/2006" xmlns:a14="http://schemas.microsoft.com/office/drawing/2010/main">
+        <mc:Choice Requires="a14">
           <p:sp>
             <p:nvSpPr>
               <p:cNvPr id="20" name="TextBox 19">
@@ -14580,7 +17493,7 @@
             </p:txBody>
           </p:sp>
         </mc:Choice>
-        <mc:Fallback>
+        <mc:Fallback xmlns="">
           <p:sp>
             <p:nvSpPr>
               <p:cNvPr id="20" name="TextBox 19">
@@ -14625,8 +17538,8 @@
           </p:sp>
         </mc:Fallback>
       </mc:AlternateContent>
-      <mc:AlternateContent xmlns:mc="http://schemas.openxmlformats.org/markup-compatibility/2006">
-        <mc:Choice xmlns:a14="http://schemas.microsoft.com/office/drawing/2010/main" Requires="a14">
+      <mc:AlternateContent xmlns:mc="http://schemas.openxmlformats.org/markup-compatibility/2006" xmlns:a14="http://schemas.microsoft.com/office/drawing/2010/main">
+        <mc:Choice Requires="a14">
           <p:sp>
             <p:nvSpPr>
               <p:cNvPr id="21" name="TextBox 20">
@@ -14695,7 +17608,7 @@
             </p:txBody>
           </p:sp>
         </mc:Choice>
-        <mc:Fallback>
+        <mc:Fallback xmlns="">
           <p:sp>
             <p:nvSpPr>
               <p:cNvPr id="21" name="TextBox 20">
@@ -14987,8 +17900,8 @@
           </a:fontRef>
         </p:style>
       </p:cxnSp>
-      <mc:AlternateContent xmlns:mc="http://schemas.openxmlformats.org/markup-compatibility/2006">
-        <mc:Choice xmlns:a14="http://schemas.microsoft.com/office/drawing/2010/main" Requires="a14">
+      <mc:AlternateContent xmlns:mc="http://schemas.openxmlformats.org/markup-compatibility/2006" xmlns:a14="http://schemas.microsoft.com/office/drawing/2010/main">
+        <mc:Choice Requires="a14">
           <p:sp>
             <p:nvSpPr>
               <p:cNvPr id="46" name="TextBox 45">
@@ -15395,7 +18308,7 @@
             </p:txBody>
           </p:sp>
         </mc:Choice>
-        <mc:Fallback>
+        <mc:Fallback xmlns="">
           <p:sp>
             <p:nvSpPr>
               <p:cNvPr id="46" name="TextBox 45">
@@ -15506,8 +18419,8 @@
           </a:p>
         </p:txBody>
       </p:sp>
-      <mc:AlternateContent xmlns:mc="http://schemas.openxmlformats.org/markup-compatibility/2006">
-        <mc:Choice xmlns:a14="http://schemas.microsoft.com/office/drawing/2010/main" Requires="a14">
+      <mc:AlternateContent xmlns:mc="http://schemas.openxmlformats.org/markup-compatibility/2006" xmlns:a14="http://schemas.microsoft.com/office/drawing/2010/main">
+        <mc:Choice Requires="a14">
           <p:sp>
             <p:nvSpPr>
               <p:cNvPr id="5" name="TextBox 4">
@@ -16563,7 +19476,7 @@
             </p:txBody>
           </p:sp>
         </mc:Choice>
-        <mc:Fallback>
+        <mc:Fallback xmlns="">
           <p:sp>
             <p:nvSpPr>
               <p:cNvPr id="5" name="TextBox 4">
@@ -16638,8 +19551,8 @@
           <a:chExt cx="0" cy="0"/>
         </a:xfrm>
       </p:grpSpPr>
-      <mc:AlternateContent xmlns:mc="http://schemas.openxmlformats.org/markup-compatibility/2006">
-        <mc:Choice xmlns:a14="http://schemas.microsoft.com/office/drawing/2010/main" Requires="a14">
+      <mc:AlternateContent xmlns:mc="http://schemas.openxmlformats.org/markup-compatibility/2006" xmlns:a14="http://schemas.microsoft.com/office/drawing/2010/main">
+        <mc:Choice Requires="a14">
           <p:sp>
             <p:nvSpPr>
               <p:cNvPr id="31" name="TextBox 30">
@@ -16708,7 +19621,7 @@
             </p:txBody>
           </p:sp>
         </mc:Choice>
-        <mc:Fallback>
+        <mc:Fallback xmlns="">
           <p:sp>
             <p:nvSpPr>
               <p:cNvPr id="31" name="TextBox 30">
@@ -16753,8 +19666,8 @@
           </p:sp>
         </mc:Fallback>
       </mc:AlternateContent>
-      <mc:AlternateContent xmlns:mc="http://schemas.openxmlformats.org/markup-compatibility/2006">
-        <mc:Choice xmlns:a14="http://schemas.microsoft.com/office/drawing/2010/main" Requires="a14">
+      <mc:AlternateContent xmlns:mc="http://schemas.openxmlformats.org/markup-compatibility/2006" xmlns:a14="http://schemas.microsoft.com/office/drawing/2010/main">
+        <mc:Choice Requires="a14">
           <p:sp>
             <p:nvSpPr>
               <p:cNvPr id="33" name="TextBox 32">
@@ -16823,7 +19736,7 @@
             </p:txBody>
           </p:sp>
         </mc:Choice>
-        <mc:Fallback>
+        <mc:Fallback xmlns="">
           <p:sp>
             <p:nvSpPr>
               <p:cNvPr id="33" name="TextBox 32">
@@ -16868,8 +19781,8 @@
           </p:sp>
         </mc:Fallback>
       </mc:AlternateContent>
-      <mc:AlternateContent xmlns:mc="http://schemas.openxmlformats.org/markup-compatibility/2006">
-        <mc:Choice xmlns:a14="http://schemas.microsoft.com/office/drawing/2010/main" Requires="a14">
+      <mc:AlternateContent xmlns:mc="http://schemas.openxmlformats.org/markup-compatibility/2006" xmlns:a14="http://schemas.microsoft.com/office/drawing/2010/main">
+        <mc:Choice Requires="a14">
           <p:sp>
             <p:nvSpPr>
               <p:cNvPr id="34" name="TextBox 33">
@@ -16938,7 +19851,7 @@
             </p:txBody>
           </p:sp>
         </mc:Choice>
-        <mc:Fallback>
+        <mc:Fallback xmlns="">
           <p:sp>
             <p:nvSpPr>
               <p:cNvPr id="34" name="TextBox 33">
@@ -16983,8 +19896,8 @@
           </p:sp>
         </mc:Fallback>
       </mc:AlternateContent>
-      <mc:AlternateContent xmlns:mc="http://schemas.openxmlformats.org/markup-compatibility/2006">
-        <mc:Choice xmlns:a14="http://schemas.microsoft.com/office/drawing/2010/main" Requires="a14">
+      <mc:AlternateContent xmlns:mc="http://schemas.openxmlformats.org/markup-compatibility/2006" xmlns:a14="http://schemas.microsoft.com/office/drawing/2010/main">
+        <mc:Choice Requires="a14">
           <p:sp>
             <p:nvSpPr>
               <p:cNvPr id="38" name="TextBox 37">
@@ -17053,7 +19966,7 @@
             </p:txBody>
           </p:sp>
         </mc:Choice>
-        <mc:Fallback>
+        <mc:Fallback xmlns="">
           <p:sp>
             <p:nvSpPr>
               <p:cNvPr id="38" name="TextBox 37">
@@ -17134,8 +20047,8 @@
           </a:p>
         </p:txBody>
       </p:sp>
-      <mc:AlternateContent xmlns:mc="http://schemas.openxmlformats.org/markup-compatibility/2006">
-        <mc:Choice xmlns:a14="http://schemas.microsoft.com/office/drawing/2010/main" Requires="a14">
+      <mc:AlternateContent xmlns:mc="http://schemas.openxmlformats.org/markup-compatibility/2006" xmlns:a14="http://schemas.microsoft.com/office/drawing/2010/main">
+        <mc:Choice Requires="a14">
           <p:sp>
             <p:nvSpPr>
               <p:cNvPr id="5" name="TextBox 4">
@@ -17838,7 +20751,7 @@
             </p:txBody>
           </p:sp>
         </mc:Choice>
-        <mc:Fallback>
+        <mc:Fallback xmlns="">
           <p:sp>
             <p:nvSpPr>
               <p:cNvPr id="5" name="TextBox 4">
@@ -17883,8 +20796,8 @@
           </p:sp>
         </mc:Fallback>
       </mc:AlternateContent>
-      <mc:AlternateContent xmlns:mc="http://schemas.openxmlformats.org/markup-compatibility/2006">
-        <mc:Choice xmlns:a14="http://schemas.microsoft.com/office/drawing/2010/main" Requires="a14">
+      <mc:AlternateContent xmlns:mc="http://schemas.openxmlformats.org/markup-compatibility/2006" xmlns:a14="http://schemas.microsoft.com/office/drawing/2010/main">
+        <mc:Choice Requires="a14">
           <p:sp>
             <p:nvSpPr>
               <p:cNvPr id="2" name="TextBox 1">
@@ -17953,7 +20866,7 @@
             </p:txBody>
           </p:sp>
         </mc:Choice>
-        <mc:Fallback>
+        <mc:Fallback xmlns="">
           <p:sp>
             <p:nvSpPr>
               <p:cNvPr id="2" name="TextBox 1">
@@ -18316,8 +21229,8 @@
           </a:p>
         </p:txBody>
       </p:sp>
-      <mc:AlternateContent xmlns:mc="http://schemas.openxmlformats.org/markup-compatibility/2006">
-        <mc:Choice xmlns:a14="http://schemas.microsoft.com/office/drawing/2010/main" Requires="a14">
+      <mc:AlternateContent xmlns:mc="http://schemas.openxmlformats.org/markup-compatibility/2006" xmlns:a14="http://schemas.microsoft.com/office/drawing/2010/main">
+        <mc:Choice Requires="a14">
           <p:sp>
             <p:nvSpPr>
               <p:cNvPr id="6" name="TextBox 5">
@@ -18386,7 +21299,7 @@
             </p:txBody>
           </p:sp>
         </mc:Choice>
-        <mc:Fallback>
+        <mc:Fallback xmlns="">
           <p:sp>
             <p:nvSpPr>
               <p:cNvPr id="6" name="TextBox 5">
@@ -18431,8 +21344,8 @@
           </p:sp>
         </mc:Fallback>
       </mc:AlternateContent>
-      <mc:AlternateContent xmlns:mc="http://schemas.openxmlformats.org/markup-compatibility/2006">
-        <mc:Choice xmlns:a14="http://schemas.microsoft.com/office/drawing/2010/main" Requires="a14">
+      <mc:AlternateContent xmlns:mc="http://schemas.openxmlformats.org/markup-compatibility/2006" xmlns:a14="http://schemas.microsoft.com/office/drawing/2010/main">
+        <mc:Choice Requires="a14">
           <p:sp>
             <p:nvSpPr>
               <p:cNvPr id="7" name="TextBox 6">
@@ -18501,7 +21414,7 @@
             </p:txBody>
           </p:sp>
         </mc:Choice>
-        <mc:Fallback>
+        <mc:Fallback xmlns="">
           <p:sp>
             <p:nvSpPr>
               <p:cNvPr id="7" name="TextBox 6">
@@ -18546,8 +21459,8 @@
           </p:sp>
         </mc:Fallback>
       </mc:AlternateContent>
-      <mc:AlternateContent xmlns:mc="http://schemas.openxmlformats.org/markup-compatibility/2006">
-        <mc:Choice xmlns:a14="http://schemas.microsoft.com/office/drawing/2010/main" Requires="a14">
+      <mc:AlternateContent xmlns:mc="http://schemas.openxmlformats.org/markup-compatibility/2006" xmlns:a14="http://schemas.microsoft.com/office/drawing/2010/main">
+        <mc:Choice Requires="a14">
           <p:sp>
             <p:nvSpPr>
               <p:cNvPr id="29" name="TextBox 28">
@@ -18616,7 +21529,7 @@
             </p:txBody>
           </p:sp>
         </mc:Choice>
-        <mc:Fallback>
+        <mc:Fallback xmlns="">
           <p:sp>
             <p:nvSpPr>
               <p:cNvPr id="29" name="TextBox 28">
@@ -19103,8 +22016,8 @@
           <a:chExt cx="0" cy="0"/>
         </a:xfrm>
       </p:grpSpPr>
-      <mc:AlternateContent xmlns:mc="http://schemas.openxmlformats.org/markup-compatibility/2006">
-        <mc:Choice xmlns:a14="http://schemas.microsoft.com/office/drawing/2010/main" Requires="a14">
+      <mc:AlternateContent xmlns:mc="http://schemas.openxmlformats.org/markup-compatibility/2006" xmlns:a14="http://schemas.microsoft.com/office/drawing/2010/main">
+        <mc:Choice Requires="a14">
           <p:sp>
             <p:nvSpPr>
               <p:cNvPr id="92" name="TextBox 91">
@@ -19173,7 +22086,7 @@
             </p:txBody>
           </p:sp>
         </mc:Choice>
-        <mc:Fallback>
+        <mc:Fallback xmlns="">
           <p:sp>
             <p:nvSpPr>
               <p:cNvPr id="92" name="TextBox 91">
@@ -19218,8 +22131,8 @@
           </p:sp>
         </mc:Fallback>
       </mc:AlternateContent>
-      <mc:AlternateContent xmlns:mc="http://schemas.openxmlformats.org/markup-compatibility/2006">
-        <mc:Choice xmlns:a14="http://schemas.microsoft.com/office/drawing/2010/main" Requires="a14">
+      <mc:AlternateContent xmlns:mc="http://schemas.openxmlformats.org/markup-compatibility/2006" xmlns:a14="http://schemas.microsoft.com/office/drawing/2010/main">
+        <mc:Choice Requires="a14">
           <p:sp>
             <p:nvSpPr>
               <p:cNvPr id="93" name="TextBox 92">
@@ -19288,7 +22201,7 @@
             </p:txBody>
           </p:sp>
         </mc:Choice>
-        <mc:Fallback>
+        <mc:Fallback xmlns="">
           <p:sp>
             <p:nvSpPr>
               <p:cNvPr id="93" name="TextBox 92">
@@ -19333,8 +22246,8 @@
           </p:sp>
         </mc:Fallback>
       </mc:AlternateContent>
-      <mc:AlternateContent xmlns:mc="http://schemas.openxmlformats.org/markup-compatibility/2006">
-        <mc:Choice xmlns:a14="http://schemas.microsoft.com/office/drawing/2010/main" Requires="a14">
+      <mc:AlternateContent xmlns:mc="http://schemas.openxmlformats.org/markup-compatibility/2006" xmlns:a14="http://schemas.microsoft.com/office/drawing/2010/main">
+        <mc:Choice Requires="a14">
           <p:sp>
             <p:nvSpPr>
               <p:cNvPr id="94" name="TextBox 93">
@@ -19403,7 +22316,7 @@
             </p:txBody>
           </p:sp>
         </mc:Choice>
-        <mc:Fallback>
+        <mc:Fallback xmlns="">
           <p:sp>
             <p:nvSpPr>
               <p:cNvPr id="94" name="TextBox 93">
@@ -19448,8 +22361,8 @@
           </p:sp>
         </mc:Fallback>
       </mc:AlternateContent>
-      <mc:AlternateContent xmlns:mc="http://schemas.openxmlformats.org/markup-compatibility/2006">
-        <mc:Choice xmlns:a14="http://schemas.microsoft.com/office/drawing/2010/main" Requires="a14">
+      <mc:AlternateContent xmlns:mc="http://schemas.openxmlformats.org/markup-compatibility/2006" xmlns:a14="http://schemas.microsoft.com/office/drawing/2010/main">
+        <mc:Choice Requires="a14">
           <p:sp>
             <p:nvSpPr>
               <p:cNvPr id="95" name="TextBox 94">
@@ -19518,7 +22431,7 @@
             </p:txBody>
           </p:sp>
         </mc:Choice>
-        <mc:Fallback>
+        <mc:Fallback xmlns="">
           <p:sp>
             <p:nvSpPr>
               <p:cNvPr id="95" name="TextBox 94">
@@ -19563,8 +22476,8 @@
           </p:sp>
         </mc:Fallback>
       </mc:AlternateContent>
-      <mc:AlternateContent xmlns:mc="http://schemas.openxmlformats.org/markup-compatibility/2006">
-        <mc:Choice xmlns:a14="http://schemas.microsoft.com/office/drawing/2010/main" Requires="a14">
+      <mc:AlternateContent xmlns:mc="http://schemas.openxmlformats.org/markup-compatibility/2006" xmlns:a14="http://schemas.microsoft.com/office/drawing/2010/main">
+        <mc:Choice Requires="a14">
           <p:sp>
             <p:nvSpPr>
               <p:cNvPr id="96" name="TextBox 95">
@@ -19633,7 +22546,7 @@
             </p:txBody>
           </p:sp>
         </mc:Choice>
-        <mc:Fallback>
+        <mc:Fallback xmlns="">
           <p:sp>
             <p:nvSpPr>
               <p:cNvPr id="96" name="TextBox 95">
@@ -20352,8 +23265,8 @@
           </a:p>
         </p:txBody>
       </p:sp>
-      <mc:AlternateContent xmlns:mc="http://schemas.openxmlformats.org/markup-compatibility/2006">
-        <mc:Choice xmlns:a14="http://schemas.microsoft.com/office/drawing/2010/main" Requires="a14">
+      <mc:AlternateContent xmlns:mc="http://schemas.openxmlformats.org/markup-compatibility/2006" xmlns:a14="http://schemas.microsoft.com/office/drawing/2010/main">
+        <mc:Choice Requires="a14">
           <p:sp>
             <p:nvSpPr>
               <p:cNvPr id="5" name="TextBox 4">
@@ -21124,7 +24037,7 @@
             </p:txBody>
           </p:sp>
         </mc:Choice>
-        <mc:Fallback>
+        <mc:Fallback xmlns="">
           <p:sp>
             <p:nvSpPr>
               <p:cNvPr id="5" name="TextBox 4">
@@ -21169,8 +24082,8 @@
           </p:sp>
         </mc:Fallback>
       </mc:AlternateContent>
-      <mc:AlternateContent xmlns:mc="http://schemas.openxmlformats.org/markup-compatibility/2006">
-        <mc:Choice xmlns:a14="http://schemas.microsoft.com/office/drawing/2010/main" Requires="a14">
+      <mc:AlternateContent xmlns:mc="http://schemas.openxmlformats.org/markup-compatibility/2006" xmlns:a14="http://schemas.microsoft.com/office/drawing/2010/main">
+        <mc:Choice Requires="a14">
           <p:sp>
             <p:nvSpPr>
               <p:cNvPr id="2" name="TextBox 1">
@@ -21239,7 +24152,7 @@
             </p:txBody>
           </p:sp>
         </mc:Choice>
-        <mc:Fallback>
+        <mc:Fallback xmlns="">
           <p:sp>
             <p:nvSpPr>
               <p:cNvPr id="2" name="TextBox 1">
@@ -21284,8 +24197,8 @@
           </p:sp>
         </mc:Fallback>
       </mc:AlternateContent>
-      <mc:AlternateContent xmlns:mc="http://schemas.openxmlformats.org/markup-compatibility/2006">
-        <mc:Choice xmlns:a14="http://schemas.microsoft.com/office/drawing/2010/main" Requires="a14">
+      <mc:AlternateContent xmlns:mc="http://schemas.openxmlformats.org/markup-compatibility/2006" xmlns:a14="http://schemas.microsoft.com/office/drawing/2010/main">
+        <mc:Choice Requires="a14">
           <p:sp>
             <p:nvSpPr>
               <p:cNvPr id="3" name="TextBox 2">
@@ -21354,7 +24267,7 @@
             </p:txBody>
           </p:sp>
         </mc:Choice>
-        <mc:Fallback>
+        <mc:Fallback xmlns="">
           <p:sp>
             <p:nvSpPr>
               <p:cNvPr id="3" name="TextBox 2">
@@ -21399,8 +24312,8 @@
           </p:sp>
         </mc:Fallback>
       </mc:AlternateContent>
-      <mc:AlternateContent xmlns:mc="http://schemas.openxmlformats.org/markup-compatibility/2006">
-        <mc:Choice xmlns:a14="http://schemas.microsoft.com/office/drawing/2010/main" Requires="a14">
+      <mc:AlternateContent xmlns:mc="http://schemas.openxmlformats.org/markup-compatibility/2006" xmlns:a14="http://schemas.microsoft.com/office/drawing/2010/main">
+        <mc:Choice Requires="a14">
           <p:sp>
             <p:nvSpPr>
               <p:cNvPr id="6" name="TextBox 5">
@@ -21469,7 +24382,7 @@
             </p:txBody>
           </p:sp>
         </mc:Choice>
-        <mc:Fallback>
+        <mc:Fallback xmlns="">
           <p:sp>
             <p:nvSpPr>
               <p:cNvPr id="6" name="TextBox 5">
@@ -21514,8 +24427,8 @@
           </p:sp>
         </mc:Fallback>
       </mc:AlternateContent>
-      <mc:AlternateContent xmlns:mc="http://schemas.openxmlformats.org/markup-compatibility/2006">
-        <mc:Choice xmlns:a14="http://schemas.microsoft.com/office/drawing/2010/main" Requires="a14">
+      <mc:AlternateContent xmlns:mc="http://schemas.openxmlformats.org/markup-compatibility/2006" xmlns:a14="http://schemas.microsoft.com/office/drawing/2010/main">
+        <mc:Choice Requires="a14">
           <p:sp>
             <p:nvSpPr>
               <p:cNvPr id="7" name="TextBox 6">
@@ -21584,7 +24497,7 @@
             </p:txBody>
           </p:sp>
         </mc:Choice>
-        <mc:Fallback>
+        <mc:Fallback xmlns="">
           <p:sp>
             <p:nvSpPr>
               <p:cNvPr id="7" name="TextBox 6">
@@ -22266,8 +25179,8 @@
           </a:fontRef>
         </p:style>
       </p:cxnSp>
-      <mc:AlternateContent xmlns:mc="http://schemas.openxmlformats.org/markup-compatibility/2006">
-        <mc:Choice xmlns:a14="http://schemas.microsoft.com/office/drawing/2010/main" Requires="a14">
+      <mc:AlternateContent xmlns:mc="http://schemas.openxmlformats.org/markup-compatibility/2006" xmlns:a14="http://schemas.microsoft.com/office/drawing/2010/main">
+        <mc:Choice Requires="a14">
           <p:sp>
             <p:nvSpPr>
               <p:cNvPr id="42" name="TextBox 41">
@@ -22336,7 +25249,7 @@
             </p:txBody>
           </p:sp>
         </mc:Choice>
-        <mc:Fallback>
+        <mc:Fallback xmlns="">
           <p:sp>
             <p:nvSpPr>
               <p:cNvPr id="42" name="TextBox 41">
@@ -22381,8 +25294,8 @@
           </p:sp>
         </mc:Fallback>
       </mc:AlternateContent>
-      <mc:AlternateContent xmlns:mc="http://schemas.openxmlformats.org/markup-compatibility/2006">
-        <mc:Choice xmlns:a14="http://schemas.microsoft.com/office/drawing/2010/main" Requires="a14">
+      <mc:AlternateContent xmlns:mc="http://schemas.openxmlformats.org/markup-compatibility/2006" xmlns:a14="http://schemas.microsoft.com/office/drawing/2010/main">
+        <mc:Choice Requires="a14">
           <p:sp>
             <p:nvSpPr>
               <p:cNvPr id="43" name="TextBox 42">
@@ -22451,7 +25364,7 @@
             </p:txBody>
           </p:sp>
         </mc:Choice>
-        <mc:Fallback>
+        <mc:Fallback xmlns="">
           <p:sp>
             <p:nvSpPr>
               <p:cNvPr id="43" name="TextBox 42">
@@ -22496,8 +25409,8 @@
           </p:sp>
         </mc:Fallback>
       </mc:AlternateContent>
-      <mc:AlternateContent xmlns:mc="http://schemas.openxmlformats.org/markup-compatibility/2006">
-        <mc:Choice xmlns:a14="http://schemas.microsoft.com/office/drawing/2010/main" Requires="a14">
+      <mc:AlternateContent xmlns:mc="http://schemas.openxmlformats.org/markup-compatibility/2006" xmlns:a14="http://schemas.microsoft.com/office/drawing/2010/main">
+        <mc:Choice Requires="a14">
           <p:sp>
             <p:nvSpPr>
               <p:cNvPr id="44" name="TextBox 43">
@@ -22566,7 +25479,7 @@
             </p:txBody>
           </p:sp>
         </mc:Choice>
-        <mc:Fallback>
+        <mc:Fallback xmlns="">
           <p:sp>
             <p:nvSpPr>
               <p:cNvPr id="44" name="TextBox 43">
@@ -22611,8 +25524,8 @@
           </p:sp>
         </mc:Fallback>
       </mc:AlternateContent>
-      <mc:AlternateContent xmlns:mc="http://schemas.openxmlformats.org/markup-compatibility/2006">
-        <mc:Choice xmlns:a14="http://schemas.microsoft.com/office/drawing/2010/main" Requires="a14">
+      <mc:AlternateContent xmlns:mc="http://schemas.openxmlformats.org/markup-compatibility/2006" xmlns:a14="http://schemas.microsoft.com/office/drawing/2010/main">
+        <mc:Choice Requires="a14">
           <p:sp>
             <p:nvSpPr>
               <p:cNvPr id="45" name="TextBox 44">
@@ -22681,7 +25594,7 @@
             </p:txBody>
           </p:sp>
         </mc:Choice>
-        <mc:Fallback>
+        <mc:Fallback xmlns="">
           <p:sp>
             <p:nvSpPr>
               <p:cNvPr id="45" name="TextBox 44">
@@ -22773,8 +25686,8 @@
           </a:p>
         </p:txBody>
       </p:sp>
-      <mc:AlternateContent xmlns:mc="http://schemas.openxmlformats.org/markup-compatibility/2006">
-        <mc:Choice xmlns:a14="http://schemas.microsoft.com/office/drawing/2010/main" Requires="a14">
+      <mc:AlternateContent xmlns:mc="http://schemas.openxmlformats.org/markup-compatibility/2006" xmlns:a14="http://schemas.microsoft.com/office/drawing/2010/main">
+        <mc:Choice Requires="a14">
           <p:sp>
             <p:nvSpPr>
               <p:cNvPr id="61" name="TextBox 60">
@@ -22843,7 +25756,7 @@
             </p:txBody>
           </p:sp>
         </mc:Choice>
-        <mc:Fallback>
+        <mc:Fallback xmlns="">
           <p:sp>
             <p:nvSpPr>
               <p:cNvPr id="61" name="TextBox 60">
@@ -22967,8 +25880,8 @@
           </a:fontRef>
         </p:style>
       </p:cxnSp>
-      <mc:AlternateContent xmlns:mc="http://schemas.openxmlformats.org/markup-compatibility/2006">
-        <mc:Choice xmlns:a14="http://schemas.microsoft.com/office/drawing/2010/main" Requires="a14">
+      <mc:AlternateContent xmlns:mc="http://schemas.openxmlformats.org/markup-compatibility/2006" xmlns:a14="http://schemas.microsoft.com/office/drawing/2010/main">
+        <mc:Choice Requires="a14">
           <p:sp>
             <p:nvSpPr>
               <p:cNvPr id="73" name="TextBox 72">
@@ -22997,6 +25910,7 @@
               </a:bodyPr>
               <a:lstStyle/>
               <a:p>
+                <a:pPr/>
                 <a14:m>
                   <m:oMathPara xmlns:m="http://schemas.openxmlformats.org/officeDocument/2006/math">
                     <m:oMathParaPr>
@@ -23023,7 +25937,7 @@
             </p:txBody>
           </p:sp>
         </mc:Choice>
-        <mc:Fallback>
+        <mc:Fallback xmlns="">
           <p:sp>
             <p:nvSpPr>
               <p:cNvPr id="73" name="TextBox 72">
@@ -23068,8 +25982,8 @@
           </p:sp>
         </mc:Fallback>
       </mc:AlternateContent>
-      <mc:AlternateContent xmlns:mc="http://schemas.openxmlformats.org/markup-compatibility/2006">
-        <mc:Choice xmlns:a14="http://schemas.microsoft.com/office/drawing/2010/main" Requires="a14">
+      <mc:AlternateContent xmlns:mc="http://schemas.openxmlformats.org/markup-compatibility/2006" xmlns:a14="http://schemas.microsoft.com/office/drawing/2010/main">
+        <mc:Choice Requires="a14">
           <p:sp>
             <p:nvSpPr>
               <p:cNvPr id="74" name="TextBox 73">
@@ -23098,6 +26012,7 @@
               </a:bodyPr>
               <a:lstStyle/>
               <a:p>
+                <a:pPr/>
                 <a14:m>
                   <m:oMathPara xmlns:m="http://schemas.openxmlformats.org/officeDocument/2006/math">
                     <m:oMathParaPr>
@@ -23124,7 +26039,7 @@
             </p:txBody>
           </p:sp>
         </mc:Choice>
-        <mc:Fallback>
+        <mc:Fallback xmlns="">
           <p:sp>
             <p:nvSpPr>
               <p:cNvPr id="74" name="TextBox 73">
@@ -23296,8 +26211,8 @@
           </a:fontRef>
         </p:style>
       </p:cxnSp>
-      <mc:AlternateContent xmlns:mc="http://schemas.openxmlformats.org/markup-compatibility/2006">
-        <mc:Choice xmlns:a14="http://schemas.microsoft.com/office/drawing/2010/main" Requires="a14">
+      <mc:AlternateContent xmlns:mc="http://schemas.openxmlformats.org/markup-compatibility/2006" xmlns:a14="http://schemas.microsoft.com/office/drawing/2010/main">
+        <mc:Choice Requires="a14">
           <p:sp>
             <p:nvSpPr>
               <p:cNvPr id="102" name="TextBox 101">
@@ -23326,6 +26241,7 @@
               </a:bodyPr>
               <a:lstStyle/>
               <a:p>
+                <a:pPr/>
                 <a14:m>
                   <m:oMathPara xmlns:m="http://schemas.openxmlformats.org/officeDocument/2006/math">
                     <m:oMathParaPr>
@@ -23352,7 +26268,7 @@
             </p:txBody>
           </p:sp>
         </mc:Choice>
-        <mc:Fallback>
+        <mc:Fallback xmlns="">
           <p:sp>
             <p:nvSpPr>
               <p:cNvPr id="102" name="TextBox 101">
@@ -23463,8 +26379,8 @@
           </a:p>
         </p:txBody>
       </p:sp>
-      <mc:AlternateContent xmlns:mc="http://schemas.openxmlformats.org/markup-compatibility/2006">
-        <mc:Choice xmlns:a14="http://schemas.microsoft.com/office/drawing/2010/main" Requires="a14">
+      <mc:AlternateContent xmlns:mc="http://schemas.openxmlformats.org/markup-compatibility/2006" xmlns:a14="http://schemas.microsoft.com/office/drawing/2010/main">
+        <mc:Choice Requires="a14">
           <p:sp>
             <p:nvSpPr>
               <p:cNvPr id="5" name="TextBox 4">
@@ -24530,7 +27446,7 @@
             </p:txBody>
           </p:sp>
         </mc:Choice>
-        <mc:Fallback>
+        <mc:Fallback xmlns="">
           <p:sp>
             <p:nvSpPr>
               <p:cNvPr id="5" name="TextBox 4">
@@ -24575,8 +27491,8 @@
           </p:sp>
         </mc:Fallback>
       </mc:AlternateContent>
-      <mc:AlternateContent xmlns:mc="http://schemas.openxmlformats.org/markup-compatibility/2006">
-        <mc:Choice xmlns:a14="http://schemas.microsoft.com/office/drawing/2010/main" Requires="a14">
+      <mc:AlternateContent xmlns:mc="http://schemas.openxmlformats.org/markup-compatibility/2006" xmlns:a14="http://schemas.microsoft.com/office/drawing/2010/main">
+        <mc:Choice Requires="a14">
           <p:sp>
             <p:nvSpPr>
               <p:cNvPr id="7" name="TextBox 6">
@@ -24645,7 +27561,7 @@
             </p:txBody>
           </p:sp>
         </mc:Choice>
-        <mc:Fallback>
+        <mc:Fallback xmlns="">
           <p:sp>
             <p:nvSpPr>
               <p:cNvPr id="7" name="TextBox 6">
@@ -24690,8 +27606,8 @@
           </p:sp>
         </mc:Fallback>
       </mc:AlternateContent>
-      <mc:AlternateContent xmlns:mc="http://schemas.openxmlformats.org/markup-compatibility/2006">
-        <mc:Choice xmlns:a14="http://schemas.microsoft.com/office/drawing/2010/main" Requires="a14">
+      <mc:AlternateContent xmlns:mc="http://schemas.openxmlformats.org/markup-compatibility/2006" xmlns:a14="http://schemas.microsoft.com/office/drawing/2010/main">
+        <mc:Choice Requires="a14">
           <p:sp>
             <p:nvSpPr>
               <p:cNvPr id="8" name="TextBox 7">
@@ -24760,7 +27676,7 @@
             </p:txBody>
           </p:sp>
         </mc:Choice>
-        <mc:Fallback>
+        <mc:Fallback xmlns="">
           <p:sp>
             <p:nvSpPr>
               <p:cNvPr id="8" name="TextBox 7">
@@ -24805,8 +27721,8 @@
           </p:sp>
         </mc:Fallback>
       </mc:AlternateContent>
-      <mc:AlternateContent xmlns:mc="http://schemas.openxmlformats.org/markup-compatibility/2006">
-        <mc:Choice xmlns:a14="http://schemas.microsoft.com/office/drawing/2010/main" Requires="a14">
+      <mc:AlternateContent xmlns:mc="http://schemas.openxmlformats.org/markup-compatibility/2006" xmlns:a14="http://schemas.microsoft.com/office/drawing/2010/main">
+        <mc:Choice Requires="a14">
           <p:sp>
             <p:nvSpPr>
               <p:cNvPr id="9" name="TextBox 8">
@@ -24875,7 +27791,7 @@
             </p:txBody>
           </p:sp>
         </mc:Choice>
-        <mc:Fallback>
+        <mc:Fallback xmlns="">
           <p:sp>
             <p:nvSpPr>
               <p:cNvPr id="9" name="TextBox 8">
@@ -24920,8 +27836,8 @@
           </p:sp>
         </mc:Fallback>
       </mc:AlternateContent>
-      <mc:AlternateContent xmlns:mc="http://schemas.openxmlformats.org/markup-compatibility/2006">
-        <mc:Choice xmlns:a14="http://schemas.microsoft.com/office/drawing/2010/main" Requires="a14">
+      <mc:AlternateContent xmlns:mc="http://schemas.openxmlformats.org/markup-compatibility/2006" xmlns:a14="http://schemas.microsoft.com/office/drawing/2010/main">
+        <mc:Choice Requires="a14">
           <p:sp>
             <p:nvSpPr>
               <p:cNvPr id="10" name="TextBox 9">
@@ -24990,7 +27906,7 @@
             </p:txBody>
           </p:sp>
         </mc:Choice>
-        <mc:Fallback>
+        <mc:Fallback xmlns="">
           <p:sp>
             <p:nvSpPr>
               <p:cNvPr id="10" name="TextBox 9">
@@ -25082,8 +27998,8 @@
           </a:p>
         </p:txBody>
       </p:sp>
-      <mc:AlternateContent xmlns:mc="http://schemas.openxmlformats.org/markup-compatibility/2006">
-        <mc:Choice xmlns:a14="http://schemas.microsoft.com/office/drawing/2010/main" Requires="a14">
+      <mc:AlternateContent xmlns:mc="http://schemas.openxmlformats.org/markup-compatibility/2006" xmlns:a14="http://schemas.microsoft.com/office/drawing/2010/main">
+        <mc:Choice Requires="a14">
           <p:sp>
             <p:nvSpPr>
               <p:cNvPr id="12" name="TextBox 11">
@@ -25152,7 +28068,7 @@
             </p:txBody>
           </p:sp>
         </mc:Choice>
-        <mc:Fallback>
+        <mc:Fallback xmlns="">
           <p:sp>
             <p:nvSpPr>
               <p:cNvPr id="12" name="TextBox 11">
@@ -25529,8 +28445,8 @@
           </a:p>
         </p:txBody>
       </p:sp>
-      <mc:AlternateContent xmlns:mc="http://schemas.openxmlformats.org/markup-compatibility/2006">
-        <mc:Choice xmlns:a14="http://schemas.microsoft.com/office/drawing/2010/main" Requires="a14">
+      <mc:AlternateContent xmlns:mc="http://schemas.openxmlformats.org/markup-compatibility/2006" xmlns:a14="http://schemas.microsoft.com/office/drawing/2010/main">
+        <mc:Choice Requires="a14">
           <p:sp>
             <p:nvSpPr>
               <p:cNvPr id="81" name="TextBox 80">
@@ -25746,7 +28662,7 @@
             </p:txBody>
           </p:sp>
         </mc:Choice>
-        <mc:Fallback>
+        <mc:Fallback xmlns="">
           <p:sp>
             <p:nvSpPr>
               <p:cNvPr id="81" name="TextBox 80">
@@ -25857,8 +28773,8 @@
           </a:p>
         </p:txBody>
       </p:sp>
-      <mc:AlternateContent xmlns:mc="http://schemas.openxmlformats.org/markup-compatibility/2006">
-        <mc:Choice xmlns:a14="http://schemas.microsoft.com/office/drawing/2010/main" Requires="a14">
+      <mc:AlternateContent xmlns:mc="http://schemas.openxmlformats.org/markup-compatibility/2006" xmlns:a14="http://schemas.microsoft.com/office/drawing/2010/main">
+        <mc:Choice Requires="a14">
           <p:sp>
             <p:nvSpPr>
               <p:cNvPr id="5" name="TextBox 4">
@@ -26788,7 +29704,7 @@
             </p:txBody>
           </p:sp>
         </mc:Choice>
-        <mc:Fallback>
+        <mc:Fallback xmlns="">
           <p:sp>
             <p:nvSpPr>
               <p:cNvPr id="5" name="TextBox 4">
@@ -26833,8 +29749,8 @@
           </p:sp>
         </mc:Fallback>
       </mc:AlternateContent>
-      <mc:AlternateContent xmlns:mc="http://schemas.openxmlformats.org/markup-compatibility/2006">
-        <mc:Choice xmlns:a14="http://schemas.microsoft.com/office/drawing/2010/main" Requires="a14">
+      <mc:AlternateContent xmlns:mc="http://schemas.openxmlformats.org/markup-compatibility/2006" xmlns:a14="http://schemas.microsoft.com/office/drawing/2010/main">
+        <mc:Choice Requires="a14">
           <p:sp>
             <p:nvSpPr>
               <p:cNvPr id="2" name="TextBox 1">
@@ -26903,7 +29819,7 @@
             </p:txBody>
           </p:sp>
         </mc:Choice>
-        <mc:Fallback>
+        <mc:Fallback xmlns="">
           <p:sp>
             <p:nvSpPr>
               <p:cNvPr id="2" name="TextBox 1">
@@ -26948,8 +29864,8 @@
           </p:sp>
         </mc:Fallback>
       </mc:AlternateContent>
-      <mc:AlternateContent xmlns:mc="http://schemas.openxmlformats.org/markup-compatibility/2006">
-        <mc:Choice xmlns:a14="http://schemas.microsoft.com/office/drawing/2010/main" Requires="a14">
+      <mc:AlternateContent xmlns:mc="http://schemas.openxmlformats.org/markup-compatibility/2006" xmlns:a14="http://schemas.microsoft.com/office/drawing/2010/main">
+        <mc:Choice Requires="a14">
           <p:sp>
             <p:nvSpPr>
               <p:cNvPr id="3" name="TextBox 2">
@@ -27018,7 +29934,7 @@
             </p:txBody>
           </p:sp>
         </mc:Choice>
-        <mc:Fallback>
+        <mc:Fallback xmlns="">
           <p:sp>
             <p:nvSpPr>
               <p:cNvPr id="3" name="TextBox 2">
@@ -27063,8 +29979,8 @@
           </p:sp>
         </mc:Fallback>
       </mc:AlternateContent>
-      <mc:AlternateContent xmlns:mc="http://schemas.openxmlformats.org/markup-compatibility/2006">
-        <mc:Choice xmlns:a14="http://schemas.microsoft.com/office/drawing/2010/main" Requires="a14">
+      <mc:AlternateContent xmlns:mc="http://schemas.openxmlformats.org/markup-compatibility/2006" xmlns:a14="http://schemas.microsoft.com/office/drawing/2010/main">
+        <mc:Choice Requires="a14">
           <p:sp>
             <p:nvSpPr>
               <p:cNvPr id="6" name="TextBox 5">
@@ -27133,7 +30049,7 @@
             </p:txBody>
           </p:sp>
         </mc:Choice>
-        <mc:Fallback>
+        <mc:Fallback xmlns="">
           <p:sp>
             <p:nvSpPr>
               <p:cNvPr id="6" name="TextBox 5">
@@ -27178,8 +30094,8 @@
           </p:sp>
         </mc:Fallback>
       </mc:AlternateContent>
-      <mc:AlternateContent xmlns:mc="http://schemas.openxmlformats.org/markup-compatibility/2006">
-        <mc:Choice xmlns:a14="http://schemas.microsoft.com/office/drawing/2010/main" Requires="a14">
+      <mc:AlternateContent xmlns:mc="http://schemas.openxmlformats.org/markup-compatibility/2006" xmlns:a14="http://schemas.microsoft.com/office/drawing/2010/main">
+        <mc:Choice Requires="a14">
           <p:sp>
             <p:nvSpPr>
               <p:cNvPr id="7" name="TextBox 6">
@@ -27248,7 +30164,7 @@
             </p:txBody>
           </p:sp>
         </mc:Choice>
-        <mc:Fallback>
+        <mc:Fallback xmlns="">
           <p:sp>
             <p:nvSpPr>
               <p:cNvPr id="7" name="TextBox 6">
@@ -27340,8 +30256,8 @@
           </a:p>
         </p:txBody>
       </p:sp>
-      <mc:AlternateContent xmlns:mc="http://schemas.openxmlformats.org/markup-compatibility/2006">
-        <mc:Choice xmlns:a14="http://schemas.microsoft.com/office/drawing/2010/main" Requires="a14">
+      <mc:AlternateContent xmlns:mc="http://schemas.openxmlformats.org/markup-compatibility/2006" xmlns:a14="http://schemas.microsoft.com/office/drawing/2010/main">
+        <mc:Choice Requires="a14">
           <p:sp>
             <p:nvSpPr>
               <p:cNvPr id="9" name="TextBox 8">
@@ -27410,7 +30326,7 @@
             </p:txBody>
           </p:sp>
         </mc:Choice>
-        <mc:Fallback>
+        <mc:Fallback xmlns="">
           <p:sp>
             <p:nvSpPr>
               <p:cNvPr id="9" name="TextBox 8">
@@ -27535,8 +30451,8 @@
           </a:fontRef>
         </p:style>
       </p:cxnSp>
-      <mc:AlternateContent xmlns:mc="http://schemas.openxmlformats.org/markup-compatibility/2006">
-        <mc:Choice xmlns:a14="http://schemas.microsoft.com/office/drawing/2010/main" Requires="a14">
+      <mc:AlternateContent xmlns:mc="http://schemas.openxmlformats.org/markup-compatibility/2006" xmlns:a14="http://schemas.microsoft.com/office/drawing/2010/main">
+        <mc:Choice Requires="a14">
           <p:sp>
             <p:nvSpPr>
               <p:cNvPr id="15" name="TextBox 14">
@@ -27605,7 +30521,7 @@
             </p:txBody>
           </p:sp>
         </mc:Choice>
-        <mc:Fallback>
+        <mc:Fallback xmlns="">
           <p:sp>
             <p:nvSpPr>
               <p:cNvPr id="15" name="TextBox 14">
@@ -27806,8 +30722,8 @@
           </a:p>
         </p:txBody>
       </p:sp>
-      <mc:AlternateContent xmlns:mc="http://schemas.openxmlformats.org/markup-compatibility/2006">
-        <mc:Choice xmlns:a14="http://schemas.microsoft.com/office/drawing/2010/main" Requires="a14">
+      <mc:AlternateContent xmlns:mc="http://schemas.openxmlformats.org/markup-compatibility/2006" xmlns:a14="http://schemas.microsoft.com/office/drawing/2010/main">
+        <mc:Choice Requires="a14">
           <p:sp>
             <p:nvSpPr>
               <p:cNvPr id="12" name="TextBox 11">
@@ -27876,7 +30792,7 @@
             </p:txBody>
           </p:sp>
         </mc:Choice>
-        <mc:Fallback>
+        <mc:Fallback xmlns="">
           <p:sp>
             <p:nvSpPr>
               <p:cNvPr id="12" name="TextBox 11">
@@ -27921,8 +30837,8 @@
           </p:sp>
         </mc:Fallback>
       </mc:AlternateContent>
-      <mc:AlternateContent xmlns:mc="http://schemas.openxmlformats.org/markup-compatibility/2006">
-        <mc:Choice xmlns:a14="http://schemas.microsoft.com/office/drawing/2010/main" Requires="a14">
+      <mc:AlternateContent xmlns:mc="http://schemas.openxmlformats.org/markup-compatibility/2006" xmlns:a14="http://schemas.microsoft.com/office/drawing/2010/main">
+        <mc:Choice Requires="a14">
           <p:sp>
             <p:nvSpPr>
               <p:cNvPr id="13" name="TextBox 12">
@@ -27991,7 +30907,7 @@
             </p:txBody>
           </p:sp>
         </mc:Choice>
-        <mc:Fallback>
+        <mc:Fallback xmlns="">
           <p:sp>
             <p:nvSpPr>
               <p:cNvPr id="13" name="TextBox 12">
@@ -28036,8 +30952,8 @@
           </p:sp>
         </mc:Fallback>
       </mc:AlternateContent>
-      <mc:AlternateContent xmlns:mc="http://schemas.openxmlformats.org/markup-compatibility/2006">
-        <mc:Choice xmlns:a14="http://schemas.microsoft.com/office/drawing/2010/main" Requires="a14">
+      <mc:AlternateContent xmlns:mc="http://schemas.openxmlformats.org/markup-compatibility/2006" xmlns:a14="http://schemas.microsoft.com/office/drawing/2010/main">
+        <mc:Choice Requires="a14">
           <p:sp>
             <p:nvSpPr>
               <p:cNvPr id="14" name="TextBox 13">
@@ -28106,7 +31022,7 @@
             </p:txBody>
           </p:sp>
         </mc:Choice>
-        <mc:Fallback>
+        <mc:Fallback xmlns="">
           <p:sp>
             <p:nvSpPr>
               <p:cNvPr id="14" name="TextBox 13">
@@ -28151,8 +31067,8 @@
           </p:sp>
         </mc:Fallback>
       </mc:AlternateContent>
-      <mc:AlternateContent xmlns:mc="http://schemas.openxmlformats.org/markup-compatibility/2006">
-        <mc:Choice xmlns:a14="http://schemas.microsoft.com/office/drawing/2010/main" Requires="a14">
+      <mc:AlternateContent xmlns:mc="http://schemas.openxmlformats.org/markup-compatibility/2006" xmlns:a14="http://schemas.microsoft.com/office/drawing/2010/main">
+        <mc:Choice Requires="a14">
           <p:sp>
             <p:nvSpPr>
               <p:cNvPr id="16" name="TextBox 15">
@@ -28221,7 +31137,7 @@
             </p:txBody>
           </p:sp>
         </mc:Choice>
-        <mc:Fallback>
+        <mc:Fallback xmlns="">
           <p:sp>
             <p:nvSpPr>
               <p:cNvPr id="16" name="TextBox 15">
@@ -28313,8 +31229,8 @@
           </a:p>
         </p:txBody>
       </p:sp>
-      <mc:AlternateContent xmlns:mc="http://schemas.openxmlformats.org/markup-compatibility/2006">
-        <mc:Choice xmlns:a14="http://schemas.microsoft.com/office/drawing/2010/main" Requires="a14">
+      <mc:AlternateContent xmlns:mc="http://schemas.openxmlformats.org/markup-compatibility/2006" xmlns:a14="http://schemas.microsoft.com/office/drawing/2010/main">
+        <mc:Choice Requires="a14">
           <p:sp>
             <p:nvSpPr>
               <p:cNvPr id="18" name="TextBox 17">
@@ -28383,7 +31299,7 @@
             </p:txBody>
           </p:sp>
         </mc:Choice>
-        <mc:Fallback>
+        <mc:Fallback xmlns="">
           <p:sp>
             <p:nvSpPr>
               <p:cNvPr id="18" name="TextBox 17">
@@ -28508,8 +31424,8 @@
           </a:fontRef>
         </p:style>
       </p:cxnSp>
-      <mc:AlternateContent xmlns:mc="http://schemas.openxmlformats.org/markup-compatibility/2006">
-        <mc:Choice xmlns:a14="http://schemas.microsoft.com/office/drawing/2010/main" Requires="a14">
+      <mc:AlternateContent xmlns:mc="http://schemas.openxmlformats.org/markup-compatibility/2006" xmlns:a14="http://schemas.microsoft.com/office/drawing/2010/main">
+        <mc:Choice Requires="a14">
           <p:sp>
             <p:nvSpPr>
               <p:cNvPr id="21" name="TextBox 20">
@@ -28578,7 +31494,7 @@
             </p:txBody>
           </p:sp>
         </mc:Choice>
-        <mc:Fallback>
+        <mc:Fallback xmlns="">
           <p:sp>
             <p:nvSpPr>
               <p:cNvPr id="21" name="TextBox 20">
@@ -28623,8 +31539,8 @@
           </p:sp>
         </mc:Fallback>
       </mc:AlternateContent>
-      <mc:AlternateContent xmlns:mc="http://schemas.openxmlformats.org/markup-compatibility/2006">
-        <mc:Choice xmlns:a14="http://schemas.microsoft.com/office/drawing/2010/main" Requires="a14">
+      <mc:AlternateContent xmlns:mc="http://schemas.openxmlformats.org/markup-compatibility/2006" xmlns:a14="http://schemas.microsoft.com/office/drawing/2010/main">
+        <mc:Choice Requires="a14">
           <p:sp>
             <p:nvSpPr>
               <p:cNvPr id="23" name="TextBox 22">
@@ -30363,7 +33279,7 @@
             </p:txBody>
           </p:sp>
         </mc:Choice>
-        <mc:Fallback>
+        <mc:Fallback xmlns="">
           <p:sp>
             <p:nvSpPr>
               <p:cNvPr id="23" name="TextBox 22">
@@ -30408,8 +33324,8 @@
           </p:sp>
         </mc:Fallback>
       </mc:AlternateContent>
-      <mc:AlternateContent xmlns:mc="http://schemas.openxmlformats.org/markup-compatibility/2006">
-        <mc:Choice xmlns:a14="http://schemas.microsoft.com/office/drawing/2010/main" Requires="a14">
+      <mc:AlternateContent xmlns:mc="http://schemas.openxmlformats.org/markup-compatibility/2006" xmlns:a14="http://schemas.microsoft.com/office/drawing/2010/main">
+        <mc:Choice Requires="a14">
           <p:sp>
             <p:nvSpPr>
               <p:cNvPr id="24" name="TextBox 23">
@@ -30478,7 +33394,7 @@
             </p:txBody>
           </p:sp>
         </mc:Choice>
-        <mc:Fallback>
+        <mc:Fallback xmlns="">
           <p:sp>
             <p:nvSpPr>
               <p:cNvPr id="24" name="TextBox 23">
@@ -30523,8 +33439,8 @@
           </p:sp>
         </mc:Fallback>
       </mc:AlternateContent>
-      <mc:AlternateContent xmlns:mc="http://schemas.openxmlformats.org/markup-compatibility/2006">
-        <mc:Choice xmlns:a14="http://schemas.microsoft.com/office/drawing/2010/main" Requires="a14">
+      <mc:AlternateContent xmlns:mc="http://schemas.openxmlformats.org/markup-compatibility/2006" xmlns:a14="http://schemas.microsoft.com/office/drawing/2010/main">
+        <mc:Choice Requires="a14">
           <p:sp>
             <p:nvSpPr>
               <p:cNvPr id="25" name="TextBox 24">
@@ -30593,7 +33509,7 @@
             </p:txBody>
           </p:sp>
         </mc:Choice>
-        <mc:Fallback>
+        <mc:Fallback xmlns="">
           <p:sp>
             <p:nvSpPr>
               <p:cNvPr id="25" name="TextBox 24">
@@ -30638,8 +33554,8 @@
           </p:sp>
         </mc:Fallback>
       </mc:AlternateContent>
-      <mc:AlternateContent xmlns:mc="http://schemas.openxmlformats.org/markup-compatibility/2006">
-        <mc:Choice xmlns:a14="http://schemas.microsoft.com/office/drawing/2010/main" Requires="a14">
+      <mc:AlternateContent xmlns:mc="http://schemas.openxmlformats.org/markup-compatibility/2006" xmlns:a14="http://schemas.microsoft.com/office/drawing/2010/main">
+        <mc:Choice Requires="a14">
           <p:sp>
             <p:nvSpPr>
               <p:cNvPr id="26" name="TextBox 25">
@@ -30708,7 +33624,7 @@
             </p:txBody>
           </p:sp>
         </mc:Choice>
-        <mc:Fallback>
+        <mc:Fallback xmlns="">
           <p:sp>
             <p:nvSpPr>
               <p:cNvPr id="26" name="TextBox 25">
@@ -30753,8 +33669,8 @@
           </p:sp>
         </mc:Fallback>
       </mc:AlternateContent>
-      <mc:AlternateContent xmlns:mc="http://schemas.openxmlformats.org/markup-compatibility/2006">
-        <mc:Choice xmlns:a14="http://schemas.microsoft.com/office/drawing/2010/main" Requires="a14">
+      <mc:AlternateContent xmlns:mc="http://schemas.openxmlformats.org/markup-compatibility/2006" xmlns:a14="http://schemas.microsoft.com/office/drawing/2010/main">
+        <mc:Choice Requires="a14">
           <p:sp>
             <p:nvSpPr>
               <p:cNvPr id="27" name="TextBox 26">
@@ -30823,7 +33739,7 @@
             </p:txBody>
           </p:sp>
         </mc:Choice>
-        <mc:Fallback>
+        <mc:Fallback xmlns="">
           <p:sp>
             <p:nvSpPr>
               <p:cNvPr id="27" name="TextBox 26">
@@ -30953,7 +33869,7 @@
         <p:spPr>
           <a:xfrm>
             <a:off x="264937" y="232949"/>
-            <a:ext cx="1337867" cy="369332"/>
+            <a:ext cx="1859805" cy="369332"/>
           </a:xfrm>
           <a:prstGeom prst="rect">
             <a:avLst/>
@@ -30968,7 +33884,7 @@
           <a:p>
             <a:r>
               <a:rPr lang="en-US" altLang="ko-KR" b="1" dirty="0"/>
-              <a:t>summary. </a:t>
+              <a:t>summary. 1 of </a:t>
             </a:r>
             <a:endParaRPr lang="ko-KR" altLang="en-US" b="1" dirty="0"/>
           </a:p>
@@ -30991,7 +33907,7 @@
             <p:spPr>
               <a:xfrm>
                 <a:off x="264937" y="602281"/>
-                <a:ext cx="11662126" cy="1349472"/>
+                <a:ext cx="11662126" cy="4934749"/>
               </a:xfrm>
               <a:prstGeom prst="rect">
                 <a:avLst/>
@@ -31214,10 +34130,1288 @@
                   <a:t>을 포함한다</a:t>
                 </a:r>
                 <a:r>
-                  <a:rPr lang="en-US" altLang="ko-KR" sz="1400"/>
+                  <a:rPr lang="en-US" altLang="ko-KR" sz="1400" dirty="0"/>
                   <a:t>.</a:t>
                 </a:r>
+              </a:p>
+              <a:p>
+                <a:pPr marL="285750" indent="-285750">
+                  <a:lnSpc>
+                    <a:spcPct val="150000"/>
+                  </a:lnSpc>
+                  <a:buFont typeface="맑은 고딕" panose="020B0503020000020004" pitchFamily="50" charset="-127"/>
+                  <a:buChar char="-"/>
+                </a:pPr>
+                <a:r>
+                  <a:rPr lang="en-US" altLang="ko-KR" sz="1400" dirty="0"/>
+                  <a:t>monotone basic n</a:t>
+                </a:r>
+                <a:r>
+                  <a:rPr lang="ko-KR" altLang="en-US" sz="1400" dirty="0"/>
+                  <a:t>각형에 최대 </a:t>
+                </a:r>
+                <a:r>
+                  <a:rPr lang="en-US" altLang="ko-KR" sz="1400" dirty="0"/>
+                  <a:t>n-3</a:t>
+                </a:r>
+                <a:r>
+                  <a:rPr lang="ko-KR" altLang="en-US" sz="1400" dirty="0"/>
+                  <a:t>개의 </a:t>
+                </a:r>
+                <a:r>
+                  <a:rPr lang="en-US" altLang="ko-KR" sz="1400" dirty="0" err="1"/>
+                  <a:t>nodegenerated</a:t>
+                </a:r>
+                <a:r>
+                  <a:rPr lang="en-US" altLang="ko-KR" sz="1400" dirty="0"/>
+                  <a:t> potential h-arc</a:t>
+                </a:r>
+                <a:r>
+                  <a:rPr lang="ko-KR" altLang="en-US" sz="1400" dirty="0"/>
+                  <a:t>가 존재 하기 때문에 </a:t>
+                </a:r>
+                <a14:m>
+                  <m:oMath xmlns:m="http://schemas.openxmlformats.org/officeDocument/2006/math">
+                    <m:sSup>
+                      <m:sSupPr>
+                        <m:ctrlPr>
+                          <a:rPr lang="en-US" altLang="ko-KR" sz="1400" b="0" i="1" smtClean="0">
+                            <a:latin typeface="Cambria Math" panose="02040503050406030204" pitchFamily="18" charset="0"/>
+                          </a:rPr>
+                        </m:ctrlPr>
+                      </m:sSupPr>
+                      <m:e>
+                        <m:r>
+                          <a:rPr lang="en-US" altLang="ko-KR" sz="1400" b="0" i="1" smtClean="0">
+                            <a:latin typeface="Cambria Math" panose="02040503050406030204" pitchFamily="18" charset="0"/>
+                          </a:rPr>
+                          <m:t>2</m:t>
+                        </m:r>
+                      </m:e>
+                      <m:sup>
+                        <m:r>
+                          <a:rPr lang="en-US" altLang="ko-KR" sz="1400" b="0" i="1" smtClean="0">
+                            <a:latin typeface="Cambria Math" panose="02040503050406030204" pitchFamily="18" charset="0"/>
+                          </a:rPr>
+                          <m:t>𝑛</m:t>
+                        </m:r>
+                        <m:r>
+                          <a:rPr lang="en-US" altLang="ko-KR" sz="1400" b="0" i="1" smtClean="0">
+                            <a:latin typeface="Cambria Math" panose="02040503050406030204" pitchFamily="18" charset="0"/>
+                          </a:rPr>
+                          <m:t>−3</m:t>
+                        </m:r>
+                      </m:sup>
+                    </m:sSup>
+                    <m:r>
+                      <a:rPr lang="ko-KR" altLang="en-US" sz="1400" i="1">
+                        <a:latin typeface="Cambria Math" panose="02040503050406030204" pitchFamily="18" charset="0"/>
+                      </a:rPr>
+                      <m:t>개</m:t>
+                    </m:r>
+                  </m:oMath>
+                </a14:m>
+                <a:r>
+                  <a:rPr lang="ko-KR" altLang="en-US" sz="1400" dirty="0"/>
+                  <a:t>의 분할이 존재하고 모든 분할을 </a:t>
+                </a:r>
+                <a:r>
+                  <a:rPr lang="en-US" altLang="ko-KR" sz="1400" dirty="0" err="1"/>
+                  <a:t>nondegenerated</a:t>
+                </a:r>
+                <a:r>
+                  <a:rPr lang="en-US" altLang="ko-KR" sz="1400" dirty="0"/>
+                  <a:t> potential h-arcs</a:t>
+                </a:r>
+                <a:r>
+                  <a:rPr lang="ko-KR" altLang="en-US" sz="1400" dirty="0"/>
+                  <a:t>의 수로 </a:t>
+                </a:r>
+                <a:r>
+                  <a:rPr lang="en-US" altLang="ko-KR" sz="1400" dirty="0"/>
+                  <a:t>n-2</a:t>
+                </a:r>
+                <a:r>
+                  <a:rPr lang="ko-KR" altLang="en-US" sz="1400" dirty="0"/>
+                  <a:t>개의 </a:t>
+                </a:r>
+                <a:r>
+                  <a:rPr lang="en-US" altLang="ko-KR" sz="1400" dirty="0"/>
+                  <a:t>class</a:t>
+                </a:r>
+                <a:r>
+                  <a:rPr lang="ko-KR" altLang="en-US" sz="1400" dirty="0"/>
+                  <a:t>로 나눌 수 있다</a:t>
+                </a:r>
+                <a:r>
+                  <a:rPr lang="en-US" altLang="ko-KR" sz="1400" dirty="0"/>
+                  <a:t>. </a:t>
+                </a:r>
+                <a14:m>
+                  <m:oMath xmlns:m="http://schemas.openxmlformats.org/officeDocument/2006/math">
+                    <m:r>
+                      <a:rPr lang="en-US" altLang="ko-KR" sz="1400" b="0" i="0" smtClean="0">
+                        <a:latin typeface="Cambria Math" panose="02040503050406030204" pitchFamily="18" charset="0"/>
+                      </a:rPr>
+                      <m:t>(</m:t>
+                    </m:r>
+                    <m:sSub>
+                      <m:sSubPr>
+                        <m:ctrlPr>
+                          <a:rPr lang="en-US" altLang="ko-KR" sz="1400" b="0" i="1" smtClean="0">
+                            <a:latin typeface="Cambria Math" panose="02040503050406030204" pitchFamily="18" charset="0"/>
+                          </a:rPr>
+                        </m:ctrlPr>
+                      </m:sSubPr>
+                      <m:e>
+                        <m:r>
+                          <a:rPr lang="en-US" altLang="ko-KR" sz="1400" b="0" i="1" smtClean="0">
+                            <a:latin typeface="Cambria Math" panose="02040503050406030204" pitchFamily="18" charset="0"/>
+                          </a:rPr>
+                          <m:t>𝐻</m:t>
+                        </m:r>
+                      </m:e>
+                      <m:sub>
+                        <m:r>
+                          <a:rPr lang="en-US" altLang="ko-KR" sz="1400" b="0" i="1" smtClean="0">
+                            <a:latin typeface="Cambria Math" panose="02040503050406030204" pitchFamily="18" charset="0"/>
+                          </a:rPr>
+                          <m:t>0</m:t>
+                        </m:r>
+                      </m:sub>
+                    </m:sSub>
+                    <m:r>
+                      <a:rPr lang="en-US" altLang="ko-KR" sz="1400" b="0" i="1" smtClean="0">
+                        <a:latin typeface="Cambria Math" panose="02040503050406030204" pitchFamily="18" charset="0"/>
+                      </a:rPr>
+                      <m:t>, </m:t>
+                    </m:r>
+                    <m:sSub>
+                      <m:sSubPr>
+                        <m:ctrlPr>
+                          <a:rPr lang="en-US" altLang="ko-KR" sz="1400" b="0" i="1" smtClean="0">
+                            <a:latin typeface="Cambria Math" panose="02040503050406030204" pitchFamily="18" charset="0"/>
+                          </a:rPr>
+                        </m:ctrlPr>
+                      </m:sSubPr>
+                      <m:e>
+                        <m:r>
+                          <a:rPr lang="en-US" altLang="ko-KR" sz="1400" b="0" i="1" smtClean="0">
+                            <a:latin typeface="Cambria Math" panose="02040503050406030204" pitchFamily="18" charset="0"/>
+                          </a:rPr>
+                          <m:t>𝐻</m:t>
+                        </m:r>
+                      </m:e>
+                      <m:sub>
+                        <m:r>
+                          <a:rPr lang="en-US" altLang="ko-KR" sz="1400" b="0" i="1" smtClean="0">
+                            <a:latin typeface="Cambria Math" panose="02040503050406030204" pitchFamily="18" charset="0"/>
+                          </a:rPr>
+                          <m:t>1</m:t>
+                        </m:r>
+                      </m:sub>
+                    </m:sSub>
+                    <m:r>
+                      <a:rPr lang="en-US" altLang="ko-KR" sz="1400" b="0" i="1" smtClean="0">
+                        <a:latin typeface="Cambria Math" panose="02040503050406030204" pitchFamily="18" charset="0"/>
+                      </a:rPr>
+                      <m:t>, …, </m:t>
+                    </m:r>
+                    <m:sSub>
+                      <m:sSubPr>
+                        <m:ctrlPr>
+                          <a:rPr lang="en-US" altLang="ko-KR" sz="1400" b="0" i="1" smtClean="0">
+                            <a:latin typeface="Cambria Math" panose="02040503050406030204" pitchFamily="18" charset="0"/>
+                          </a:rPr>
+                        </m:ctrlPr>
+                      </m:sSubPr>
+                      <m:e>
+                        <m:r>
+                          <a:rPr lang="en-US" altLang="ko-KR" sz="1400" b="0" i="1" smtClean="0">
+                            <a:latin typeface="Cambria Math" panose="02040503050406030204" pitchFamily="18" charset="0"/>
+                          </a:rPr>
+                          <m:t>𝐻</m:t>
+                        </m:r>
+                      </m:e>
+                      <m:sub>
+                        <m:r>
+                          <a:rPr lang="en-US" altLang="ko-KR" sz="1400" b="0" i="1" smtClean="0">
+                            <a:latin typeface="Cambria Math" panose="02040503050406030204" pitchFamily="18" charset="0"/>
+                          </a:rPr>
+                          <m:t>𝑛</m:t>
+                        </m:r>
+                        <m:r>
+                          <a:rPr lang="en-US" altLang="ko-KR" sz="1400" b="0" i="1" smtClean="0">
+                            <a:latin typeface="Cambria Math" panose="02040503050406030204" pitchFamily="18" charset="0"/>
+                          </a:rPr>
+                          <m:t>−3</m:t>
+                        </m:r>
+                      </m:sub>
+                    </m:sSub>
+                  </m:oMath>
+                </a14:m>
+                <a:r>
+                  <a:rPr lang="en-US" altLang="ko-KR" sz="1400" dirty="0"/>
+                  <a:t>) , </a:t>
+                </a:r>
+                <a14:m>
+                  <m:oMath xmlns:m="http://schemas.openxmlformats.org/officeDocument/2006/math">
+                    <m:r>
+                      <a:rPr lang="en-US" altLang="ko-KR" sz="1400" b="0" i="1" smtClean="0">
+                        <a:latin typeface="Cambria Math" panose="02040503050406030204" pitchFamily="18" charset="0"/>
+                      </a:rPr>
+                      <m:t>𝑐𝑙𝑎𝑠𝑠</m:t>
+                    </m:r>
+                    <m:r>
+                      <a:rPr lang="en-US" altLang="ko-KR" sz="1400" b="0" i="1" smtClean="0">
+                        <a:latin typeface="Cambria Math" panose="02040503050406030204" pitchFamily="18" charset="0"/>
+                      </a:rPr>
+                      <m:t> </m:t>
+                    </m:r>
+                    <m:sSub>
+                      <m:sSubPr>
+                        <m:ctrlPr>
+                          <a:rPr lang="en-US" altLang="ko-KR" sz="1400" b="0" i="1" smtClean="0">
+                            <a:latin typeface="Cambria Math" panose="02040503050406030204" pitchFamily="18" charset="0"/>
+                          </a:rPr>
+                        </m:ctrlPr>
+                      </m:sSubPr>
+                      <m:e>
+                        <m:r>
+                          <a:rPr lang="en-US" altLang="ko-KR" sz="1400" b="0" i="1" smtClean="0">
+                            <a:latin typeface="Cambria Math" panose="02040503050406030204" pitchFamily="18" charset="0"/>
+                          </a:rPr>
+                          <m:t>𝐻</m:t>
+                        </m:r>
+                      </m:e>
+                      <m:sub>
+                        <m:r>
+                          <a:rPr lang="en-US" altLang="ko-KR" sz="1400" b="0" i="1" smtClean="0">
+                            <a:latin typeface="Cambria Math" panose="02040503050406030204" pitchFamily="18" charset="0"/>
+                          </a:rPr>
+                          <m:t>0</m:t>
+                        </m:r>
+                      </m:sub>
+                    </m:sSub>
+                    <m:r>
+                      <a:rPr lang="en-US" altLang="ko-KR" sz="1400" b="0" i="1" smtClean="0">
+                        <a:latin typeface="Cambria Math" panose="02040503050406030204" pitchFamily="18" charset="0"/>
+                      </a:rPr>
+                      <m:t> </m:t>
+                    </m:r>
+                    <m:r>
+                      <a:rPr lang="ko-KR" altLang="en-US" sz="1400" i="1">
+                        <a:latin typeface="Cambria Math" panose="02040503050406030204" pitchFamily="18" charset="0"/>
+                      </a:rPr>
+                      <m:t>에</m:t>
+                    </m:r>
+                  </m:oMath>
+                </a14:m>
+                <a:r>
+                  <a:rPr lang="ko-KR" altLang="en-US" sz="1400" dirty="0"/>
+                  <a:t>는 </a:t>
+                </a:r>
+                <a:r>
+                  <a:rPr lang="en-US" altLang="ko-KR" sz="1400" dirty="0"/>
+                  <a:t>potential h-arc</a:t>
+                </a:r>
+                <a:r>
+                  <a:rPr lang="ko-KR" altLang="en-US" sz="1400" dirty="0"/>
+                  <a:t>가 없다</a:t>
+                </a:r>
+                <a:r>
+                  <a:rPr lang="en-US" altLang="ko-KR" sz="1400" dirty="0"/>
+                  <a:t>. </a:t>
+                </a:r>
+                <a:r>
+                  <a:rPr lang="ko-KR" altLang="en-US" sz="1400" dirty="0"/>
+                  <a:t>그러므로</a:t>
+                </a:r>
+                <a:br>
+                  <a:rPr lang="en-US" altLang="ko-KR" sz="1400" dirty="0"/>
+                </a:br>
+                <a:r>
+                  <a:rPr lang="en-US" altLang="ko-KR" sz="1400" dirty="0"/>
+                  <a:t>fan</a:t>
+                </a:r>
+                <a:r>
+                  <a:rPr lang="ko-KR" altLang="en-US" sz="1400" dirty="0"/>
+                  <a:t>으로 불리는 분할이 된다</a:t>
+                </a:r>
+                <a:r>
+                  <a:rPr lang="en-US" altLang="ko-KR" sz="1400" dirty="0"/>
+                  <a:t>. </a:t>
+                </a:r>
+                <a14:m>
+                  <m:oMath xmlns:m="http://schemas.openxmlformats.org/officeDocument/2006/math">
+                    <m:r>
+                      <a:rPr lang="en-US" altLang="ko-KR" sz="1400" b="0" i="1" smtClean="0">
+                        <a:latin typeface="Cambria Math" panose="02040503050406030204" pitchFamily="18" charset="0"/>
+                      </a:rPr>
+                      <m:t>𝐹𝑎𝑛</m:t>
+                    </m:r>
+                    <m:r>
+                      <a:rPr lang="en-US" altLang="ko-KR" sz="1400" b="0" i="1" smtClean="0">
+                        <a:latin typeface="Cambria Math" panose="02040503050406030204" pitchFamily="18" charset="0"/>
+                      </a:rPr>
+                      <m:t>(</m:t>
+                    </m:r>
+                    <m:sSub>
+                      <m:sSubPr>
+                        <m:ctrlPr>
+                          <a:rPr lang="en-US" altLang="ko-KR" sz="1400" b="0" i="1" smtClean="0">
+                            <a:latin typeface="Cambria Math" panose="02040503050406030204" pitchFamily="18" charset="0"/>
+                          </a:rPr>
+                        </m:ctrlPr>
+                      </m:sSubPr>
+                      <m:e>
+                        <m:r>
+                          <a:rPr lang="en-US" altLang="ko-KR" sz="1400" b="0" i="1" smtClean="0">
+                            <a:latin typeface="Cambria Math" panose="02040503050406030204" pitchFamily="18" charset="0"/>
+                          </a:rPr>
+                          <m:t>𝑤</m:t>
+                        </m:r>
+                      </m:e>
+                      <m:sub>
+                        <m:r>
+                          <a:rPr lang="en-US" altLang="ko-KR" sz="1400" b="0" i="1" smtClean="0">
+                            <a:latin typeface="Cambria Math" panose="02040503050406030204" pitchFamily="18" charset="0"/>
+                          </a:rPr>
+                          <m:t>1</m:t>
+                        </m:r>
+                      </m:sub>
+                    </m:sSub>
+                    <m:r>
+                      <a:rPr lang="en-US" altLang="ko-KR" sz="1400" b="0" i="1" smtClean="0">
+                        <a:latin typeface="Cambria Math" panose="02040503050406030204" pitchFamily="18" charset="0"/>
+                      </a:rPr>
+                      <m:t>|</m:t>
+                    </m:r>
+                    <m:sSub>
+                      <m:sSubPr>
+                        <m:ctrlPr>
+                          <a:rPr lang="en-US" altLang="ko-KR" sz="1400" b="0" i="1" smtClean="0">
+                            <a:latin typeface="Cambria Math" panose="02040503050406030204" pitchFamily="18" charset="0"/>
+                          </a:rPr>
+                        </m:ctrlPr>
+                      </m:sSubPr>
+                      <m:e>
+                        <m:r>
+                          <a:rPr lang="en-US" altLang="ko-KR" sz="1400" b="0" i="1" smtClean="0">
+                            <a:latin typeface="Cambria Math" panose="02040503050406030204" pitchFamily="18" charset="0"/>
+                          </a:rPr>
+                          <m:t>𝑤</m:t>
+                        </m:r>
+                      </m:e>
+                      <m:sub>
+                        <m:r>
+                          <a:rPr lang="en-US" altLang="ko-KR" sz="1400" b="0" i="1" smtClean="0">
+                            <a:latin typeface="Cambria Math" panose="02040503050406030204" pitchFamily="18" charset="0"/>
+                          </a:rPr>
+                          <m:t>2</m:t>
+                        </m:r>
+                      </m:sub>
+                    </m:sSub>
+                    <m:r>
+                      <a:rPr lang="en-US" altLang="ko-KR" sz="1400" b="0" i="1" smtClean="0">
+                        <a:latin typeface="Cambria Math" panose="02040503050406030204" pitchFamily="18" charset="0"/>
+                      </a:rPr>
+                      <m:t>, …, </m:t>
+                    </m:r>
+                    <m:sSub>
+                      <m:sSubPr>
+                        <m:ctrlPr>
+                          <a:rPr lang="en-US" altLang="ko-KR" sz="1400" b="0" i="1" smtClean="0">
+                            <a:latin typeface="Cambria Math" panose="02040503050406030204" pitchFamily="18" charset="0"/>
+                          </a:rPr>
+                        </m:ctrlPr>
+                      </m:sSubPr>
+                      <m:e>
+                        <m:r>
+                          <a:rPr lang="en-US" altLang="ko-KR" sz="1400" b="0" i="1" smtClean="0">
+                            <a:latin typeface="Cambria Math" panose="02040503050406030204" pitchFamily="18" charset="0"/>
+                          </a:rPr>
+                          <m:t>𝑤</m:t>
+                        </m:r>
+                      </m:e>
+                      <m:sub>
+                        <m:r>
+                          <a:rPr lang="en-US" altLang="ko-KR" sz="1400" b="0" i="1" smtClean="0">
+                            <a:latin typeface="Cambria Math" panose="02040503050406030204" pitchFamily="18" charset="0"/>
+                          </a:rPr>
+                          <m:t>3</m:t>
+                        </m:r>
+                      </m:sub>
+                    </m:sSub>
+                    <m:r>
+                      <a:rPr lang="en-US" altLang="ko-KR" sz="1400" b="0" i="1" smtClean="0">
+                        <a:latin typeface="Cambria Math" panose="02040503050406030204" pitchFamily="18" charset="0"/>
+                      </a:rPr>
+                      <m:t>)</m:t>
+                    </m:r>
+                  </m:oMath>
+                </a14:m>
                 <a:endParaRPr lang="en-US" altLang="ko-KR" sz="1400" dirty="0"/>
+              </a:p>
+              <a:p>
+                <a:pPr marL="742950" lvl="1" indent="-285750">
+                  <a:lnSpc>
+                    <a:spcPct val="150000"/>
+                  </a:lnSpc>
+                  <a:buFont typeface="맑은 고딕" panose="020B0503020000020004" pitchFamily="50" charset="-127"/>
+                  <a:buChar char="-"/>
+                </a:pPr>
+                <a14:m>
+                  <m:oMath xmlns:m="http://schemas.openxmlformats.org/officeDocument/2006/math">
+                    <m:sSub>
+                      <m:sSubPr>
+                        <m:ctrlPr>
+                          <a:rPr lang="en-US" altLang="ko-KR" sz="1400" b="0" i="1" smtClean="0">
+                            <a:latin typeface="Cambria Math" panose="02040503050406030204" pitchFamily="18" charset="0"/>
+                          </a:rPr>
+                        </m:ctrlPr>
+                      </m:sSubPr>
+                      <m:e>
+                        <m:r>
+                          <a:rPr lang="en-US" altLang="ko-KR" sz="1400" b="0" i="1" smtClean="0">
+                            <a:latin typeface="Cambria Math" panose="02040503050406030204" pitchFamily="18" charset="0"/>
+                          </a:rPr>
+                          <m:t>𝐻</m:t>
+                        </m:r>
+                      </m:e>
+                      <m:sub>
+                        <m:r>
+                          <a:rPr lang="en-US" altLang="ko-KR" sz="1400" b="0" i="1" smtClean="0">
+                            <a:latin typeface="Cambria Math" panose="02040503050406030204" pitchFamily="18" charset="0"/>
+                          </a:rPr>
+                          <m:t>1</m:t>
+                        </m:r>
+                      </m:sub>
+                    </m:sSub>
+                    <m:r>
+                      <a:rPr lang="en-US" altLang="ko-KR" sz="1400" b="0" i="1" smtClean="0">
+                        <a:latin typeface="Cambria Math" panose="02040503050406030204" pitchFamily="18" charset="0"/>
+                      </a:rPr>
+                      <m:t> </m:t>
+                    </m:r>
+                    <m:r>
+                      <a:rPr lang="en-US" altLang="ko-KR" sz="1400" b="0" i="1" smtClean="0">
+                        <a:latin typeface="Cambria Math" panose="02040503050406030204" pitchFamily="18" charset="0"/>
+                      </a:rPr>
+                      <m:t>𝑐𝑙𝑎𝑠𝑠</m:t>
+                    </m:r>
+                    <m:r>
+                      <a:rPr lang="ko-KR" altLang="en-US" sz="1400" i="1">
+                        <a:latin typeface="Cambria Math" panose="02040503050406030204" pitchFamily="18" charset="0"/>
+                      </a:rPr>
+                      <m:t>에</m:t>
+                    </m:r>
+                  </m:oMath>
+                </a14:m>
+                <a:r>
+                  <a:rPr lang="ko-KR" altLang="en-US" sz="1400" dirty="0"/>
+                  <a:t>는 각 분할에 </a:t>
+                </a:r>
+                <a:r>
+                  <a:rPr lang="en-US" altLang="ko-KR" sz="1400" dirty="0"/>
+                  <a:t>1</a:t>
+                </a:r>
+                <a:r>
+                  <a:rPr lang="ko-KR" altLang="en-US" sz="1400" dirty="0"/>
+                  <a:t>개의 </a:t>
+                </a:r>
+                <a:r>
+                  <a:rPr lang="en-US" altLang="ko-KR" sz="1400" dirty="0" err="1"/>
+                  <a:t>nondegenerated</a:t>
+                </a:r>
+                <a:r>
+                  <a:rPr lang="en-US" altLang="ko-KR" sz="1400" dirty="0"/>
+                  <a:t> potential h-arc</a:t>
+                </a:r>
+                <a:r>
+                  <a:rPr lang="ko-KR" altLang="en-US" sz="1400" dirty="0"/>
+                  <a:t>가 포함된다</a:t>
+                </a:r>
+                <a:r>
+                  <a:rPr lang="en-US" altLang="ko-KR" sz="1400" dirty="0"/>
+                  <a:t>. </a:t>
+                </a:r>
+                <a:r>
+                  <a:rPr lang="ko-KR" altLang="en-US" sz="1400" dirty="0"/>
+                  <a:t>하나의 </a:t>
+                </a:r>
+                <a:r>
+                  <a:rPr lang="en-US" altLang="ko-KR" sz="1400" dirty="0"/>
+                  <a:t>potential h-arc</a:t>
+                </a:r>
+                <a:r>
+                  <a:rPr lang="ko-KR" altLang="en-US" sz="1400" dirty="0"/>
+                  <a:t>가 발견되면 나머지 </a:t>
+                </a:r>
+                <a:r>
+                  <a:rPr lang="en-US" altLang="ko-KR" sz="1400" dirty="0"/>
+                  <a:t>arc</a:t>
+                </a:r>
+                <a:r>
+                  <a:rPr lang="ko-KR" altLang="en-US" sz="1400" dirty="0"/>
+                  <a:t>는 </a:t>
+                </a:r>
+                <a:r>
+                  <a:rPr lang="en-US" altLang="ko-KR" sz="1400" dirty="0"/>
+                  <a:t>vertical arc</a:t>
+                </a:r>
+                <a:r>
+                  <a:rPr lang="ko-KR" altLang="en-US" sz="1400" dirty="0"/>
+                  <a:t>로 이루어진 </a:t>
+                </a:r>
+                <a:r>
+                  <a:rPr lang="en-US" altLang="ko-KR" sz="1400" dirty="0"/>
+                  <a:t>2</a:t>
+                </a:r>
+                <a:r>
+                  <a:rPr lang="ko-KR" altLang="en-US" sz="1400" dirty="0"/>
+                  <a:t>개의 </a:t>
+                </a:r>
+                <a:r>
+                  <a:rPr lang="en-US" altLang="ko-KR" sz="1400" dirty="0"/>
+                  <a:t>fan</a:t>
+                </a:r>
+                <a:r>
+                  <a:rPr lang="ko-KR" altLang="en-US" sz="1400" dirty="0"/>
+                  <a:t>이 된다</a:t>
+                </a:r>
+                <a:endParaRPr lang="en-US" altLang="ko-KR" sz="1400" dirty="0"/>
+              </a:p>
+              <a:p>
+                <a:pPr marL="742950" lvl="1" indent="-285750">
+                  <a:lnSpc>
+                    <a:spcPct val="150000"/>
+                  </a:lnSpc>
+                  <a:buFont typeface="맑은 고딕" panose="020B0503020000020004" pitchFamily="50" charset="-127"/>
+                  <a:buChar char="-"/>
+                </a:pPr>
+                <a:r>
+                  <a:rPr lang="en-US" altLang="ko-KR" sz="1400" dirty="0"/>
+                  <a:t>Fig 3 </a:t>
+                </a:r>
+                <a:r>
+                  <a:rPr lang="ko-KR" altLang="en-US" sz="1400" dirty="0"/>
+                  <a:t>에 </a:t>
+                </a:r>
+                <a:r>
+                  <a:rPr lang="en-US" altLang="ko-KR" sz="1400" dirty="0"/>
+                  <a:t>monotone basic polygon</a:t>
+                </a:r>
+                <a:r>
+                  <a:rPr lang="ko-KR" altLang="en-US" sz="1400" dirty="0"/>
+                  <a:t>의 </a:t>
+                </a:r>
+                <a:r>
+                  <a:rPr lang="en-US" altLang="ko-KR" sz="1400" dirty="0"/>
+                  <a:t>2</a:t>
+                </a:r>
+                <a:r>
+                  <a:rPr lang="ko-KR" altLang="en-US" sz="1400" dirty="0"/>
+                  <a:t>가지 분할 유형을 보여준다</a:t>
+                </a:r>
+                <a:r>
+                  <a:rPr lang="en-US" altLang="ko-KR" sz="1400" dirty="0"/>
+                  <a:t>.</a:t>
+                </a:r>
+              </a:p>
+              <a:p>
+                <a:pPr marL="742950" lvl="1" indent="-285750">
+                  <a:lnSpc>
+                    <a:spcPct val="150000"/>
+                  </a:lnSpc>
+                  <a:buFont typeface="맑은 고딕" panose="020B0503020000020004" pitchFamily="50" charset="-127"/>
+                  <a:buChar char="-"/>
+                </a:pPr>
+                <a:r>
+                  <a:rPr lang="en-US" altLang="ko-KR" sz="1400" dirty="0"/>
+                  <a:t>fig 3a</a:t>
+                </a:r>
+                <a:r>
+                  <a:rPr lang="ko-KR" altLang="en-US" sz="1400" dirty="0"/>
+                  <a:t>는 </a:t>
+                </a:r>
+                <a:r>
+                  <a:rPr lang="en-US" altLang="ko-KR" sz="1400" dirty="0" err="1"/>
+                  <a:t>nondegenerated</a:t>
+                </a:r>
+                <a:r>
+                  <a:rPr lang="en-US" altLang="ko-KR" sz="1400" dirty="0"/>
+                  <a:t> potential h-arc</a:t>
+                </a:r>
+                <a:r>
+                  <a:rPr lang="ko-KR" altLang="en-US" sz="1400" dirty="0"/>
+                  <a:t>인 </a:t>
+                </a:r>
+                <a14:m>
+                  <m:oMath xmlns:m="http://schemas.openxmlformats.org/officeDocument/2006/math">
+                    <m:sSub>
+                      <m:sSubPr>
+                        <m:ctrlPr>
+                          <a:rPr lang="en-US" altLang="ko-KR" sz="1400" b="0" i="1" smtClean="0">
+                            <a:latin typeface="Cambria Math" panose="02040503050406030204" pitchFamily="18" charset="0"/>
+                          </a:rPr>
+                        </m:ctrlPr>
+                      </m:sSubPr>
+                      <m:e>
+                        <m:r>
+                          <a:rPr lang="en-US" altLang="ko-KR" sz="1400" b="0" i="1" smtClean="0">
+                            <a:latin typeface="Cambria Math" panose="02040503050406030204" pitchFamily="18" charset="0"/>
+                          </a:rPr>
+                          <m:t>𝑉</m:t>
+                        </m:r>
+                      </m:e>
+                      <m:sub>
+                        <m:r>
+                          <a:rPr lang="en-US" altLang="ko-KR" sz="1400" b="0" i="1" smtClean="0">
+                            <a:latin typeface="Cambria Math" panose="02040503050406030204" pitchFamily="18" charset="0"/>
+                          </a:rPr>
+                          <m:t>𝑐</m:t>
+                        </m:r>
+                      </m:sub>
+                    </m:sSub>
+                    <m:r>
+                      <a:rPr lang="en-US" altLang="ko-KR" sz="1400" b="0" i="1" smtClean="0">
+                        <a:latin typeface="Cambria Math" panose="02040503050406030204" pitchFamily="18" charset="0"/>
+                      </a:rPr>
+                      <m:t>−</m:t>
+                    </m:r>
+                    <m:sSub>
+                      <m:sSubPr>
+                        <m:ctrlPr>
+                          <a:rPr lang="en-US" altLang="ko-KR" sz="1400" b="0" i="1" smtClean="0">
+                            <a:latin typeface="Cambria Math" panose="02040503050406030204" pitchFamily="18" charset="0"/>
+                          </a:rPr>
+                        </m:ctrlPr>
+                      </m:sSubPr>
+                      <m:e>
+                        <m:r>
+                          <a:rPr lang="en-US" altLang="ko-KR" sz="1400" b="0" i="1" smtClean="0">
+                            <a:latin typeface="Cambria Math" panose="02040503050406030204" pitchFamily="18" charset="0"/>
+                          </a:rPr>
+                          <m:t>𝑉</m:t>
+                        </m:r>
+                      </m:e>
+                      <m:sub>
+                        <m:r>
+                          <a:rPr lang="en-US" altLang="ko-KR" sz="1400" b="0" i="1" smtClean="0">
+                            <a:latin typeface="Cambria Math" panose="02040503050406030204" pitchFamily="18" charset="0"/>
+                          </a:rPr>
+                          <m:t>𝑖</m:t>
+                        </m:r>
+                      </m:sub>
+                    </m:sSub>
+                    <m:d>
+                      <m:dPr>
+                        <m:ctrlPr>
+                          <a:rPr lang="en-US" altLang="ko-KR" sz="1400" b="0" i="1" smtClean="0">
+                            <a:latin typeface="Cambria Math" panose="02040503050406030204" pitchFamily="18" charset="0"/>
+                          </a:rPr>
+                        </m:ctrlPr>
+                      </m:dPr>
+                      <m:e>
+                        <m:sSub>
+                          <m:sSubPr>
+                            <m:ctrlPr>
+                              <a:rPr lang="en-US" altLang="ko-KR" sz="1400" b="0" i="1" smtClean="0">
+                                <a:latin typeface="Cambria Math" panose="02040503050406030204" pitchFamily="18" charset="0"/>
+                              </a:rPr>
+                            </m:ctrlPr>
+                          </m:sSubPr>
+                          <m:e>
+                            <m:r>
+                              <a:rPr lang="en-US" altLang="ko-KR" sz="1400" b="0" i="1" smtClean="0">
+                                <a:latin typeface="Cambria Math" panose="02040503050406030204" pitchFamily="18" charset="0"/>
+                              </a:rPr>
+                              <m:t>𝑉</m:t>
+                            </m:r>
+                          </m:e>
+                          <m:sub>
+                            <m:r>
+                              <a:rPr lang="en-US" altLang="ko-KR" sz="1400" b="0" i="1" smtClean="0">
+                                <a:latin typeface="Cambria Math" panose="02040503050406030204" pitchFamily="18" charset="0"/>
+                              </a:rPr>
+                              <m:t>𝑐</m:t>
+                            </m:r>
+                          </m:sub>
+                        </m:sSub>
+                        <m:r>
+                          <a:rPr lang="en-US" altLang="ko-KR" sz="1400" b="0" i="1" smtClean="0">
+                            <a:latin typeface="Cambria Math" panose="02040503050406030204" pitchFamily="18" charset="0"/>
+                          </a:rPr>
+                          <m:t>&lt;</m:t>
+                        </m:r>
+                        <m:sSub>
+                          <m:sSubPr>
+                            <m:ctrlPr>
+                              <a:rPr lang="en-US" altLang="ko-KR" sz="1400" b="0" i="1" smtClean="0">
+                                <a:latin typeface="Cambria Math" panose="02040503050406030204" pitchFamily="18" charset="0"/>
+                              </a:rPr>
+                            </m:ctrlPr>
+                          </m:sSubPr>
+                          <m:e>
+                            <m:r>
+                              <a:rPr lang="en-US" altLang="ko-KR" sz="1400" b="0" i="1" smtClean="0">
+                                <a:latin typeface="Cambria Math" panose="02040503050406030204" pitchFamily="18" charset="0"/>
+                              </a:rPr>
+                              <m:t>𝑉</m:t>
+                            </m:r>
+                          </m:e>
+                          <m:sub>
+                            <m:r>
+                              <a:rPr lang="en-US" altLang="ko-KR" sz="1400" b="0" i="1" smtClean="0">
+                                <a:latin typeface="Cambria Math" panose="02040503050406030204" pitchFamily="18" charset="0"/>
+                              </a:rPr>
+                              <m:t>𝑖</m:t>
+                            </m:r>
+                          </m:sub>
+                        </m:sSub>
+                      </m:e>
+                    </m:d>
+                    <m:r>
+                      <a:rPr lang="en-US" altLang="ko-KR" sz="1400" b="0" i="1" smtClean="0">
+                        <a:latin typeface="Cambria Math" panose="02040503050406030204" pitchFamily="18" charset="0"/>
+                      </a:rPr>
+                      <m:t> </m:t>
+                    </m:r>
+                  </m:oMath>
+                </a14:m>
+                <a:r>
+                  <a:rPr lang="en-US" altLang="ko-KR" sz="1400" dirty="0"/>
+                  <a:t>1</a:t>
+                </a:r>
+                <a:r>
+                  <a:rPr lang="ko-KR" altLang="en-US" sz="1400" dirty="0"/>
+                  <a:t>개 있다</a:t>
+                </a:r>
+                <a:r>
+                  <a:rPr lang="en-US" altLang="ko-KR" sz="1400" dirty="0"/>
+                  <a:t>.</a:t>
+                </a:r>
+                <a:br>
+                  <a:rPr lang="en-US" altLang="ko-KR" sz="1400" dirty="0"/>
+                </a:br>
+                <a:r>
+                  <a:rPr lang="en-US" altLang="ko-KR" sz="1400" dirty="0"/>
+                  <a:t>upper </a:t>
+                </a:r>
+                <a:r>
+                  <a:rPr lang="en-US" altLang="ko-KR" sz="1400" dirty="0" err="1"/>
+                  <a:t>subpoly</a:t>
+                </a:r>
+                <a:r>
+                  <a:rPr lang="ko-KR" altLang="en-US" sz="1400" dirty="0"/>
+                  <a:t>의 </a:t>
+                </a:r>
+                <a:r>
+                  <a:rPr lang="en-US" altLang="ko-KR" sz="1400" dirty="0"/>
+                  <a:t>fan</a:t>
+                </a:r>
+                <a:r>
+                  <a:rPr lang="ko-KR" altLang="en-US" sz="1400" dirty="0"/>
+                  <a:t>은  </a:t>
+                </a:r>
+                <a14:m>
+                  <m:oMath xmlns:m="http://schemas.openxmlformats.org/officeDocument/2006/math">
+                    <m:r>
+                      <a:rPr lang="en-US" altLang="ko-KR" sz="1400" b="0" i="1" smtClean="0">
+                        <a:latin typeface="Cambria Math" panose="02040503050406030204" pitchFamily="18" charset="0"/>
+                      </a:rPr>
+                      <m:t>𝐹𝑎𝑛</m:t>
+                    </m:r>
+                    <m:d>
+                      <m:dPr>
+                        <m:ctrlPr>
+                          <a:rPr lang="en-US" altLang="ko-KR" sz="1400" b="0" i="1" smtClean="0">
+                            <a:latin typeface="Cambria Math" panose="02040503050406030204" pitchFamily="18" charset="0"/>
+                          </a:rPr>
+                        </m:ctrlPr>
+                      </m:dPr>
+                      <m:e>
+                        <m:sSub>
+                          <m:sSubPr>
+                            <m:ctrlPr>
+                              <a:rPr lang="en-US" altLang="ko-KR" sz="1400" b="0" i="1" smtClean="0">
+                                <a:latin typeface="Cambria Math" panose="02040503050406030204" pitchFamily="18" charset="0"/>
+                              </a:rPr>
+                            </m:ctrlPr>
+                          </m:sSubPr>
+                          <m:e>
+                            <m:r>
+                              <a:rPr lang="en-US" altLang="ko-KR" sz="1400" b="0" i="1" smtClean="0">
+                                <a:latin typeface="Cambria Math" panose="02040503050406030204" pitchFamily="18" charset="0"/>
+                              </a:rPr>
+                              <m:t>𝑤</m:t>
+                            </m:r>
+                          </m:e>
+                          <m:sub>
+                            <m:r>
+                              <a:rPr lang="en-US" altLang="ko-KR" sz="1400" b="0" i="1" smtClean="0">
+                                <a:latin typeface="Cambria Math" panose="02040503050406030204" pitchFamily="18" charset="0"/>
+                              </a:rPr>
+                              <m:t>𝑐</m:t>
+                            </m:r>
+                          </m:sub>
+                        </m:sSub>
+                      </m:e>
+                      <m:e>
+                        <m:sSub>
+                          <m:sSubPr>
+                            <m:ctrlPr>
+                              <a:rPr lang="en-US" altLang="ko-KR" sz="1400" b="0" i="1" smtClean="0">
+                                <a:latin typeface="Cambria Math" panose="02040503050406030204" pitchFamily="18" charset="0"/>
+                              </a:rPr>
+                            </m:ctrlPr>
+                          </m:sSubPr>
+                          <m:e>
+                            <m:r>
+                              <a:rPr lang="en-US" altLang="ko-KR" sz="1400" b="0" i="1" smtClean="0">
+                                <a:latin typeface="Cambria Math" panose="02040503050406030204" pitchFamily="18" charset="0"/>
+                              </a:rPr>
+                              <m:t>𝑤</m:t>
+                            </m:r>
+                          </m:e>
+                          <m:sub>
+                            <m:r>
+                              <a:rPr lang="en-US" altLang="ko-KR" sz="1400" b="0" i="1" smtClean="0">
+                                <a:latin typeface="Cambria Math" panose="02040503050406030204" pitchFamily="18" charset="0"/>
+                              </a:rPr>
+                              <m:t>𝑑</m:t>
+                            </m:r>
+                          </m:sub>
+                        </m:sSub>
+                        <m:r>
+                          <a:rPr lang="en-US" altLang="ko-KR" sz="1400" b="0" i="1" smtClean="0">
+                            <a:latin typeface="Cambria Math" panose="02040503050406030204" pitchFamily="18" charset="0"/>
+                          </a:rPr>
+                          <m:t>,…,</m:t>
+                        </m:r>
+                        <m:sSub>
+                          <m:sSubPr>
+                            <m:ctrlPr>
+                              <a:rPr lang="en-US" altLang="ko-KR" sz="1400" b="0" i="1" smtClean="0">
+                                <a:latin typeface="Cambria Math" panose="02040503050406030204" pitchFamily="18" charset="0"/>
+                              </a:rPr>
+                            </m:ctrlPr>
+                          </m:sSubPr>
+                          <m:e>
+                            <m:r>
+                              <a:rPr lang="en-US" altLang="ko-KR" sz="1400" b="0" i="1" smtClean="0">
+                                <a:latin typeface="Cambria Math" panose="02040503050406030204" pitchFamily="18" charset="0"/>
+                              </a:rPr>
+                              <m:t>𝑤</m:t>
+                            </m:r>
+                          </m:e>
+                          <m:sub>
+                            <m:r>
+                              <a:rPr lang="en-US" altLang="ko-KR" sz="1400" b="0" i="1" smtClean="0">
+                                <a:latin typeface="Cambria Math" panose="02040503050406030204" pitchFamily="18" charset="0"/>
+                              </a:rPr>
+                              <m:t>𝑖</m:t>
+                            </m:r>
+                          </m:sub>
+                        </m:sSub>
+                      </m:e>
+                    </m:d>
+                    <m:r>
+                      <a:rPr lang="ko-KR" altLang="en-US" sz="1400" i="1">
+                        <a:latin typeface="Cambria Math" panose="02040503050406030204" pitchFamily="18" charset="0"/>
+                      </a:rPr>
+                      <m:t>이</m:t>
+                    </m:r>
+                  </m:oMath>
+                </a14:m>
+                <a:r>
+                  <a:rPr lang="ko-KR" altLang="en-US" sz="1400" dirty="0"/>
+                  <a:t>고 </a:t>
+                </a:r>
+                <a:br>
+                  <a:rPr lang="en-US" altLang="ko-KR" sz="1400" dirty="0"/>
+                </a:br>
+                <a:r>
+                  <a:rPr lang="en-US" altLang="ko-KR" sz="1400" dirty="0"/>
+                  <a:t>lower </a:t>
+                </a:r>
+                <a:r>
+                  <a:rPr lang="en-US" altLang="ko-KR" sz="1400" dirty="0" err="1"/>
+                  <a:t>subpoly</a:t>
+                </a:r>
+                <a:r>
+                  <a:rPr lang="ko-KR" altLang="en-US" sz="1400" dirty="0"/>
+                  <a:t>의 </a:t>
+                </a:r>
+                <a:r>
+                  <a:rPr lang="en-US" altLang="ko-KR" sz="1400" dirty="0"/>
+                  <a:t>fan</a:t>
+                </a:r>
+                <a:r>
+                  <a:rPr lang="ko-KR" altLang="en-US" sz="1400" dirty="0"/>
+                  <a:t>은 </a:t>
+                </a:r>
+                <a14:m>
+                  <m:oMath xmlns:m="http://schemas.openxmlformats.org/officeDocument/2006/math">
+                    <m:r>
+                      <a:rPr lang="en-US" altLang="ko-KR" sz="1400" b="0" i="1" smtClean="0">
+                        <a:latin typeface="Cambria Math" panose="02040503050406030204" pitchFamily="18" charset="0"/>
+                      </a:rPr>
+                      <m:t>𝐹𝑎𝑛</m:t>
+                    </m:r>
+                    <m:r>
+                      <a:rPr lang="en-US" altLang="ko-KR" sz="1400" b="0" i="1" smtClean="0">
+                        <a:latin typeface="Cambria Math" panose="02040503050406030204" pitchFamily="18" charset="0"/>
+                      </a:rPr>
+                      <m:t>(</m:t>
+                    </m:r>
+                    <m:sSub>
+                      <m:sSubPr>
+                        <m:ctrlPr>
+                          <a:rPr lang="en-US" altLang="ko-KR" sz="1400" b="0" i="1" smtClean="0">
+                            <a:latin typeface="Cambria Math" panose="02040503050406030204" pitchFamily="18" charset="0"/>
+                          </a:rPr>
+                        </m:ctrlPr>
+                      </m:sSubPr>
+                      <m:e>
+                        <m:r>
+                          <a:rPr lang="en-US" altLang="ko-KR" sz="1400" b="0" i="1" smtClean="0">
+                            <a:latin typeface="Cambria Math" panose="02040503050406030204" pitchFamily="18" charset="0"/>
+                          </a:rPr>
+                          <m:t>𝑤</m:t>
+                        </m:r>
+                      </m:e>
+                      <m:sub>
+                        <m:r>
+                          <a:rPr lang="en-US" altLang="ko-KR" sz="1400" b="0" i="1" smtClean="0">
+                            <a:latin typeface="Cambria Math" panose="02040503050406030204" pitchFamily="18" charset="0"/>
+                          </a:rPr>
+                          <m:t>1</m:t>
+                        </m:r>
+                      </m:sub>
+                    </m:sSub>
+                    <m:r>
+                      <a:rPr lang="en-US" altLang="ko-KR" sz="1400" b="0" i="1" smtClean="0">
+                        <a:latin typeface="Cambria Math" panose="02040503050406030204" pitchFamily="18" charset="0"/>
+                      </a:rPr>
+                      <m:t>|</m:t>
+                    </m:r>
+                    <m:sSub>
+                      <m:sSubPr>
+                        <m:ctrlPr>
+                          <a:rPr lang="en-US" altLang="ko-KR" sz="1400" b="0" i="1" smtClean="0">
+                            <a:latin typeface="Cambria Math" panose="02040503050406030204" pitchFamily="18" charset="0"/>
+                          </a:rPr>
+                        </m:ctrlPr>
+                      </m:sSubPr>
+                      <m:e>
+                        <m:r>
+                          <a:rPr lang="en-US" altLang="ko-KR" sz="1400" b="0" i="1" smtClean="0">
+                            <a:latin typeface="Cambria Math" panose="02040503050406030204" pitchFamily="18" charset="0"/>
+                          </a:rPr>
+                          <m:t>𝑤</m:t>
+                        </m:r>
+                      </m:e>
+                      <m:sub>
+                        <m:r>
+                          <a:rPr lang="en-US" altLang="ko-KR" sz="1400" b="0" i="1" smtClean="0">
+                            <a:latin typeface="Cambria Math" panose="02040503050406030204" pitchFamily="18" charset="0"/>
+                          </a:rPr>
+                          <m:t>2</m:t>
+                        </m:r>
+                      </m:sub>
+                    </m:sSub>
+                    <m:r>
+                      <a:rPr lang="en-US" altLang="ko-KR" sz="1400" b="0" i="1" smtClean="0">
+                        <a:latin typeface="Cambria Math" panose="02040503050406030204" pitchFamily="18" charset="0"/>
+                      </a:rPr>
+                      <m:t>,…,</m:t>
+                    </m:r>
+                    <m:sSub>
+                      <m:sSubPr>
+                        <m:ctrlPr>
+                          <a:rPr lang="en-US" altLang="ko-KR" sz="1400" b="0" i="1" smtClean="0">
+                            <a:latin typeface="Cambria Math" panose="02040503050406030204" pitchFamily="18" charset="0"/>
+                          </a:rPr>
+                        </m:ctrlPr>
+                      </m:sSubPr>
+                      <m:e>
+                        <m:r>
+                          <a:rPr lang="en-US" altLang="ko-KR" sz="1400" b="0" i="1" smtClean="0">
+                            <a:latin typeface="Cambria Math" panose="02040503050406030204" pitchFamily="18" charset="0"/>
+                          </a:rPr>
+                          <m:t>𝑤</m:t>
+                        </m:r>
+                      </m:e>
+                      <m:sub>
+                        <m:r>
+                          <a:rPr lang="en-US" altLang="ko-KR" sz="1400" b="0" i="1" smtClean="0">
+                            <a:latin typeface="Cambria Math" panose="02040503050406030204" pitchFamily="18" charset="0"/>
+                          </a:rPr>
+                          <m:t>3</m:t>
+                        </m:r>
+                      </m:sub>
+                    </m:sSub>
+                    <m:r>
+                      <a:rPr lang="en-US" altLang="ko-KR" sz="1400" b="0" i="1" smtClean="0">
+                        <a:latin typeface="Cambria Math" panose="02040503050406030204" pitchFamily="18" charset="0"/>
+                      </a:rPr>
+                      <m:t>)</m:t>
+                    </m:r>
+                  </m:oMath>
+                </a14:m>
+                <a:r>
+                  <a:rPr lang="ko-KR" altLang="en-US" sz="1400" dirty="0"/>
+                  <a:t>가 된다</a:t>
+                </a:r>
+                <a:r>
+                  <a:rPr lang="en-US" altLang="ko-KR" sz="1400" dirty="0"/>
+                  <a:t>.</a:t>
+                </a:r>
+              </a:p>
+              <a:p>
+                <a:pPr marL="742950" lvl="1" indent="-285750">
+                  <a:lnSpc>
+                    <a:spcPct val="150000"/>
+                  </a:lnSpc>
+                  <a:buFont typeface="맑은 고딕" panose="020B0503020000020004" pitchFamily="50" charset="-127"/>
+                  <a:buChar char="-"/>
+                </a:pPr>
+                <a:r>
+                  <a:rPr lang="en-US" altLang="ko-KR" sz="1400" dirty="0"/>
+                  <a:t>fig 3b</a:t>
+                </a:r>
+                <a:r>
+                  <a:rPr lang="ko-KR" altLang="en-US" sz="1400" dirty="0"/>
+                  <a:t>는 </a:t>
+                </a:r>
+                <a:r>
+                  <a:rPr lang="en-US" altLang="ko-KR" sz="1400" dirty="0"/>
+                  <a:t>potential h-arc </a:t>
+                </a:r>
+                <a14:m>
+                  <m:oMath xmlns:m="http://schemas.openxmlformats.org/officeDocument/2006/math">
+                    <m:sSub>
+                      <m:sSubPr>
+                        <m:ctrlPr>
+                          <a:rPr lang="en-US" altLang="ko-KR" sz="1400" b="0" i="1" smtClean="0">
+                            <a:latin typeface="Cambria Math" panose="02040503050406030204" pitchFamily="18" charset="0"/>
+                          </a:rPr>
+                        </m:ctrlPr>
+                      </m:sSubPr>
+                      <m:e>
+                        <m:r>
+                          <a:rPr lang="en-US" altLang="ko-KR" sz="1400" b="0" i="1" smtClean="0">
+                            <a:latin typeface="Cambria Math" panose="02040503050406030204" pitchFamily="18" charset="0"/>
+                          </a:rPr>
+                          <m:t>𝑉</m:t>
+                        </m:r>
+                      </m:e>
+                      <m:sub>
+                        <m:r>
+                          <a:rPr lang="en-US" altLang="ko-KR" sz="1400" b="0" i="1" smtClean="0">
+                            <a:latin typeface="Cambria Math" panose="02040503050406030204" pitchFamily="18" charset="0"/>
+                          </a:rPr>
+                          <m:t>2</m:t>
+                        </m:r>
+                      </m:sub>
+                    </m:sSub>
+                    <m:r>
+                      <a:rPr lang="en-US" altLang="ko-KR" sz="1400" b="0" i="1" smtClean="0">
+                        <a:latin typeface="Cambria Math" panose="02040503050406030204" pitchFamily="18" charset="0"/>
+                      </a:rPr>
+                      <m:t>−</m:t>
+                    </m:r>
+                    <m:sSub>
+                      <m:sSubPr>
+                        <m:ctrlPr>
+                          <a:rPr lang="en-US" altLang="ko-KR" sz="1400" b="0" i="1" smtClean="0">
+                            <a:latin typeface="Cambria Math" panose="02040503050406030204" pitchFamily="18" charset="0"/>
+                          </a:rPr>
+                        </m:ctrlPr>
+                      </m:sSubPr>
+                      <m:e>
+                        <m:r>
+                          <a:rPr lang="en-US" altLang="ko-KR" sz="1400" b="0" i="1" smtClean="0">
+                            <a:latin typeface="Cambria Math" panose="02040503050406030204" pitchFamily="18" charset="0"/>
+                          </a:rPr>
+                          <m:t>𝑉</m:t>
+                        </m:r>
+                      </m:e>
+                      <m:sub>
+                        <m:r>
+                          <a:rPr lang="en-US" altLang="ko-KR" sz="1400" b="0" i="1" smtClean="0">
+                            <a:latin typeface="Cambria Math" panose="02040503050406030204" pitchFamily="18" charset="0"/>
+                          </a:rPr>
+                          <m:t>3</m:t>
+                        </m:r>
+                      </m:sub>
+                    </m:sSub>
+                    <m:r>
+                      <a:rPr lang="ko-KR" altLang="en-US" sz="1400" i="1">
+                        <a:latin typeface="Cambria Math" panose="02040503050406030204" pitchFamily="18" charset="0"/>
+                      </a:rPr>
+                      <m:t>가</m:t>
+                    </m:r>
+                  </m:oMath>
+                </a14:m>
+                <a:r>
+                  <a:rPr lang="en-US" altLang="ko-KR" sz="1400" dirty="0"/>
+                  <a:t> </a:t>
+                </a:r>
+                <a:r>
+                  <a:rPr lang="ko-KR" altLang="en-US" sz="1400" dirty="0" err="1"/>
+                  <a:t>한개가</a:t>
+                </a:r>
+                <a:r>
+                  <a:rPr lang="ko-KR" altLang="en-US" sz="1400" dirty="0"/>
+                  <a:t> 존재하고</a:t>
+                </a:r>
+                <a:br>
+                  <a:rPr lang="en-US" altLang="ko-KR" sz="1400" dirty="0"/>
+                </a:br>
+                <a:r>
+                  <a:rPr lang="en-US" altLang="ko-KR" sz="1400" dirty="0"/>
+                  <a:t>upper </a:t>
+                </a:r>
+                <a:r>
+                  <a:rPr lang="en-US" altLang="ko-KR" sz="1400" dirty="0" err="1"/>
+                  <a:t>subpoly</a:t>
+                </a:r>
+                <a:r>
+                  <a:rPr lang="ko-KR" altLang="en-US" sz="1400" dirty="0"/>
+                  <a:t>의 </a:t>
+                </a:r>
+                <a:r>
+                  <a:rPr lang="en-US" altLang="ko-KR" sz="1400" dirty="0"/>
+                  <a:t>fan</a:t>
+                </a:r>
+                <a:r>
+                  <a:rPr lang="ko-KR" altLang="en-US" sz="1400" dirty="0"/>
+                  <a:t>은 </a:t>
+                </a:r>
+                <a14:m>
+                  <m:oMath xmlns:m="http://schemas.openxmlformats.org/officeDocument/2006/math">
+                    <m:r>
+                      <a:rPr lang="en-US" altLang="ko-KR" sz="1400" b="0" i="1" smtClean="0">
+                        <a:latin typeface="Cambria Math" panose="02040503050406030204" pitchFamily="18" charset="0"/>
+                      </a:rPr>
+                      <m:t>𝐹𝑎𝑛</m:t>
+                    </m:r>
+                    <m:r>
+                      <a:rPr lang="en-US" altLang="ko-KR" sz="1400" b="0" i="1" smtClean="0">
+                        <a:latin typeface="Cambria Math" panose="02040503050406030204" pitchFamily="18" charset="0"/>
+                      </a:rPr>
+                      <m:t>(</m:t>
+                    </m:r>
+                    <m:sSub>
+                      <m:sSubPr>
+                        <m:ctrlPr>
+                          <a:rPr lang="en-US" altLang="ko-KR" sz="1400" b="0" i="1" smtClean="0">
+                            <a:latin typeface="Cambria Math" panose="02040503050406030204" pitchFamily="18" charset="0"/>
+                          </a:rPr>
+                        </m:ctrlPr>
+                      </m:sSubPr>
+                      <m:e>
+                        <m:r>
+                          <a:rPr lang="en-US" altLang="ko-KR" sz="1400" b="0" i="1" smtClean="0">
+                            <a:latin typeface="Cambria Math" panose="02040503050406030204" pitchFamily="18" charset="0"/>
+                          </a:rPr>
+                          <m:t>𝑤</m:t>
+                        </m:r>
+                      </m:e>
+                      <m:sub>
+                        <m:r>
+                          <a:rPr lang="en-US" altLang="ko-KR" sz="1400" b="0" i="1" smtClean="0">
+                            <a:latin typeface="Cambria Math" panose="02040503050406030204" pitchFamily="18" charset="0"/>
+                          </a:rPr>
+                          <m:t>2</m:t>
+                        </m:r>
+                      </m:sub>
+                    </m:sSub>
+                    <m:r>
+                      <a:rPr lang="en-US" altLang="ko-KR" sz="1400" b="0" i="1" smtClean="0">
+                        <a:latin typeface="Cambria Math" panose="02040503050406030204" pitchFamily="18" charset="0"/>
+                      </a:rPr>
+                      <m:t>|</m:t>
+                    </m:r>
+                    <m:sSub>
+                      <m:sSubPr>
+                        <m:ctrlPr>
+                          <a:rPr lang="en-US" altLang="ko-KR" sz="1400" b="0" i="1" smtClean="0">
+                            <a:latin typeface="Cambria Math" panose="02040503050406030204" pitchFamily="18" charset="0"/>
+                          </a:rPr>
+                        </m:ctrlPr>
+                      </m:sSubPr>
+                      <m:e>
+                        <m:r>
+                          <a:rPr lang="en-US" altLang="ko-KR" sz="1400" b="0" i="1" smtClean="0">
+                            <a:latin typeface="Cambria Math" panose="02040503050406030204" pitchFamily="18" charset="0"/>
+                          </a:rPr>
+                          <m:t>𝑤</m:t>
+                        </m:r>
+                      </m:e>
+                      <m:sub>
+                        <m:r>
+                          <a:rPr lang="en-US" altLang="ko-KR" sz="1400" b="0" i="1" smtClean="0">
+                            <a:latin typeface="Cambria Math" panose="02040503050406030204" pitchFamily="18" charset="0"/>
+                          </a:rPr>
+                          <m:t>𝑐</m:t>
+                        </m:r>
+                      </m:sub>
+                    </m:sSub>
+                    <m:r>
+                      <a:rPr lang="en-US" altLang="ko-KR" sz="1400" b="0" i="1" smtClean="0">
+                        <a:latin typeface="Cambria Math" panose="02040503050406030204" pitchFamily="18" charset="0"/>
+                      </a:rPr>
+                      <m:t>,…,</m:t>
+                    </m:r>
+                    <m:sSub>
+                      <m:sSubPr>
+                        <m:ctrlPr>
+                          <a:rPr lang="en-US" altLang="ko-KR" sz="1400" b="0" i="1" smtClean="0">
+                            <a:latin typeface="Cambria Math" panose="02040503050406030204" pitchFamily="18" charset="0"/>
+                          </a:rPr>
+                        </m:ctrlPr>
+                      </m:sSubPr>
+                      <m:e>
+                        <m:r>
+                          <a:rPr lang="en-US" altLang="ko-KR" sz="1400" b="0" i="1" smtClean="0">
+                            <a:latin typeface="Cambria Math" panose="02040503050406030204" pitchFamily="18" charset="0"/>
+                          </a:rPr>
+                          <m:t>𝑤</m:t>
+                        </m:r>
+                      </m:e>
+                      <m:sub>
+                        <m:r>
+                          <a:rPr lang="en-US" altLang="ko-KR" sz="1400" b="0" i="1" smtClean="0">
+                            <a:latin typeface="Cambria Math" panose="02040503050406030204" pitchFamily="18" charset="0"/>
+                          </a:rPr>
+                          <m:t>3</m:t>
+                        </m:r>
+                      </m:sub>
+                    </m:sSub>
+                    <m:r>
+                      <a:rPr lang="en-US" altLang="ko-KR" sz="1400" b="0" i="1" smtClean="0">
+                        <a:latin typeface="Cambria Math" panose="02040503050406030204" pitchFamily="18" charset="0"/>
+                      </a:rPr>
+                      <m:t>)</m:t>
+                    </m:r>
+                  </m:oMath>
+                </a14:m>
+                <a:r>
+                  <a:rPr lang="ko-KR" altLang="en-US" sz="1400" dirty="0" err="1"/>
+                  <a:t>이되고</a:t>
+                </a:r>
+                <a:r>
+                  <a:rPr lang="ko-KR" altLang="en-US" sz="1400" dirty="0"/>
+                  <a:t> 나머지는 삼각형이다</a:t>
+                </a:r>
+                <a:r>
+                  <a:rPr lang="en-US" altLang="ko-KR" sz="1400" dirty="0"/>
+                  <a:t>.</a:t>
+                </a:r>
               </a:p>
             </p:txBody>
           </p:sp>
@@ -31240,7 +35434,7 @@
             <p:spPr>
               <a:xfrm>
                 <a:off x="264937" y="602281"/>
-                <a:ext cx="11662126" cy="1349472"/>
+                <a:ext cx="11662126" cy="4934749"/>
               </a:xfrm>
               <a:prstGeom prst="rect">
                 <a:avLst/>
@@ -31248,7 +35442,7 @@
               <a:blipFill>
                 <a:blip r:embed="rId2"/>
                 <a:stretch>
-                  <a:fillRect l="-261" b="-3620"/>
+                  <a:fillRect l="-261" b="-247"/>
                 </a:stretch>
               </a:blipFill>
             </p:spPr>
@@ -31267,6 +35461,36 @@
           </p:sp>
         </mc:Fallback>
       </mc:AlternateContent>
+      <p:pic>
+        <p:nvPicPr>
+          <p:cNvPr id="3" name="그림 2">
+            <a:extLst>
+              <a:ext uri="{FF2B5EF4-FFF2-40B4-BE49-F238E27FC236}">
+                <a16:creationId xmlns:a16="http://schemas.microsoft.com/office/drawing/2014/main" id="{68F116C6-7E92-E41A-3A43-A36E77091235}"/>
+              </a:ext>
+            </a:extLst>
+          </p:cNvPr>
+          <p:cNvPicPr>
+            <a:picLocks noChangeAspect="1"/>
+          </p:cNvPicPr>
+          <p:nvPr/>
+        </p:nvPicPr>
+        <p:blipFill>
+          <a:blip r:embed="rId3"/>
+          <a:stretch>
+            <a:fillRect/>
+          </a:stretch>
+        </p:blipFill>
+        <p:spPr>
+          <a:xfrm>
+            <a:off x="6727321" y="3795717"/>
+            <a:ext cx="4950018" cy="2849823"/>
+          </a:xfrm>
+          <a:prstGeom prst="rect">
+            <a:avLst/>
+          </a:prstGeom>
+        </p:spPr>
+      </p:pic>
     </p:spTree>
     <p:extLst>
       <p:ext uri="{BB962C8B-B14F-4D97-AF65-F5344CB8AC3E}">
